--- a/pentest-htb-ad/docs/AD-attacks-presentation.pptx
+++ b/pentest-htb-ad/docs/AD-attacks-presentation.pptx
@@ -17,9 +17,10 @@
     <p:sldId id="265" r:id="rId11"/>
     <p:sldId id="266" r:id="rId12"/>
     <p:sldId id="267" r:id="rId13"/>
+    <p:sldId id="268" r:id="rId14"/>
   </p:sldIdLst>
   <p:notesMasterIdLst>
-    <p:notesMasterId r:id="rId14"/>
+    <p:notesMasterId r:id="rId15"/>
   </p:notesMasterIdLst>
   <p:sldSz cx="12192000" cy="6858000"/>
   <p:notesSz cx="6858000" cy="12192000"/>
@@ -801,6 +802,94 @@
             <a:fld id="{F7021451-1387-4CA6-816F-3879F97B5CBC}" type="slidenum">
               <a:rPr lang="en-US"/>
               <a:t>12</a:t>
+            </a:fld>
+            <a:endParaRPr lang="en-US"/>
+          </a:p>
+        </p:txBody>
+      </p:sp>
+    </p:spTree>
+    <p:extLst>
+      <p:ext uri="{BB962C8B-B14F-4D97-AF65-F5344CB8AC3E}">
+        <p14:creationId xmlns:p14="http://schemas.microsoft.com/office/powerpoint/2010/main" val="1024086991"/>
+      </p:ext>
+    </p:extLst>
+  </p:cSld>
+  <p:clrMapOvr>
+    <a:masterClrMapping/>
+  </p:clrMapOvr>
+</p:notes>
+</file>
+
+<file path=ppt/notesSlides/notesSlide13.xml><?xml version="1.0" encoding="utf-8"?>
+<p:notes xmlns:a="http://schemas.openxmlformats.org/drawingml/2006/main" xmlns:r="http://schemas.openxmlformats.org/officeDocument/2006/relationships" xmlns:p="http://schemas.openxmlformats.org/presentationml/2006/main">
+  <p:cSld>
+    <p:spTree>
+      <p:nvGrpSpPr>
+        <p:cNvPr id="1" name=""/>
+        <p:cNvGrpSpPr/>
+        <p:nvPr/>
+      </p:nvGrpSpPr>
+      <p:grpSpPr>
+        <a:xfrm>
+          <a:off x="0" y="0"/>
+          <a:ext cx="0" cy="0"/>
+          <a:chOff x="0" y="0"/>
+          <a:chExt cx="0" cy="0"/>
+        </a:xfrm>
+      </p:grpSpPr>
+      <p:sp>
+        <p:nvSpPr>
+          <p:cNvPr id="2" name="Slide Image Placeholder 1"/>
+          <p:cNvSpPr>
+            <a:spLocks noGrp="1" noRot="1" noChangeAspect="1"/>
+          </p:cNvSpPr>
+          <p:nvPr>
+            <p:ph type="sldImg"/>
+          </p:nvPr>
+        </p:nvSpPr>
+        <p:spPr/>
+      </p:sp>
+      <p:sp>
+        <p:nvSpPr>
+          <p:cNvPr id="3" name="Notes Placeholder 2"/>
+          <p:cNvSpPr>
+            <a:spLocks noGrp="1"/>
+          </p:cNvSpPr>
+          <p:nvPr>
+            <p:ph type="body" idx="1"/>
+          </p:nvPr>
+        </p:nvSpPr>
+        <p:spPr/>
+        <p:txBody>
+          <a:bodyPr/>
+          <a:lstStyle/>
+          <a:p>
+            <a:r>
+              <a:rPr lang="en-US" dirty="0"/>
+              <a:t/>
+            </a:r>
+            <a:endParaRPr lang="en-US" dirty="0"/>
+          </a:p>
+        </p:txBody>
+      </p:sp>
+      <p:sp>
+        <p:nvSpPr>
+          <p:cNvPr id="4" name="Slide Number Placeholder 3"/>
+          <p:cNvSpPr>
+            <a:spLocks noGrp="1"/>
+          </p:cNvSpPr>
+          <p:nvPr>
+            <p:ph type="sldNum" sz="quarter" idx="10"/>
+          </p:nvPr>
+        </p:nvSpPr>
+        <p:spPr/>
+        <p:txBody>
+          <a:bodyPr/>
+          <a:lstStyle/>
+          <a:p>
+            <a:fld id="{F7021451-1387-4CA6-816F-3879F97B5CBC}" type="slidenum">
+              <a:rPr lang="en-US"/>
+              <a:t>13</a:t>
             </a:fld>
             <a:endParaRPr lang="en-US"/>
           </a:p>
@@ -2183,7 +2272,7 @@
                 <a:ea typeface="Arial" pitchFamily="34" charset="-122"/>
                 <a:cs typeface="Arial" pitchFamily="34" charset="-120"/>
               </a:rPr>
-              <a:t>ספרות מקצועית · מסגרות ותקנים</a:t>
+              <a:t>הגנה והתמודדות</a:t>
             </a:r>
             <a:endParaRPr lang="en-US" sz="3200" dirty="0"/>
           </a:p>
@@ -2222,7 +2311,7 @@
                 <a:ea typeface="Arial" pitchFamily="34" charset="-122"/>
                 <a:cs typeface="Arial" pitchFamily="34" charset="-120"/>
               </a:rPr>
-              <a:t>PROFESSIONAL LITERATURE — FRAMEWORKS &amp; STANDARDS</a:t>
+              <a:t>DEFENSE — MAPPING OFFENSE TO MITIGATION</a:t>
             </a:r>
             <a:endParaRPr lang="en-US" sz="1200" dirty="0"/>
           </a:p>
@@ -2236,12 +2325,127 @@
         </p:nvSpPr>
         <p:spPr>
           <a:xfrm>
-            <a:off x="548640" y="1554480"/>
-            <a:ext cx="11091672" cy="859536"/>
+            <a:off x="548640" y="1645920"/>
+            <a:ext cx="11091672" cy="987552"/>
           </a:xfrm>
           <a:prstGeom prst="roundRect">
             <a:avLst>
-              <a:gd name="adj" fmla="val 10638"/>
+              <a:gd name="adj" fmla="val 9259"/>
+            </a:avLst>
+          </a:prstGeom>
+          <a:solidFill>
+            <a:srgbClr val="1B3C63"/>
+          </a:solidFill>
+          <a:ln w="12700">
+            <a:solidFill>
+              <a:srgbClr val="24406B"/>
+            </a:solidFill>
+            <a:prstDash val="solid"/>
+          </a:ln>
+          <a:effectLst>
+            <a:outerShdw sx="100000" sy="100000" kx="0" ky="0" algn="bl" rotWithShape="0" blurRad="101600" dist="38100" dir="5400000">
+              <a:srgbClr val="05080F">
+                <a:alpha val="55000"/>
+              </a:srgbClr>
+            </a:outerShdw>
+          </a:effectLst>
+        </p:spPr>
+      </p:sp>
+      <p:sp>
+        <p:nvSpPr>
+          <p:cNvPr id="5" name="Text 3"/>
+          <p:cNvSpPr/>
+          <p:nvPr/>
+        </p:nvSpPr>
+        <p:spPr>
+          <a:xfrm>
+            <a:off x="7589520" y="1755648"/>
+            <a:ext cx="3840480" cy="768096"/>
+          </a:xfrm>
+          <a:prstGeom prst="rect">
+            <a:avLst/>
+          </a:prstGeom>
+          <a:noFill/>
+          <a:ln/>
+        </p:spPr>
+        <p:txBody>
+          <a:bodyPr wrap="square" rtlCol="0" anchor="ctr"/>
+          <a:lstStyle/>
+          <a:p>
+            <a:pPr algn="r" indent="0" marL="0">
+              <a:buNone/>
+            </a:pPr>
+            <a:r>
+              <a:rPr lang="en-US" sz="1550" b="1" dirty="0">
+                <a:solidFill>
+                  <a:srgbClr val="F5A623"/>
+                </a:solidFill>
+                <a:latin typeface="Arial" pitchFamily="34" charset="0"/>
+                <a:ea typeface="Arial" pitchFamily="34" charset="-122"/>
+                <a:cs typeface="Arial" pitchFamily="34" charset="-120"/>
+              </a:rPr>
+              <a:t>Kerberoasting / AS-REP</a:t>
+            </a:r>
+            <a:endParaRPr lang="en-US" sz="1550" dirty="0"/>
+          </a:p>
+        </p:txBody>
+      </p:sp>
+      <p:sp>
+        <p:nvSpPr>
+          <p:cNvPr id="6" name="Text 4"/>
+          <p:cNvSpPr/>
+          <p:nvPr/>
+        </p:nvSpPr>
+        <p:spPr>
+          <a:xfrm>
+            <a:off x="777240" y="1755648"/>
+            <a:ext cx="6675120" cy="768096"/>
+          </a:xfrm>
+          <a:prstGeom prst="rect">
+            <a:avLst/>
+          </a:prstGeom>
+          <a:noFill/>
+          <a:ln/>
+        </p:spPr>
+        <p:txBody>
+          <a:bodyPr wrap="square" rtlCol="0" anchor="ctr"/>
+          <a:lstStyle/>
+          <a:p>
+            <a:pPr rtl="1" algn="r" indent="0" marL="0">
+              <a:lnSpc>
+                <a:spcPct val="110000"/>
+              </a:lnSpc>
+              <a:buNone/>
+            </a:pPr>
+            <a:r>
+              <a:rPr lang="en-US" sz="1450" dirty="0">
+                <a:solidFill>
+                  <a:srgbClr val="EAF2FB"/>
+                </a:solidFill>
+                <a:latin typeface="Arial" pitchFamily="34" charset="0"/>
+                <a:ea typeface="Arial" pitchFamily="34" charset="-122"/>
+                <a:cs typeface="Arial" pitchFamily="34" charset="-120"/>
+              </a:rPr>
+              <a:t>gMSA · סיסמאות חזקות · הפעלת pre-auth · ניטור בקשות TGS חריגות</a:t>
+            </a:r>
+            <a:endParaRPr lang="en-US" sz="1450" dirty="0"/>
+          </a:p>
+        </p:txBody>
+      </p:sp>
+      <p:sp>
+        <p:nvSpPr>
+          <p:cNvPr id="7" name="Shape 5"/>
+          <p:cNvSpPr/>
+          <p:nvPr/>
+        </p:nvSpPr>
+        <p:spPr>
+          <a:xfrm>
+            <a:off x="548640" y="2743200"/>
+            <a:ext cx="11091672" cy="987552"/>
+          </a:xfrm>
+          <a:prstGeom prst="roundRect">
+            <a:avLst>
+              <a:gd name="adj" fmla="val 9259"/>
             </a:avLst>
           </a:prstGeom>
           <a:solidFill>
@@ -2264,24 +2468,107 @@
       </p:sp>
       <p:sp>
         <p:nvSpPr>
-          <p:cNvPr id="5" name="Shape 3"/>
-          <p:cNvSpPr/>
-          <p:nvPr/>
-        </p:nvSpPr>
-        <p:spPr>
-          <a:xfrm>
-            <a:off x="10881360" y="1700784"/>
-            <a:ext cx="566928" cy="566928"/>
-          </a:xfrm>
-          <a:prstGeom prst="oval">
-            <a:avLst/>
+          <p:cNvPr id="8" name="Text 6"/>
+          <p:cNvSpPr/>
+          <p:nvPr/>
+        </p:nvSpPr>
+        <p:spPr>
+          <a:xfrm>
+            <a:off x="7589520" y="2852928"/>
+            <a:ext cx="3840480" cy="768096"/>
+          </a:xfrm>
+          <a:prstGeom prst="rect">
+            <a:avLst/>
+          </a:prstGeom>
+          <a:noFill/>
+          <a:ln/>
+        </p:spPr>
+        <p:txBody>
+          <a:bodyPr wrap="square" rtlCol="0" anchor="ctr"/>
+          <a:lstStyle/>
+          <a:p>
+            <a:pPr algn="r" indent="0" marL="0">
+              <a:buNone/>
+            </a:pPr>
+            <a:r>
+              <a:rPr lang="en-US" sz="1550" b="1" dirty="0">
+                <a:solidFill>
+                  <a:srgbClr val="F5A623"/>
+                </a:solidFill>
+                <a:latin typeface="Arial" pitchFamily="34" charset="0"/>
+                <a:ea typeface="Arial" pitchFamily="34" charset="-122"/>
+                <a:cs typeface="Arial" pitchFamily="34" charset="-120"/>
+              </a:rPr>
+              <a:t>ACL / BloodHound paths</a:t>
+            </a:r>
+            <a:endParaRPr lang="en-US" sz="1550" dirty="0"/>
+          </a:p>
+        </p:txBody>
+      </p:sp>
+      <p:sp>
+        <p:nvSpPr>
+          <p:cNvPr id="9" name="Text 7"/>
+          <p:cNvSpPr/>
+          <p:nvPr/>
+        </p:nvSpPr>
+        <p:spPr>
+          <a:xfrm>
+            <a:off x="777240" y="2852928"/>
+            <a:ext cx="6675120" cy="768096"/>
+          </a:xfrm>
+          <a:prstGeom prst="rect">
+            <a:avLst/>
+          </a:prstGeom>
+          <a:noFill/>
+          <a:ln/>
+        </p:spPr>
+        <p:txBody>
+          <a:bodyPr wrap="square" rtlCol="0" anchor="ctr"/>
+          <a:lstStyle/>
+          <a:p>
+            <a:pPr rtl="1" algn="r" indent="0" marL="0">
+              <a:lnSpc>
+                <a:spcPct val="110000"/>
+              </a:lnSpc>
+              <a:buNone/>
+            </a:pPr>
+            <a:r>
+              <a:rPr lang="en-US" sz="1450" dirty="0">
+                <a:solidFill>
+                  <a:srgbClr val="EAF2FB"/>
+                </a:solidFill>
+                <a:latin typeface="Arial" pitchFamily="34" charset="0"/>
+                <a:ea typeface="Arial" pitchFamily="34" charset="-122"/>
+                <a:cs typeface="Arial" pitchFamily="34" charset="-120"/>
+              </a:rPr>
+              <a:t>עקרון ההרשאה המזערית · ביקורת ACL תקופתית · הסרת הרשאות עודפות</a:t>
+            </a:r>
+            <a:endParaRPr lang="en-US" sz="1450" dirty="0"/>
+          </a:p>
+        </p:txBody>
+      </p:sp>
+      <p:sp>
+        <p:nvSpPr>
+          <p:cNvPr id="10" name="Shape 8"/>
+          <p:cNvSpPr/>
+          <p:nvPr/>
+        </p:nvSpPr>
+        <p:spPr>
+          <a:xfrm>
+            <a:off x="548640" y="3840480"/>
+            <a:ext cx="11091672" cy="987552"/>
+          </a:xfrm>
+          <a:prstGeom prst="roundRect">
+            <a:avLst>
+              <a:gd name="adj" fmla="val 9259"/>
+            </a:avLst>
           </a:prstGeom>
           <a:solidFill>
-            <a:srgbClr val="35D0E0"/>
+            <a:srgbClr val="1B3C63"/>
           </a:solidFill>
           <a:ln w="12700">
             <a:solidFill>
-              <a:srgbClr val="35D0E0"/>
+              <a:srgbClr val="24406B"/>
             </a:solidFill>
             <a:prstDash val="solid"/>
           </a:ln>
@@ -2296,53 +2583,14 @@
       </p:sp>
       <p:sp>
         <p:nvSpPr>
-          <p:cNvPr id="6" name="Text 4"/>
-          <p:cNvSpPr/>
-          <p:nvPr/>
-        </p:nvSpPr>
-        <p:spPr>
-          <a:xfrm>
-            <a:off x="10881360" y="1700784"/>
-            <a:ext cx="566928" cy="566928"/>
-          </a:xfrm>
-          <a:prstGeom prst="rect">
-            <a:avLst/>
-          </a:prstGeom>
-          <a:noFill/>
-          <a:ln/>
-        </p:spPr>
-        <p:txBody>
-          <a:bodyPr wrap="square" rtlCol="0" anchor="ctr"/>
-          <a:lstStyle/>
-          <a:p>
-            <a:pPr algn="ctr" indent="0" marL="0">
-              <a:buNone/>
-            </a:pPr>
-            <a:r>
-              <a:rPr lang="en-US" sz="2000" b="1" dirty="0">
-                <a:solidFill>
-                  <a:srgbClr val="0C1626"/>
-                </a:solidFill>
-                <a:latin typeface="Arial" pitchFamily="34" charset="0"/>
-                <a:ea typeface="Arial" pitchFamily="34" charset="-122"/>
-                <a:cs typeface="Arial" pitchFamily="34" charset="-120"/>
-              </a:rPr>
-              <a:t>1</a:t>
-            </a:r>
-            <a:endParaRPr lang="en-US" sz="2000" dirty="0"/>
-          </a:p>
-        </p:txBody>
-      </p:sp>
-      <p:sp>
-        <p:nvSpPr>
-          <p:cNvPr id="7" name="Text 5"/>
-          <p:cNvSpPr/>
-          <p:nvPr/>
-        </p:nvSpPr>
-        <p:spPr>
-          <a:xfrm>
-            <a:off x="6035040" y="1645920"/>
-            <a:ext cx="4663440" cy="676656"/>
+          <p:cNvPr id="11" name="Text 9"/>
+          <p:cNvSpPr/>
+          <p:nvPr/>
+        </p:nvSpPr>
+        <p:spPr>
+          <a:xfrm>
+            <a:off x="7589520" y="3950208"/>
+            <a:ext cx="3840480" cy="768096"/>
           </a:xfrm>
           <a:prstGeom prst="rect">
             <a:avLst/>
@@ -2360,13 +2608,13 @@
             <a:r>
               <a:rPr lang="en-US" sz="1550" b="1" dirty="0">
                 <a:solidFill>
-                  <a:srgbClr val="EAF2FB"/>
-                </a:solidFill>
-                <a:latin typeface="Arial" pitchFamily="34" charset="0"/>
-                <a:ea typeface="Arial" pitchFamily="34" charset="-122"/>
-                <a:cs typeface="Arial" pitchFamily="34" charset="-120"/>
-              </a:rPr>
-              <a:t>MITRE ATT&amp;CK — Enterprise Matrix</a:t>
+                  <a:srgbClr val="F5A623"/>
+                </a:solidFill>
+                <a:latin typeface="Arial" pitchFamily="34" charset="0"/>
+                <a:ea typeface="Arial" pitchFamily="34" charset="-122"/>
+                <a:cs typeface="Arial" pitchFamily="34" charset="-120"/>
+              </a:rPr>
+              <a:t>Pass-the-Hash / Ticket</a:t>
             </a:r>
             <a:endParaRPr lang="en-US" sz="1550" dirty="0"/>
           </a:p>
@@ -2374,14 +2622,14 @@
       </p:sp>
       <p:sp>
         <p:nvSpPr>
-          <p:cNvPr id="8" name="Text 6"/>
-          <p:cNvSpPr/>
-          <p:nvPr/>
-        </p:nvSpPr>
-        <p:spPr>
-          <a:xfrm>
-            <a:off x="777240" y="1645920"/>
-            <a:ext cx="5120640" cy="676656"/>
+          <p:cNvPr id="12" name="Text 10"/>
+          <p:cNvSpPr/>
+          <p:nvPr/>
+        </p:nvSpPr>
+        <p:spPr>
+          <a:xfrm>
+            <a:off x="777240" y="3950208"/>
+            <a:ext cx="6675120" cy="768096"/>
           </a:xfrm>
           <a:prstGeom prst="rect">
             <a:avLst/>
@@ -2395,39 +2643,39 @@
           <a:p>
             <a:pPr rtl="1" algn="r" indent="0" marL="0">
               <a:lnSpc>
-                <a:spcPct val="105000"/>
+                <a:spcPct val="110000"/>
               </a:lnSpc>
               <a:buNone/>
             </a:pPr>
             <a:r>
-              <a:rPr lang="en-US" sz="1250" dirty="0">
-                <a:solidFill>
-                  <a:srgbClr val="9FB4CE"/>
-                </a:solidFill>
-                <a:latin typeface="Arial" pitchFamily="34" charset="0"/>
-                <a:ea typeface="Arial" pitchFamily="34" charset="-122"/>
-                <a:cs typeface="Arial" pitchFamily="34" charset="-120"/>
-              </a:rPr>
-              <a:t>טקסונומיה של טכניקות יריב (TA0006 Credential Access, TA0008 Lateral Movement ועוד). attack.mitre.org</a:t>
-            </a:r>
-            <a:endParaRPr lang="en-US" sz="1250" dirty="0"/>
-          </a:p>
-        </p:txBody>
-      </p:sp>
-      <p:sp>
-        <p:nvSpPr>
-          <p:cNvPr id="9" name="Shape 7"/>
-          <p:cNvSpPr/>
-          <p:nvPr/>
-        </p:nvSpPr>
-        <p:spPr>
-          <a:xfrm>
-            <a:off x="548640" y="2505456"/>
-            <a:ext cx="11091672" cy="859536"/>
+              <a:rPr lang="en-US" sz="1450" dirty="0">
+                <a:solidFill>
+                  <a:srgbClr val="EAF2FB"/>
+                </a:solidFill>
+                <a:latin typeface="Arial" pitchFamily="34" charset="0"/>
+                <a:ea typeface="Arial" pitchFamily="34" charset="-122"/>
+                <a:cs typeface="Arial" pitchFamily="34" charset="-120"/>
+              </a:rPr>
+              <a:t>מודל שכבות (Tiered / Enterprise Access) · Credential Guard · LAPS</a:t>
+            </a:r>
+            <a:endParaRPr lang="en-US" sz="1450" dirty="0"/>
+          </a:p>
+        </p:txBody>
+      </p:sp>
+      <p:sp>
+        <p:nvSpPr>
+          <p:cNvPr id="13" name="Shape 11"/>
+          <p:cNvSpPr/>
+          <p:nvPr/>
+        </p:nvSpPr>
+        <p:spPr>
+          <a:xfrm>
+            <a:off x="548640" y="4937760"/>
+            <a:ext cx="11091672" cy="987552"/>
           </a:xfrm>
           <a:prstGeom prst="roundRect">
             <a:avLst>
-              <a:gd name="adj" fmla="val 10638"/>
+              <a:gd name="adj" fmla="val 9259"/>
             </a:avLst>
           </a:prstGeom>
           <a:solidFill>
@@ -2450,85 +2698,14 @@
       </p:sp>
       <p:sp>
         <p:nvSpPr>
-          <p:cNvPr id="10" name="Shape 8"/>
-          <p:cNvSpPr/>
-          <p:nvPr/>
-        </p:nvSpPr>
-        <p:spPr>
-          <a:xfrm>
-            <a:off x="10881360" y="2651760"/>
-            <a:ext cx="566928" cy="566928"/>
-          </a:xfrm>
-          <a:prstGeom prst="oval">
-            <a:avLst/>
-          </a:prstGeom>
-          <a:solidFill>
-            <a:srgbClr val="35D0E0"/>
-          </a:solidFill>
-          <a:ln w="12700">
-            <a:solidFill>
-              <a:srgbClr val="35D0E0"/>
-            </a:solidFill>
-            <a:prstDash val="solid"/>
-          </a:ln>
-          <a:effectLst>
-            <a:outerShdw sx="100000" sy="100000" kx="0" ky="0" algn="bl" rotWithShape="0" blurRad="101600" dist="38100" dir="5400000">
-              <a:srgbClr val="05080F">
-                <a:alpha val="55000"/>
-              </a:srgbClr>
-            </a:outerShdw>
-          </a:effectLst>
-        </p:spPr>
-      </p:sp>
-      <p:sp>
-        <p:nvSpPr>
-          <p:cNvPr id="11" name="Text 9"/>
-          <p:cNvSpPr/>
-          <p:nvPr/>
-        </p:nvSpPr>
-        <p:spPr>
-          <a:xfrm>
-            <a:off x="10881360" y="2651760"/>
-            <a:ext cx="566928" cy="566928"/>
-          </a:xfrm>
-          <a:prstGeom prst="rect">
-            <a:avLst/>
-          </a:prstGeom>
-          <a:noFill/>
-          <a:ln/>
-        </p:spPr>
-        <p:txBody>
-          <a:bodyPr wrap="square" rtlCol="0" anchor="ctr"/>
-          <a:lstStyle/>
-          <a:p>
-            <a:pPr algn="ctr" indent="0" marL="0">
-              <a:buNone/>
-            </a:pPr>
-            <a:r>
-              <a:rPr lang="en-US" sz="2000" b="1" dirty="0">
-                <a:solidFill>
-                  <a:srgbClr val="0C1626"/>
-                </a:solidFill>
-                <a:latin typeface="Arial" pitchFamily="34" charset="0"/>
-                <a:ea typeface="Arial" pitchFamily="34" charset="-122"/>
-                <a:cs typeface="Arial" pitchFamily="34" charset="-120"/>
-              </a:rPr>
-              <a:t>2</a:t>
-            </a:r>
-            <a:endParaRPr lang="en-US" sz="2000" dirty="0"/>
-          </a:p>
-        </p:txBody>
-      </p:sp>
-      <p:sp>
-        <p:nvSpPr>
-          <p:cNvPr id="12" name="Text 10"/>
-          <p:cNvSpPr/>
-          <p:nvPr/>
-        </p:nvSpPr>
-        <p:spPr>
-          <a:xfrm>
-            <a:off x="6035040" y="2596896"/>
-            <a:ext cx="4663440" cy="676656"/>
+          <p:cNvPr id="14" name="Text 12"/>
+          <p:cNvSpPr/>
+          <p:nvPr/>
+        </p:nvSpPr>
+        <p:spPr>
+          <a:xfrm>
+            <a:off x="7589520" y="5047488"/>
+            <a:ext cx="3840480" cy="768096"/>
           </a:xfrm>
           <a:prstGeom prst="rect">
             <a:avLst/>
@@ -2546,13 +2723,13 @@
             <a:r>
               <a:rPr lang="en-US" sz="1550" b="1" dirty="0">
                 <a:solidFill>
-                  <a:srgbClr val="EAF2FB"/>
-                </a:solidFill>
-                <a:latin typeface="Arial" pitchFamily="34" charset="0"/>
-                <a:ea typeface="Arial" pitchFamily="34" charset="-122"/>
-                <a:cs typeface="Arial" pitchFamily="34" charset="-120"/>
-              </a:rPr>
-              <a:t>NIST SP 800-115</a:t>
+                  <a:srgbClr val="F5A623"/>
+                </a:solidFill>
+                <a:latin typeface="Arial" pitchFamily="34" charset="0"/>
+                <a:ea typeface="Arial" pitchFamily="34" charset="-122"/>
+                <a:cs typeface="Arial" pitchFamily="34" charset="-120"/>
+              </a:rPr>
+              <a:t>DCSync / Delegation / ADCS</a:t>
             </a:r>
             <a:endParaRPr lang="en-US" sz="1550" dirty="0"/>
           </a:p>
@@ -2560,14 +2737,14 @@
       </p:sp>
       <p:sp>
         <p:nvSpPr>
-          <p:cNvPr id="13" name="Text 11"/>
-          <p:cNvSpPr/>
-          <p:nvPr/>
-        </p:nvSpPr>
-        <p:spPr>
-          <a:xfrm>
-            <a:off x="777240" y="2596896"/>
-            <a:ext cx="5120640" cy="676656"/>
+          <p:cNvPr id="15" name="Text 13"/>
+          <p:cNvSpPr/>
+          <p:nvPr/>
+        </p:nvSpPr>
+        <p:spPr>
+          <a:xfrm>
+            <a:off x="777240" y="5047488"/>
+            <a:ext cx="6675120" cy="768096"/>
           </a:xfrm>
           <a:prstGeom prst="rect">
             <a:avLst/>
@@ -2581,90 +2758,24 @@
           <a:p>
             <a:pPr rtl="1" algn="r" indent="0" marL="0">
               <a:lnSpc>
-                <a:spcPct val="105000"/>
+                <a:spcPct val="110000"/>
               </a:lnSpc>
               <a:buNone/>
             </a:pPr>
             <a:r>
-              <a:rPr lang="en-US" sz="1250" dirty="0">
-                <a:solidFill>
-                  <a:srgbClr val="9FB4CE"/>
-                </a:solidFill>
-                <a:latin typeface="Arial" pitchFamily="34" charset="0"/>
-                <a:ea typeface="Arial" pitchFamily="34" charset="-122"/>
-                <a:cs typeface="Arial" pitchFamily="34" charset="-120"/>
-              </a:rPr>
-              <a:t>Technical Guide to Information Security Testing and Assessment — מתודולוגיית בדיקות רשמית.</a:t>
-            </a:r>
-            <a:endParaRPr lang="en-US" sz="1250" dirty="0"/>
-          </a:p>
-        </p:txBody>
-      </p:sp>
-      <p:sp>
-        <p:nvSpPr>
-          <p:cNvPr id="14" name="Shape 12"/>
-          <p:cNvSpPr/>
-          <p:nvPr/>
-        </p:nvSpPr>
-        <p:spPr>
-          <a:xfrm>
-            <a:off x="548640" y="3456432"/>
-            <a:ext cx="11091672" cy="859536"/>
-          </a:xfrm>
-          <a:prstGeom prst="roundRect">
-            <a:avLst>
-              <a:gd name="adj" fmla="val 10638"/>
-            </a:avLst>
-          </a:prstGeom>
-          <a:solidFill>
-            <a:srgbClr val="15294A"/>
-          </a:solidFill>
-          <a:ln w="12700">
-            <a:solidFill>
-              <a:srgbClr val="24406B"/>
-            </a:solidFill>
-            <a:prstDash val="solid"/>
-          </a:ln>
-          <a:effectLst>
-            <a:outerShdw sx="100000" sy="100000" kx="0" ky="0" algn="bl" rotWithShape="0" blurRad="101600" dist="38100" dir="5400000">
-              <a:srgbClr val="05080F">
-                <a:alpha val="55000"/>
-              </a:srgbClr>
-            </a:outerShdw>
-          </a:effectLst>
-        </p:spPr>
-      </p:sp>
-      <p:sp>
-        <p:nvSpPr>
-          <p:cNvPr id="15" name="Shape 13"/>
-          <p:cNvSpPr/>
-          <p:nvPr/>
-        </p:nvSpPr>
-        <p:spPr>
-          <a:xfrm>
-            <a:off x="10881360" y="3602736"/>
-            <a:ext cx="566928" cy="566928"/>
-          </a:xfrm>
-          <a:prstGeom prst="oval">
-            <a:avLst/>
-          </a:prstGeom>
-          <a:solidFill>
-            <a:srgbClr val="35D0E0"/>
-          </a:solidFill>
-          <a:ln w="12700">
-            <a:solidFill>
-              <a:srgbClr val="35D0E0"/>
-            </a:solidFill>
-            <a:prstDash val="solid"/>
-          </a:ln>
-          <a:effectLst>
-            <a:outerShdw sx="100000" sy="100000" kx="0" ky="0" algn="bl" rotWithShape="0" blurRad="101600" dist="38100" dir="5400000">
-              <a:srgbClr val="05080F">
-                <a:alpha val="55000"/>
-              </a:srgbClr>
-            </a:outerShdw>
-          </a:effectLst>
-        </p:spPr>
+              <a:rPr lang="en-US" sz="1450" dirty="0">
+                <a:solidFill>
+                  <a:srgbClr val="EAF2FB"/>
+                </a:solidFill>
+                <a:latin typeface="Arial" pitchFamily="34" charset="0"/>
+                <a:ea typeface="Arial" pitchFamily="34" charset="-122"/>
+                <a:cs typeface="Arial" pitchFamily="34" charset="-120"/>
+              </a:rPr>
+              <a:t>הגבלת הרשאות שכפול · חיזוק תבניות ADCS · ניטור אירועי 4662/4769</a:t>
+            </a:r>
+            <a:endParaRPr lang="en-US" sz="1450" dirty="0"/>
+          </a:p>
+        </p:txBody>
       </p:sp>
       <p:sp>
         <p:nvSpPr>
@@ -2674,565 +2785,34 @@
         </p:nvSpPr>
         <p:spPr>
           <a:xfrm>
-            <a:off x="10881360" y="3602736"/>
-            <a:ext cx="566928" cy="566928"/>
-          </a:xfrm>
-          <a:prstGeom prst="rect">
-            <a:avLst/>
-          </a:prstGeom>
-          <a:noFill/>
-          <a:ln/>
-        </p:spPr>
-        <p:txBody>
-          <a:bodyPr wrap="square" rtlCol="0" anchor="ctr"/>
-          <a:lstStyle/>
-          <a:p>
-            <a:pPr algn="ctr" indent="0" marL="0">
-              <a:buNone/>
-            </a:pPr>
-            <a:r>
-              <a:rPr lang="en-US" sz="2000" b="1" dirty="0">
-                <a:solidFill>
-                  <a:srgbClr val="0C1626"/>
-                </a:solidFill>
-                <a:latin typeface="Arial" pitchFamily="34" charset="0"/>
-                <a:ea typeface="Arial" pitchFamily="34" charset="-122"/>
-                <a:cs typeface="Arial" pitchFamily="34" charset="-120"/>
-              </a:rPr>
-              <a:t>3</a:t>
-            </a:r>
-            <a:endParaRPr lang="en-US" sz="2000" dirty="0"/>
-          </a:p>
-        </p:txBody>
-      </p:sp>
-      <p:sp>
-        <p:nvSpPr>
-          <p:cNvPr id="17" name="Text 15"/>
-          <p:cNvSpPr/>
-          <p:nvPr/>
-        </p:nvSpPr>
-        <p:spPr>
-          <a:xfrm>
-            <a:off x="6035040" y="3547872"/>
-            <a:ext cx="4663440" cy="676656"/>
-          </a:xfrm>
-          <a:prstGeom prst="rect">
-            <a:avLst/>
-          </a:prstGeom>
-          <a:noFill/>
-          <a:ln/>
-        </p:spPr>
-        <p:txBody>
-          <a:bodyPr wrap="square" rtlCol="0" anchor="ctr"/>
-          <a:lstStyle/>
-          <a:p>
-            <a:pPr algn="r" indent="0" marL="0">
-              <a:buNone/>
-            </a:pPr>
-            <a:r>
-              <a:rPr lang="en-US" sz="1550" b="1" dirty="0">
-                <a:solidFill>
-                  <a:srgbClr val="EAF2FB"/>
-                </a:solidFill>
-                <a:latin typeface="Arial" pitchFamily="34" charset="0"/>
-                <a:ea typeface="Arial" pitchFamily="34" charset="-122"/>
-                <a:cs typeface="Arial" pitchFamily="34" charset="-120"/>
-              </a:rPr>
-              <a:t>PTES — Penetration Testing Execution Standard</a:t>
-            </a:r>
-            <a:endParaRPr lang="en-US" sz="1550" dirty="0"/>
-          </a:p>
-        </p:txBody>
-      </p:sp>
-      <p:sp>
-        <p:nvSpPr>
-          <p:cNvPr id="18" name="Text 16"/>
-          <p:cNvSpPr/>
-          <p:nvPr/>
-        </p:nvSpPr>
-        <p:spPr>
-          <a:xfrm>
-            <a:off x="777240" y="3547872"/>
-            <a:ext cx="5120640" cy="676656"/>
-          </a:xfrm>
-          <a:prstGeom prst="rect">
-            <a:avLst/>
-          </a:prstGeom>
-          <a:noFill/>
-          <a:ln/>
-        </p:spPr>
-        <p:txBody>
-          <a:bodyPr wrap="square" rtlCol="0" anchor="ctr"/>
-          <a:lstStyle/>
-          <a:p>
-            <a:pPr rtl="1" algn="r" indent="0" marL="0">
-              <a:lnSpc>
-                <a:spcPct val="105000"/>
-              </a:lnSpc>
-              <a:buNone/>
-            </a:pPr>
-            <a:r>
-              <a:rPr lang="en-US" sz="1250" dirty="0">
-                <a:solidFill>
-                  <a:srgbClr val="9FB4CE"/>
-                </a:solidFill>
-                <a:latin typeface="Arial" pitchFamily="34" charset="0"/>
-                <a:ea typeface="Arial" pitchFamily="34" charset="-122"/>
-                <a:cs typeface="Arial" pitchFamily="34" charset="-120"/>
-              </a:rPr>
-              <a:t>תקן שלבי בדיקת חדירות: pre-engagement, intelligence, exploitation, reporting.</a:t>
-            </a:r>
-            <a:endParaRPr lang="en-US" sz="1250" dirty="0"/>
-          </a:p>
-        </p:txBody>
-      </p:sp>
-      <p:sp>
-        <p:nvSpPr>
-          <p:cNvPr id="19" name="Shape 17"/>
-          <p:cNvSpPr/>
-          <p:nvPr/>
-        </p:nvSpPr>
-        <p:spPr>
-          <a:xfrm>
-            <a:off x="548640" y="4407408"/>
-            <a:ext cx="11091672" cy="859536"/>
-          </a:xfrm>
-          <a:prstGeom prst="roundRect">
-            <a:avLst>
-              <a:gd name="adj" fmla="val 10638"/>
-            </a:avLst>
-          </a:prstGeom>
-          <a:solidFill>
-            <a:srgbClr val="15294A"/>
-          </a:solidFill>
-          <a:ln w="12700">
-            <a:solidFill>
-              <a:srgbClr val="24406B"/>
-            </a:solidFill>
-            <a:prstDash val="solid"/>
-          </a:ln>
-          <a:effectLst>
-            <a:outerShdw sx="100000" sy="100000" kx="0" ky="0" algn="bl" rotWithShape="0" blurRad="101600" dist="38100" dir="5400000">
-              <a:srgbClr val="05080F">
-                <a:alpha val="55000"/>
-              </a:srgbClr>
-            </a:outerShdw>
-          </a:effectLst>
-        </p:spPr>
-      </p:sp>
-      <p:sp>
-        <p:nvSpPr>
-          <p:cNvPr id="20" name="Shape 18"/>
-          <p:cNvSpPr/>
-          <p:nvPr/>
-        </p:nvSpPr>
-        <p:spPr>
-          <a:xfrm>
-            <a:off x="10881360" y="4553712"/>
-            <a:ext cx="566928" cy="566928"/>
-          </a:xfrm>
-          <a:prstGeom prst="oval">
-            <a:avLst/>
-          </a:prstGeom>
-          <a:solidFill>
-            <a:srgbClr val="2A7B8C"/>
-          </a:solidFill>
-          <a:ln w="12700">
-            <a:solidFill>
-              <a:srgbClr val="2A7B8C"/>
-            </a:solidFill>
-            <a:prstDash val="solid"/>
-          </a:ln>
-          <a:effectLst>
-            <a:outerShdw sx="100000" sy="100000" kx="0" ky="0" algn="bl" rotWithShape="0" blurRad="101600" dist="38100" dir="5400000">
-              <a:srgbClr val="05080F">
-                <a:alpha val="55000"/>
-              </a:srgbClr>
-            </a:outerShdw>
-          </a:effectLst>
-        </p:spPr>
-      </p:sp>
-      <p:sp>
-        <p:nvSpPr>
-          <p:cNvPr id="21" name="Text 19"/>
-          <p:cNvSpPr/>
-          <p:nvPr/>
-        </p:nvSpPr>
-        <p:spPr>
-          <a:xfrm>
-            <a:off x="10881360" y="4553712"/>
-            <a:ext cx="566928" cy="566928"/>
-          </a:xfrm>
-          <a:prstGeom prst="rect">
-            <a:avLst/>
-          </a:prstGeom>
-          <a:noFill/>
-          <a:ln/>
-        </p:spPr>
-        <p:txBody>
-          <a:bodyPr wrap="square" rtlCol="0" anchor="ctr"/>
-          <a:lstStyle/>
-          <a:p>
-            <a:pPr algn="ctr" indent="0" marL="0">
-              <a:buNone/>
-            </a:pPr>
-            <a:r>
-              <a:rPr lang="en-US" sz="2000" b="1" dirty="0">
-                <a:solidFill>
-                  <a:srgbClr val="0C1626"/>
-                </a:solidFill>
-                <a:latin typeface="Arial" pitchFamily="34" charset="0"/>
-                <a:ea typeface="Arial" pitchFamily="34" charset="-122"/>
-                <a:cs typeface="Arial" pitchFamily="34" charset="-120"/>
-              </a:rPr>
-              <a:t>4</a:t>
-            </a:r>
-            <a:endParaRPr lang="en-US" sz="2000" dirty="0"/>
-          </a:p>
-        </p:txBody>
-      </p:sp>
-      <p:sp>
-        <p:nvSpPr>
-          <p:cNvPr id="22" name="Text 20"/>
-          <p:cNvSpPr/>
-          <p:nvPr/>
-        </p:nvSpPr>
-        <p:spPr>
-          <a:xfrm>
-            <a:off x="6035040" y="4498848"/>
-            <a:ext cx="4663440" cy="676656"/>
-          </a:xfrm>
-          <a:prstGeom prst="rect">
-            <a:avLst/>
-          </a:prstGeom>
-          <a:noFill/>
-          <a:ln/>
-        </p:spPr>
-        <p:txBody>
-          <a:bodyPr wrap="square" rtlCol="0" anchor="ctr"/>
-          <a:lstStyle/>
-          <a:p>
-            <a:pPr algn="r" indent="0" marL="0">
-              <a:buNone/>
-            </a:pPr>
-            <a:r>
-              <a:rPr lang="en-US" sz="1550" b="1" dirty="0">
-                <a:solidFill>
-                  <a:srgbClr val="EAF2FB"/>
-                </a:solidFill>
-                <a:latin typeface="Arial" pitchFamily="34" charset="0"/>
-                <a:ea typeface="Arial" pitchFamily="34" charset="-122"/>
-                <a:cs typeface="Arial" pitchFamily="34" charset="-120"/>
-              </a:rPr>
-              <a:t>OWASP Testing Guide / WSTG</a:t>
-            </a:r>
-            <a:endParaRPr lang="en-US" sz="1550" dirty="0"/>
-          </a:p>
-        </p:txBody>
-      </p:sp>
-      <p:sp>
-        <p:nvSpPr>
-          <p:cNvPr id="23" name="Text 21"/>
-          <p:cNvSpPr/>
-          <p:nvPr/>
-        </p:nvSpPr>
-        <p:spPr>
-          <a:xfrm>
-            <a:off x="777240" y="4498848"/>
-            <a:ext cx="5120640" cy="676656"/>
-          </a:xfrm>
-          <a:prstGeom prst="rect">
-            <a:avLst/>
-          </a:prstGeom>
-          <a:noFill/>
-          <a:ln/>
-        </p:spPr>
-        <p:txBody>
-          <a:bodyPr wrap="square" rtlCol="0" anchor="ctr"/>
-          <a:lstStyle/>
-          <a:p>
-            <a:pPr rtl="1" algn="r" indent="0" marL="0">
-              <a:lnSpc>
-                <a:spcPct val="105000"/>
-              </a:lnSpc>
-              <a:buNone/>
-            </a:pPr>
-            <a:r>
-              <a:rPr lang="en-US" sz="1250" dirty="0">
-                <a:solidFill>
-                  <a:srgbClr val="9FB4CE"/>
-                </a:solidFill>
-                <a:latin typeface="Arial" pitchFamily="34" charset="0"/>
-                <a:ea typeface="Arial" pitchFamily="34" charset="-122"/>
-                <a:cs typeface="Arial" pitchFamily="34" charset="-120"/>
-              </a:rPr>
-              <a:t>מסגרת בדיקות אבטחה, רלוונטית לשלב ה-foothold מבוסס-Web של מכונות רבות.</a:t>
-            </a:r>
-            <a:endParaRPr lang="en-US" sz="1250" dirty="0"/>
-          </a:p>
-        </p:txBody>
-      </p:sp>
-      <p:sp>
-        <p:nvSpPr>
-          <p:cNvPr id="24" name="Shape 22"/>
-          <p:cNvSpPr/>
-          <p:nvPr/>
-        </p:nvSpPr>
-        <p:spPr>
-          <a:xfrm>
-            <a:off x="548640" y="5358384"/>
-            <a:ext cx="11091672" cy="859536"/>
-          </a:xfrm>
-          <a:prstGeom prst="roundRect">
-            <a:avLst>
-              <a:gd name="adj" fmla="val 10638"/>
-            </a:avLst>
-          </a:prstGeom>
-          <a:solidFill>
-            <a:srgbClr val="15294A"/>
-          </a:solidFill>
-          <a:ln w="12700">
-            <a:solidFill>
-              <a:srgbClr val="24406B"/>
-            </a:solidFill>
-            <a:prstDash val="solid"/>
-          </a:ln>
-          <a:effectLst>
-            <a:outerShdw sx="100000" sy="100000" kx="0" ky="0" algn="bl" rotWithShape="0" blurRad="101600" dist="38100" dir="5400000">
-              <a:srgbClr val="05080F">
-                <a:alpha val="55000"/>
-              </a:srgbClr>
-            </a:outerShdw>
-          </a:effectLst>
-        </p:spPr>
-      </p:sp>
-      <p:sp>
-        <p:nvSpPr>
-          <p:cNvPr id="25" name="Shape 23"/>
-          <p:cNvSpPr/>
-          <p:nvPr/>
-        </p:nvSpPr>
-        <p:spPr>
-          <a:xfrm>
-            <a:off x="10881360" y="5504688"/>
-            <a:ext cx="566928" cy="566928"/>
-          </a:xfrm>
-          <a:prstGeom prst="oval">
-            <a:avLst/>
-          </a:prstGeom>
-          <a:solidFill>
-            <a:srgbClr val="2A7B8C"/>
-          </a:solidFill>
-          <a:ln w="12700">
-            <a:solidFill>
-              <a:srgbClr val="2A7B8C"/>
-            </a:solidFill>
-            <a:prstDash val="solid"/>
-          </a:ln>
-          <a:effectLst>
-            <a:outerShdw sx="100000" sy="100000" kx="0" ky="0" algn="bl" rotWithShape="0" blurRad="101600" dist="38100" dir="5400000">
-              <a:srgbClr val="05080F">
-                <a:alpha val="55000"/>
-              </a:srgbClr>
-            </a:outerShdw>
-          </a:effectLst>
-        </p:spPr>
-      </p:sp>
-      <p:sp>
-        <p:nvSpPr>
-          <p:cNvPr id="26" name="Text 24"/>
-          <p:cNvSpPr/>
-          <p:nvPr/>
-        </p:nvSpPr>
-        <p:spPr>
-          <a:xfrm>
-            <a:off x="10881360" y="5504688"/>
-            <a:ext cx="566928" cy="566928"/>
-          </a:xfrm>
-          <a:prstGeom prst="rect">
-            <a:avLst/>
-          </a:prstGeom>
-          <a:noFill/>
-          <a:ln/>
-        </p:spPr>
-        <p:txBody>
-          <a:bodyPr wrap="square" rtlCol="0" anchor="ctr"/>
-          <a:lstStyle/>
-          <a:p>
-            <a:pPr algn="ctr" indent="0" marL="0">
-              <a:buNone/>
-            </a:pPr>
-            <a:r>
-              <a:rPr lang="en-US" sz="2000" b="1" dirty="0">
-                <a:solidFill>
-                  <a:srgbClr val="0C1626"/>
-                </a:solidFill>
-                <a:latin typeface="Arial" pitchFamily="34" charset="0"/>
-                <a:ea typeface="Arial" pitchFamily="34" charset="-122"/>
-                <a:cs typeface="Arial" pitchFamily="34" charset="-120"/>
-              </a:rPr>
-              <a:t>5</a:t>
-            </a:r>
-            <a:endParaRPr lang="en-US" sz="2000" dirty="0"/>
-          </a:p>
-        </p:txBody>
-      </p:sp>
-      <p:sp>
-        <p:nvSpPr>
-          <p:cNvPr id="27" name="Text 25"/>
-          <p:cNvSpPr/>
-          <p:nvPr/>
-        </p:nvSpPr>
-        <p:spPr>
-          <a:xfrm>
-            <a:off x="6035040" y="5449824"/>
-            <a:ext cx="4663440" cy="676656"/>
-          </a:xfrm>
-          <a:prstGeom prst="rect">
-            <a:avLst/>
-          </a:prstGeom>
-          <a:noFill/>
-          <a:ln/>
-        </p:spPr>
-        <p:txBody>
-          <a:bodyPr wrap="square" rtlCol="0" anchor="ctr"/>
-          <a:lstStyle/>
-          <a:p>
-            <a:pPr algn="r" indent="0" marL="0">
-              <a:buNone/>
-            </a:pPr>
-            <a:r>
-              <a:rPr lang="en-US" sz="1550" b="1" dirty="0">
-                <a:solidFill>
-                  <a:srgbClr val="EAF2FB"/>
-                </a:solidFill>
-                <a:latin typeface="Arial" pitchFamily="34" charset="0"/>
-                <a:ea typeface="Arial" pitchFamily="34" charset="-122"/>
-                <a:cs typeface="Arial" pitchFamily="34" charset="-120"/>
-              </a:rPr>
-              <a:t>Microsoft — Securing Active Directory</a:t>
-            </a:r>
-            <a:endParaRPr lang="en-US" sz="1550" dirty="0"/>
-          </a:p>
-        </p:txBody>
-      </p:sp>
-      <p:sp>
-        <p:nvSpPr>
-          <p:cNvPr id="28" name="Text 26"/>
-          <p:cNvSpPr/>
-          <p:nvPr/>
-        </p:nvSpPr>
-        <p:spPr>
-          <a:xfrm>
-            <a:off x="777240" y="5449824"/>
-            <a:ext cx="5120640" cy="676656"/>
-          </a:xfrm>
-          <a:prstGeom prst="rect">
-            <a:avLst/>
-          </a:prstGeom>
-          <a:noFill/>
-          <a:ln/>
-        </p:spPr>
-        <p:txBody>
-          <a:bodyPr wrap="square" rtlCol="0" anchor="ctr"/>
-          <a:lstStyle/>
-          <a:p>
-            <a:pPr rtl="1" algn="r" indent="0" marL="0">
-              <a:lnSpc>
-                <a:spcPct val="105000"/>
-              </a:lnSpc>
-              <a:buNone/>
-            </a:pPr>
-            <a:r>
-              <a:rPr lang="en-US" sz="1250" dirty="0">
-                <a:solidFill>
-                  <a:srgbClr val="9FB4CE"/>
-                </a:solidFill>
-                <a:latin typeface="Arial" pitchFamily="34" charset="0"/>
-                <a:ea typeface="Arial" pitchFamily="34" charset="-122"/>
-                <a:cs typeface="Arial" pitchFamily="34" charset="-120"/>
-              </a:rPr>
-              <a:t>Best Practices for Securing AD · Tiered Administrative / Enterprise Access Model.</a:t>
-            </a:r>
-            <a:endParaRPr lang="en-US" sz="1250" dirty="0"/>
-          </a:p>
-        </p:txBody>
-      </p:sp>
-      <p:sp>
-        <p:nvSpPr>
-          <p:cNvPr id="29" name="Text 27"/>
-          <p:cNvSpPr/>
-          <p:nvPr/>
-        </p:nvSpPr>
-        <p:spPr>
-          <a:xfrm>
-            <a:off x="548640" y="6419088"/>
-            <a:ext cx="5486400" cy="274320"/>
-          </a:xfrm>
-          <a:prstGeom prst="rect">
-            <a:avLst/>
-          </a:prstGeom>
-          <a:noFill/>
-          <a:ln/>
-        </p:spPr>
-        <p:txBody>
-          <a:bodyPr wrap="square" rtlCol="0" anchor="ctr"/>
-          <a:lstStyle/>
-          <a:p>
-            <a:pPr algn="l" indent="0" marL="0">
-              <a:buNone/>
-            </a:pPr>
-            <a:r>
-              <a:rPr lang="en-US" sz="900" dirty="0">
-                <a:solidFill>
-                  <a:srgbClr val="9FB4CE"/>
-                </a:solidFill>
-                <a:latin typeface="Arial" pitchFamily="34" charset="0"/>
-                <a:ea typeface="Arial" pitchFamily="34" charset="-122"/>
-                <a:cs typeface="Arial" pitchFamily="34" charset="-120"/>
-              </a:rPr>
-              <a:t>netanelcyber · HAMIVTZAR</a:t>
-            </a:r>
-            <a:endParaRPr lang="en-US" sz="900" dirty="0"/>
-          </a:p>
-        </p:txBody>
-      </p:sp>
-      <p:sp>
-        <p:nvSpPr>
-          <p:cNvPr id="30" name="Text 28"/>
-          <p:cNvSpPr/>
-          <p:nvPr/>
-        </p:nvSpPr>
-        <p:spPr>
-          <a:xfrm>
-            <a:off x="4572000" y="6419088"/>
-            <a:ext cx="7068312" cy="274320"/>
-          </a:xfrm>
-          <a:prstGeom prst="rect">
-            <a:avLst/>
-          </a:prstGeom>
-          <a:noFill/>
-          <a:ln/>
-        </p:spPr>
-        <p:txBody>
-          <a:bodyPr wrap="square" rtlCol="0" anchor="ctr"/>
-          <a:lstStyle/>
-          <a:p>
-            <a:pPr rtl="1" algn="r" indent="0" marL="0">
-              <a:buNone/>
-            </a:pPr>
-            <a:r>
-              <a:rPr lang="en-US" sz="900" dirty="0">
-                <a:solidFill>
-                  <a:srgbClr val="9FB4CE"/>
-                </a:solidFill>
-                <a:latin typeface="Arial" pitchFamily="34" charset="0"/>
-                <a:ea typeface="Arial" pitchFamily="34" charset="-122"/>
-                <a:cs typeface="Arial" pitchFamily="34" charset="-120"/>
-              </a:rPr>
-              <a:t>סביבת אימון מורשית (Hack The Box) — למטרות חינוכיות בלבד</a:t>
-            </a:r>
-            <a:endParaRPr lang="en-US" sz="900" dirty="0"/>
+            <a:off x="548640" y="6080760"/>
+            <a:ext cx="11091672" cy="365760"/>
+          </a:xfrm>
+          <a:prstGeom prst="rect">
+            <a:avLst/>
+          </a:prstGeom>
+          <a:noFill/>
+          <a:ln/>
+        </p:spPr>
+        <p:txBody>
+          <a:bodyPr wrap="square" rtlCol="0" anchor="ctr"/>
+          <a:lstStyle/>
+          <a:p>
+            <a:pPr rtl="1" algn="ctr" indent="0" marL="0">
+              <a:buNone/>
+            </a:pPr>
+            <a:r>
+              <a:rPr lang="en-US" sz="1300" dirty="0">
+                <a:solidFill>
+                  <a:srgbClr val="35D0E0"/>
+                </a:solidFill>
+                <a:latin typeface="Arial" pitchFamily="34" charset="0"/>
+                <a:ea typeface="Arial" pitchFamily="34" charset="-122"/>
+                <a:cs typeface="Arial" pitchFamily="34" charset="-120"/>
+              </a:rPr>
+              <a:t>מיפוי מלא של כל טכניקה למזהי MITRE ATT&amp;CK מופיע במאמר המלווה ובקבצי ה-findings.</a:t>
+            </a:r>
+            <a:endParaRPr lang="en-US" sz="1300" dirty="0"/>
           </a:p>
         </p:txBody>
       </p:sp>
@@ -3301,7 +2881,7 @@
                 <a:ea typeface="Arial" pitchFamily="34" charset="-122"/>
                 <a:cs typeface="Arial" pitchFamily="34" charset="-120"/>
               </a:rPr>
-              <a:t>ספרות מקצועית · מחקרים, כלים וספרים</a:t>
+              <a:t>ספרות מקצועית · מסגרות ותקנים</a:t>
             </a:r>
             <a:endParaRPr lang="en-US" sz="3200" dirty="0"/>
           </a:p>
@@ -3340,7 +2920,7 @@
                 <a:ea typeface="Arial" pitchFamily="34" charset="-122"/>
                 <a:cs typeface="Arial" pitchFamily="34" charset="-120"/>
               </a:rPr>
-              <a:t>SEMINAL RESEARCH · TOOLING · BOOKS</a:t>
+              <a:t>PROFESSIONAL LITERATURE — FRAMEWORKS &amp; STANDARDS</a:t>
             </a:r>
             <a:endParaRPr lang="en-US" sz="1200" dirty="0"/>
           </a:p>
@@ -3354,12 +2934,12 @@
         </p:nvSpPr>
         <p:spPr>
           <a:xfrm>
-            <a:off x="8065008" y="1554480"/>
-            <a:ext cx="3575304" cy="4526280"/>
+            <a:off x="548640" y="1554480"/>
+            <a:ext cx="11091672" cy="859536"/>
           </a:xfrm>
           <a:prstGeom prst="roundRect">
             <a:avLst>
-              <a:gd name="adj" fmla="val 2558"/>
+              <a:gd name="adj" fmla="val 10638"/>
             </a:avLst>
           </a:prstGeom>
           <a:solidFill>
@@ -3382,14 +2962,85 @@
       </p:sp>
       <p:sp>
         <p:nvSpPr>
-          <p:cNvPr id="5" name="Text 3"/>
-          <p:cNvSpPr/>
-          <p:nvPr/>
-        </p:nvSpPr>
-        <p:spPr>
-          <a:xfrm>
-            <a:off x="8266176" y="1691640"/>
-            <a:ext cx="3200400" cy="457200"/>
+          <p:cNvPr id="5" name="Shape 3"/>
+          <p:cNvSpPr/>
+          <p:nvPr/>
+        </p:nvSpPr>
+        <p:spPr>
+          <a:xfrm>
+            <a:off x="10881360" y="1700784"/>
+            <a:ext cx="566928" cy="566928"/>
+          </a:xfrm>
+          <a:prstGeom prst="oval">
+            <a:avLst/>
+          </a:prstGeom>
+          <a:solidFill>
+            <a:srgbClr val="35D0E0"/>
+          </a:solidFill>
+          <a:ln w="12700">
+            <a:solidFill>
+              <a:srgbClr val="35D0E0"/>
+            </a:solidFill>
+            <a:prstDash val="solid"/>
+          </a:ln>
+          <a:effectLst>
+            <a:outerShdw sx="100000" sy="100000" kx="0" ky="0" algn="bl" rotWithShape="0" blurRad="101600" dist="38100" dir="5400000">
+              <a:srgbClr val="05080F">
+                <a:alpha val="55000"/>
+              </a:srgbClr>
+            </a:outerShdw>
+          </a:effectLst>
+        </p:spPr>
+      </p:sp>
+      <p:sp>
+        <p:nvSpPr>
+          <p:cNvPr id="6" name="Text 4"/>
+          <p:cNvSpPr/>
+          <p:nvPr/>
+        </p:nvSpPr>
+        <p:spPr>
+          <a:xfrm>
+            <a:off x="10881360" y="1700784"/>
+            <a:ext cx="566928" cy="566928"/>
+          </a:xfrm>
+          <a:prstGeom prst="rect">
+            <a:avLst/>
+          </a:prstGeom>
+          <a:noFill/>
+          <a:ln/>
+        </p:spPr>
+        <p:txBody>
+          <a:bodyPr wrap="square" rtlCol="0" anchor="ctr"/>
+          <a:lstStyle/>
+          <a:p>
+            <a:pPr algn="ctr" indent="0" marL="0">
+              <a:buNone/>
+            </a:pPr>
+            <a:r>
+              <a:rPr lang="en-US" sz="2000" b="1" dirty="0">
+                <a:solidFill>
+                  <a:srgbClr val="0C1626"/>
+                </a:solidFill>
+                <a:latin typeface="Arial" pitchFamily="34" charset="0"/>
+                <a:ea typeface="Arial" pitchFamily="34" charset="-122"/>
+                <a:cs typeface="Arial" pitchFamily="34" charset="-120"/>
+              </a:rPr>
+              <a:t>1</a:t>
+            </a:r>
+            <a:endParaRPr lang="en-US" sz="2000" dirty="0"/>
+          </a:p>
+        </p:txBody>
+      </p:sp>
+      <p:sp>
+        <p:nvSpPr>
+          <p:cNvPr id="7" name="Text 5"/>
+          <p:cNvSpPr/>
+          <p:nvPr/>
+        </p:nvSpPr>
+        <p:spPr>
+          <a:xfrm>
+            <a:off x="6035040" y="1645920"/>
+            <a:ext cx="4663440" cy="676656"/>
           </a:xfrm>
           <a:prstGeom prst="rect">
             <a:avLst/>
@@ -3405,176 +3056,76 @@
               <a:buNone/>
             </a:pPr>
             <a:r>
-              <a:rPr lang="en-US" sz="1600" b="1" dirty="0">
-                <a:solidFill>
-                  <a:srgbClr val="35D0E0"/>
-                </a:solidFill>
-                <a:latin typeface="Arial" pitchFamily="34" charset="0"/>
-                <a:ea typeface="Arial" pitchFamily="34" charset="-122"/>
-                <a:cs typeface="Arial" pitchFamily="34" charset="-120"/>
-              </a:rPr>
-              <a:t>מחקר פורץ-דרך</a:t>
-            </a:r>
-            <a:endParaRPr lang="en-US" sz="1600" dirty="0"/>
-          </a:p>
-        </p:txBody>
-      </p:sp>
-      <p:sp>
-        <p:nvSpPr>
-          <p:cNvPr id="6" name="Text 4"/>
-          <p:cNvSpPr/>
-          <p:nvPr/>
-        </p:nvSpPr>
-        <p:spPr>
-          <a:xfrm>
-            <a:off x="8266176" y="2240280"/>
-            <a:ext cx="3200400" cy="3657600"/>
-          </a:xfrm>
-          <a:prstGeom prst="rect">
-            <a:avLst/>
-          </a:prstGeom>
-          <a:noFill/>
-          <a:ln/>
-        </p:spPr>
-        <p:txBody>
-          <a:bodyPr wrap="square" rtlCol="0" anchor="ctr"/>
-          <a:lstStyle/>
-          <a:p>
-            <a:pPr algn="r" marL="342900" indent="-342900">
+              <a:rPr lang="en-US" sz="1550" b="1" dirty="0">
+                <a:solidFill>
+                  <a:srgbClr val="EAF2FB"/>
+                </a:solidFill>
+                <a:latin typeface="Arial" pitchFamily="34" charset="0"/>
+                <a:ea typeface="Arial" pitchFamily="34" charset="-122"/>
+                <a:cs typeface="Arial" pitchFamily="34" charset="-120"/>
+              </a:rPr>
+              <a:t>MITRE ATT&amp;CK — Enterprise Matrix</a:t>
+            </a:r>
+            <a:endParaRPr lang="en-US" sz="1550" dirty="0"/>
+          </a:p>
+        </p:txBody>
+      </p:sp>
+      <p:sp>
+        <p:nvSpPr>
+          <p:cNvPr id="8" name="Text 6"/>
+          <p:cNvSpPr/>
+          <p:nvPr/>
+        </p:nvSpPr>
+        <p:spPr>
+          <a:xfrm>
+            <a:off x="777240" y="1645920"/>
+            <a:ext cx="5120640" cy="676656"/>
+          </a:xfrm>
+          <a:prstGeom prst="rect">
+            <a:avLst/>
+          </a:prstGeom>
+          <a:noFill/>
+          <a:ln/>
+        </p:spPr>
+        <p:txBody>
+          <a:bodyPr wrap="square" rtlCol="0" anchor="ctr"/>
+          <a:lstStyle/>
+          <a:p>
+            <a:pPr rtl="1" algn="r" indent="0" marL="0">
               <a:lnSpc>
-                <a:spcPct val="108000"/>
+                <a:spcPct val="105000"/>
               </a:lnSpc>
-              <a:spcAft>
-                <a:spcPts val="900"/>
-              </a:spcAft>
-              <a:buSzPct val="100000"/>
-              <a:buChar char="•"/>
-            </a:pPr>
-            <a:r>
-              <a:rPr lang="en-US" sz="1150" dirty="0">
-                <a:solidFill>
-                  <a:srgbClr val="EAF2FB"/>
-                </a:solidFill>
-                <a:latin typeface="Arial" pitchFamily="34" charset="0"/>
-                <a:ea typeface="Arial" pitchFamily="34" charset="-122"/>
-                <a:cs typeface="Arial" pitchFamily="34" charset="-120"/>
-              </a:rPr>
-              <a:t>Medin — Attacking Kerberos: Kicking the Guard Dog of Hades (DerbyCon 2014)</a:t>
-            </a:r>
-            <a:endParaRPr lang="en-US" sz="1150" dirty="0"/>
-          </a:p>
-          <a:p>
-            <a:pPr algn="r" marL="342900" indent="-342900">
-              <a:lnSpc>
-                <a:spcPct val="108000"/>
-              </a:lnSpc>
-              <a:spcAft>
-                <a:spcPts val="900"/>
-              </a:spcAft>
-              <a:buSzPct val="100000"/>
-              <a:buChar char="•"/>
-            </a:pPr>
-            <a:r>
-              <a:rPr lang="en-US" sz="1150" dirty="0">
-                <a:solidFill>
-                  <a:srgbClr val="EAF2FB"/>
-                </a:solidFill>
-                <a:latin typeface="Arial" pitchFamily="34" charset="0"/>
-                <a:ea typeface="Arial" pitchFamily="34" charset="-122"/>
-                <a:cs typeface="Arial" pitchFamily="34" charset="-120"/>
-              </a:rPr>
-              <a:t>Robbins, Vazarkar &amp; Schroeder — An ACE Up the Sleeve (DEF CON 25, 2017)</a:t>
-            </a:r>
-            <a:endParaRPr lang="en-US" sz="1150" dirty="0"/>
-          </a:p>
-          <a:p>
-            <a:pPr algn="r" marL="342900" indent="-342900">
-              <a:lnSpc>
-                <a:spcPct val="108000"/>
-              </a:lnSpc>
-              <a:spcAft>
-                <a:spcPts val="900"/>
-              </a:spcAft>
-              <a:buSzPct val="100000"/>
-              <a:buChar char="•"/>
-            </a:pPr>
-            <a:r>
-              <a:rPr lang="en-US" sz="1150" dirty="0">
-                <a:solidFill>
-                  <a:srgbClr val="EAF2FB"/>
-                </a:solidFill>
-                <a:latin typeface="Arial" pitchFamily="34" charset="0"/>
-                <a:ea typeface="Arial" pitchFamily="34" charset="-122"/>
-                <a:cs typeface="Arial" pitchFamily="34" charset="-120"/>
-              </a:rPr>
-              <a:t>Schroeder &amp; Christensen — Certified Pre-Owned: Abusing AD CS (2021)</a:t>
-            </a:r>
-            <a:endParaRPr lang="en-US" sz="1150" dirty="0"/>
-          </a:p>
-          <a:p>
-            <a:pPr algn="r" marL="342900" indent="-342900">
-              <a:lnSpc>
-                <a:spcPct val="108000"/>
-              </a:lnSpc>
-              <a:spcAft>
-                <a:spcPts val="900"/>
-              </a:spcAft>
-              <a:buSzPct val="100000"/>
-              <a:buChar char="•"/>
-            </a:pPr>
-            <a:r>
-              <a:rPr lang="en-US" sz="1150" dirty="0">
-                <a:solidFill>
-                  <a:srgbClr val="EAF2FB"/>
-                </a:solidFill>
-                <a:latin typeface="Arial" pitchFamily="34" charset="0"/>
-                <a:ea typeface="Arial" pitchFamily="34" charset="-122"/>
-                <a:cs typeface="Arial" pitchFamily="34" charset="-120"/>
-              </a:rPr>
-              <a:t>Shamir — Wagging the Dog: Abusing RBCD (2019)</a:t>
-            </a:r>
-            <a:endParaRPr lang="en-US" sz="1150" dirty="0"/>
-          </a:p>
-          <a:p>
-            <a:pPr algn="r" marL="342900" indent="-342900">
-              <a:lnSpc>
-                <a:spcPct val="108000"/>
-              </a:lnSpc>
-              <a:spcAft>
-                <a:spcPts val="900"/>
-              </a:spcAft>
-              <a:buSzPct val="100000"/>
-              <a:buChar char="•"/>
-            </a:pPr>
-            <a:r>
-              <a:rPr lang="en-US" sz="1150" dirty="0">
-                <a:solidFill>
-                  <a:srgbClr val="EAF2FB"/>
-                </a:solidFill>
-                <a:latin typeface="Arial" pitchFamily="34" charset="0"/>
-                <a:ea typeface="Arial" pitchFamily="34" charset="-122"/>
-                <a:cs typeface="Arial" pitchFamily="34" charset="-120"/>
-              </a:rPr>
-              <a:t>Metcalf — adsecurity.org (Kerberos &amp; DA persistence)</a:t>
-            </a:r>
-            <a:endParaRPr lang="en-US" sz="1150" dirty="0"/>
-          </a:p>
-        </p:txBody>
-      </p:sp>
-      <p:sp>
-        <p:nvSpPr>
-          <p:cNvPr id="7" name="Shape 5"/>
-          <p:cNvSpPr/>
-          <p:nvPr/>
-        </p:nvSpPr>
-        <p:spPr>
-          <a:xfrm>
-            <a:off x="4306824" y="1554480"/>
-            <a:ext cx="3575304" cy="4526280"/>
+              <a:buNone/>
+            </a:pPr>
+            <a:r>
+              <a:rPr lang="en-US" sz="1250" dirty="0">
+                <a:solidFill>
+                  <a:srgbClr val="9FB4CE"/>
+                </a:solidFill>
+                <a:latin typeface="Arial" pitchFamily="34" charset="0"/>
+                <a:ea typeface="Arial" pitchFamily="34" charset="-122"/>
+                <a:cs typeface="Arial" pitchFamily="34" charset="-120"/>
+              </a:rPr>
+              <a:t>טקסונומיה של טכניקות יריב (TA0006 Credential Access, TA0008 Lateral Movement ועוד). attack.mitre.org</a:t>
+            </a:r>
+            <a:endParaRPr lang="en-US" sz="1250" dirty="0"/>
+          </a:p>
+        </p:txBody>
+      </p:sp>
+      <p:sp>
+        <p:nvSpPr>
+          <p:cNvPr id="9" name="Shape 7"/>
+          <p:cNvSpPr/>
+          <p:nvPr/>
+        </p:nvSpPr>
+        <p:spPr>
+          <a:xfrm>
+            <a:off x="548640" y="2505456"/>
+            <a:ext cx="11091672" cy="859536"/>
           </a:xfrm>
           <a:prstGeom prst="roundRect">
             <a:avLst>
-              <a:gd name="adj" fmla="val 2558"/>
+              <a:gd name="adj" fmla="val 10638"/>
             </a:avLst>
           </a:prstGeom>
           <a:solidFill>
@@ -3597,14 +3148,85 @@
       </p:sp>
       <p:sp>
         <p:nvSpPr>
-          <p:cNvPr id="8" name="Text 6"/>
-          <p:cNvSpPr/>
-          <p:nvPr/>
-        </p:nvSpPr>
-        <p:spPr>
-          <a:xfrm>
-            <a:off x="4507992" y="1691640"/>
-            <a:ext cx="3200400" cy="457200"/>
+          <p:cNvPr id="10" name="Shape 8"/>
+          <p:cNvSpPr/>
+          <p:nvPr/>
+        </p:nvSpPr>
+        <p:spPr>
+          <a:xfrm>
+            <a:off x="10881360" y="2651760"/>
+            <a:ext cx="566928" cy="566928"/>
+          </a:xfrm>
+          <a:prstGeom prst="oval">
+            <a:avLst/>
+          </a:prstGeom>
+          <a:solidFill>
+            <a:srgbClr val="35D0E0"/>
+          </a:solidFill>
+          <a:ln w="12700">
+            <a:solidFill>
+              <a:srgbClr val="35D0E0"/>
+            </a:solidFill>
+            <a:prstDash val="solid"/>
+          </a:ln>
+          <a:effectLst>
+            <a:outerShdw sx="100000" sy="100000" kx="0" ky="0" algn="bl" rotWithShape="0" blurRad="101600" dist="38100" dir="5400000">
+              <a:srgbClr val="05080F">
+                <a:alpha val="55000"/>
+              </a:srgbClr>
+            </a:outerShdw>
+          </a:effectLst>
+        </p:spPr>
+      </p:sp>
+      <p:sp>
+        <p:nvSpPr>
+          <p:cNvPr id="11" name="Text 9"/>
+          <p:cNvSpPr/>
+          <p:nvPr/>
+        </p:nvSpPr>
+        <p:spPr>
+          <a:xfrm>
+            <a:off x="10881360" y="2651760"/>
+            <a:ext cx="566928" cy="566928"/>
+          </a:xfrm>
+          <a:prstGeom prst="rect">
+            <a:avLst/>
+          </a:prstGeom>
+          <a:noFill/>
+          <a:ln/>
+        </p:spPr>
+        <p:txBody>
+          <a:bodyPr wrap="square" rtlCol="0" anchor="ctr"/>
+          <a:lstStyle/>
+          <a:p>
+            <a:pPr algn="ctr" indent="0" marL="0">
+              <a:buNone/>
+            </a:pPr>
+            <a:r>
+              <a:rPr lang="en-US" sz="2000" b="1" dirty="0">
+                <a:solidFill>
+                  <a:srgbClr val="0C1626"/>
+                </a:solidFill>
+                <a:latin typeface="Arial" pitchFamily="34" charset="0"/>
+                <a:ea typeface="Arial" pitchFamily="34" charset="-122"/>
+                <a:cs typeface="Arial" pitchFamily="34" charset="-120"/>
+              </a:rPr>
+              <a:t>2</a:t>
+            </a:r>
+            <a:endParaRPr lang="en-US" sz="2000" dirty="0"/>
+          </a:p>
+        </p:txBody>
+      </p:sp>
+      <p:sp>
+        <p:nvSpPr>
+          <p:cNvPr id="12" name="Text 10"/>
+          <p:cNvSpPr/>
+          <p:nvPr/>
+        </p:nvSpPr>
+        <p:spPr>
+          <a:xfrm>
+            <a:off x="6035040" y="2596896"/>
+            <a:ext cx="4663440" cy="676656"/>
           </a:xfrm>
           <a:prstGeom prst="rect">
             <a:avLst/>
@@ -3620,176 +3242,76 @@
               <a:buNone/>
             </a:pPr>
             <a:r>
-              <a:rPr lang="en-US" sz="1600" b="1" dirty="0">
-                <a:solidFill>
-                  <a:srgbClr val="F5A623"/>
-                </a:solidFill>
-                <a:latin typeface="Arial" pitchFamily="34" charset="0"/>
-                <a:ea typeface="Arial" pitchFamily="34" charset="-122"/>
-                <a:cs typeface="Arial" pitchFamily="34" charset="-120"/>
-              </a:rPr>
-              <a:t>כלים ותיעודם</a:t>
-            </a:r>
-            <a:endParaRPr lang="en-US" sz="1600" dirty="0"/>
-          </a:p>
-        </p:txBody>
-      </p:sp>
-      <p:sp>
-        <p:nvSpPr>
-          <p:cNvPr id="9" name="Text 7"/>
-          <p:cNvSpPr/>
-          <p:nvPr/>
-        </p:nvSpPr>
-        <p:spPr>
-          <a:xfrm>
-            <a:off x="4507992" y="2240280"/>
-            <a:ext cx="3200400" cy="3657600"/>
-          </a:xfrm>
-          <a:prstGeom prst="rect">
-            <a:avLst/>
-          </a:prstGeom>
-          <a:noFill/>
-          <a:ln/>
-        </p:spPr>
-        <p:txBody>
-          <a:bodyPr wrap="square" rtlCol="0" anchor="ctr"/>
-          <a:lstStyle/>
-          <a:p>
-            <a:pPr algn="r" marL="342900" indent="-342900">
+              <a:rPr lang="en-US" sz="1550" b="1" dirty="0">
+                <a:solidFill>
+                  <a:srgbClr val="EAF2FB"/>
+                </a:solidFill>
+                <a:latin typeface="Arial" pitchFamily="34" charset="0"/>
+                <a:ea typeface="Arial" pitchFamily="34" charset="-122"/>
+                <a:cs typeface="Arial" pitchFamily="34" charset="-120"/>
+              </a:rPr>
+              <a:t>NIST SP 800-115</a:t>
+            </a:r>
+            <a:endParaRPr lang="en-US" sz="1550" dirty="0"/>
+          </a:p>
+        </p:txBody>
+      </p:sp>
+      <p:sp>
+        <p:nvSpPr>
+          <p:cNvPr id="13" name="Text 11"/>
+          <p:cNvSpPr/>
+          <p:nvPr/>
+        </p:nvSpPr>
+        <p:spPr>
+          <a:xfrm>
+            <a:off x="777240" y="2596896"/>
+            <a:ext cx="5120640" cy="676656"/>
+          </a:xfrm>
+          <a:prstGeom prst="rect">
+            <a:avLst/>
+          </a:prstGeom>
+          <a:noFill/>
+          <a:ln/>
+        </p:spPr>
+        <p:txBody>
+          <a:bodyPr wrap="square" rtlCol="0" anchor="ctr"/>
+          <a:lstStyle/>
+          <a:p>
+            <a:pPr rtl="1" algn="r" indent="0" marL="0">
               <a:lnSpc>
-                <a:spcPct val="108000"/>
+                <a:spcPct val="105000"/>
               </a:lnSpc>
-              <a:spcAft>
-                <a:spcPts val="900"/>
-              </a:spcAft>
-              <a:buSzPct val="100000"/>
-              <a:buChar char="•"/>
-            </a:pPr>
-            <a:r>
-              <a:rPr lang="en-US" sz="1150" dirty="0">
-                <a:solidFill>
-                  <a:srgbClr val="EAF2FB"/>
-                </a:solidFill>
-                <a:latin typeface="Arial" pitchFamily="34" charset="0"/>
-                <a:ea typeface="Arial" pitchFamily="34" charset="-122"/>
-                <a:cs typeface="Arial" pitchFamily="34" charset="-120"/>
-              </a:rPr>
-              <a:t>Delpy — mimikatz (Pass-the-Hash, DCSync, Golden Ticket)</a:t>
-            </a:r>
-            <a:endParaRPr lang="en-US" sz="1150" dirty="0"/>
-          </a:p>
-          <a:p>
-            <a:pPr algn="r" marL="342900" indent="-342900">
-              <a:lnSpc>
-                <a:spcPct val="108000"/>
-              </a:lnSpc>
-              <a:spcAft>
-                <a:spcPts val="900"/>
-              </a:spcAft>
-              <a:buSzPct val="100000"/>
-              <a:buChar char="•"/>
-            </a:pPr>
-            <a:r>
-              <a:rPr lang="en-US" sz="1150" dirty="0">
-                <a:solidFill>
-                  <a:srgbClr val="EAF2FB"/>
-                </a:solidFill>
-                <a:latin typeface="Arial" pitchFamily="34" charset="0"/>
-                <a:ea typeface="Arial" pitchFamily="34" charset="-122"/>
-                <a:cs typeface="Arial" pitchFamily="34" charset="-120"/>
-              </a:rPr>
-              <a:t>Impacket (Fortra) — secretsdump, GetUserSPNs, psexec</a:t>
-            </a:r>
-            <a:endParaRPr lang="en-US" sz="1150" dirty="0"/>
-          </a:p>
-          <a:p>
-            <a:pPr algn="r" marL="342900" indent="-342900">
-              <a:lnSpc>
-                <a:spcPct val="108000"/>
-              </a:lnSpc>
-              <a:spcAft>
-                <a:spcPts val="900"/>
-              </a:spcAft>
-              <a:buSzPct val="100000"/>
-              <a:buChar char="•"/>
-            </a:pPr>
-            <a:r>
-              <a:rPr lang="en-US" sz="1150" dirty="0">
-                <a:solidFill>
-                  <a:srgbClr val="EAF2FB"/>
-                </a:solidFill>
-                <a:latin typeface="Arial" pitchFamily="34" charset="0"/>
-                <a:ea typeface="Arial" pitchFamily="34" charset="-122"/>
-                <a:cs typeface="Arial" pitchFamily="34" charset="-120"/>
-              </a:rPr>
-              <a:t>BloodHound / SharpHound (SpecterOps)</a:t>
-            </a:r>
-            <a:endParaRPr lang="en-US" sz="1150" dirty="0"/>
-          </a:p>
-          <a:p>
-            <a:pPr algn="r" marL="342900" indent="-342900">
-              <a:lnSpc>
-                <a:spcPct val="108000"/>
-              </a:lnSpc>
-              <a:spcAft>
-                <a:spcPts val="900"/>
-              </a:spcAft>
-              <a:buSzPct val="100000"/>
-              <a:buChar char="•"/>
-            </a:pPr>
-            <a:r>
-              <a:rPr lang="en-US" sz="1150" dirty="0">
-                <a:solidFill>
-                  <a:srgbClr val="EAF2FB"/>
-                </a:solidFill>
-                <a:latin typeface="Arial" pitchFamily="34" charset="0"/>
-                <a:ea typeface="Arial" pitchFamily="34" charset="-122"/>
-                <a:cs typeface="Arial" pitchFamily="34" charset="-120"/>
-              </a:rPr>
-              <a:t>NetExec (nxc) / CrackMapExec</a:t>
-            </a:r>
-            <a:endParaRPr lang="en-US" sz="1150" dirty="0"/>
-          </a:p>
-          <a:p>
-            <a:pPr algn="r" marL="342900" indent="-342900">
-              <a:lnSpc>
-                <a:spcPct val="108000"/>
-              </a:lnSpc>
-              <a:spcAft>
-                <a:spcPts val="900"/>
-              </a:spcAft>
-              <a:buSzPct val="100000"/>
-              <a:buChar char="•"/>
-            </a:pPr>
-            <a:r>
-              <a:rPr lang="en-US" sz="1150" dirty="0">
-                <a:solidFill>
-                  <a:srgbClr val="EAF2FB"/>
-                </a:solidFill>
-                <a:latin typeface="Arial" pitchFamily="34" charset="0"/>
-                <a:ea typeface="Arial" pitchFamily="34" charset="-122"/>
-                <a:cs typeface="Arial" pitchFamily="34" charset="-120"/>
-              </a:rPr>
-              <a:t>Certipy · Rubeus · PowerView (harmj0y)</a:t>
-            </a:r>
-            <a:endParaRPr lang="en-US" sz="1150" dirty="0"/>
-          </a:p>
-        </p:txBody>
-      </p:sp>
-      <p:sp>
-        <p:nvSpPr>
-          <p:cNvPr id="10" name="Shape 8"/>
-          <p:cNvSpPr/>
-          <p:nvPr/>
-        </p:nvSpPr>
-        <p:spPr>
-          <a:xfrm>
-            <a:off x="548640" y="1554480"/>
-            <a:ext cx="3575304" cy="4526280"/>
+              <a:buNone/>
+            </a:pPr>
+            <a:r>
+              <a:rPr lang="en-US" sz="1250" dirty="0">
+                <a:solidFill>
+                  <a:srgbClr val="9FB4CE"/>
+                </a:solidFill>
+                <a:latin typeface="Arial" pitchFamily="34" charset="0"/>
+                <a:ea typeface="Arial" pitchFamily="34" charset="-122"/>
+                <a:cs typeface="Arial" pitchFamily="34" charset="-120"/>
+              </a:rPr>
+              <a:t>Technical Guide to Information Security Testing and Assessment — מתודולוגיית בדיקות רשמית.</a:t>
+            </a:r>
+            <a:endParaRPr lang="en-US" sz="1250" dirty="0"/>
+          </a:p>
+        </p:txBody>
+      </p:sp>
+      <p:sp>
+        <p:nvSpPr>
+          <p:cNvPr id="14" name="Shape 12"/>
+          <p:cNvSpPr/>
+          <p:nvPr/>
+        </p:nvSpPr>
+        <p:spPr>
+          <a:xfrm>
+            <a:off x="548640" y="3456432"/>
+            <a:ext cx="11091672" cy="859536"/>
           </a:xfrm>
           <a:prstGeom prst="roundRect">
             <a:avLst>
-              <a:gd name="adj" fmla="val 2558"/>
+              <a:gd name="adj" fmla="val 10638"/>
             </a:avLst>
           </a:prstGeom>
           <a:solidFill>
@@ -3812,14 +3334,85 @@
       </p:sp>
       <p:sp>
         <p:nvSpPr>
-          <p:cNvPr id="11" name="Text 9"/>
-          <p:cNvSpPr/>
-          <p:nvPr/>
-        </p:nvSpPr>
-        <p:spPr>
-          <a:xfrm>
-            <a:off x="749808" y="1691640"/>
-            <a:ext cx="3200400" cy="457200"/>
+          <p:cNvPr id="15" name="Shape 13"/>
+          <p:cNvSpPr/>
+          <p:nvPr/>
+        </p:nvSpPr>
+        <p:spPr>
+          <a:xfrm>
+            <a:off x="10881360" y="3602736"/>
+            <a:ext cx="566928" cy="566928"/>
+          </a:xfrm>
+          <a:prstGeom prst="oval">
+            <a:avLst/>
+          </a:prstGeom>
+          <a:solidFill>
+            <a:srgbClr val="35D0E0"/>
+          </a:solidFill>
+          <a:ln w="12700">
+            <a:solidFill>
+              <a:srgbClr val="35D0E0"/>
+            </a:solidFill>
+            <a:prstDash val="solid"/>
+          </a:ln>
+          <a:effectLst>
+            <a:outerShdw sx="100000" sy="100000" kx="0" ky="0" algn="bl" rotWithShape="0" blurRad="101600" dist="38100" dir="5400000">
+              <a:srgbClr val="05080F">
+                <a:alpha val="55000"/>
+              </a:srgbClr>
+            </a:outerShdw>
+          </a:effectLst>
+        </p:spPr>
+      </p:sp>
+      <p:sp>
+        <p:nvSpPr>
+          <p:cNvPr id="16" name="Text 14"/>
+          <p:cNvSpPr/>
+          <p:nvPr/>
+        </p:nvSpPr>
+        <p:spPr>
+          <a:xfrm>
+            <a:off x="10881360" y="3602736"/>
+            <a:ext cx="566928" cy="566928"/>
+          </a:xfrm>
+          <a:prstGeom prst="rect">
+            <a:avLst/>
+          </a:prstGeom>
+          <a:noFill/>
+          <a:ln/>
+        </p:spPr>
+        <p:txBody>
+          <a:bodyPr wrap="square" rtlCol="0" anchor="ctr"/>
+          <a:lstStyle/>
+          <a:p>
+            <a:pPr algn="ctr" indent="0" marL="0">
+              <a:buNone/>
+            </a:pPr>
+            <a:r>
+              <a:rPr lang="en-US" sz="2000" b="1" dirty="0">
+                <a:solidFill>
+                  <a:srgbClr val="0C1626"/>
+                </a:solidFill>
+                <a:latin typeface="Arial" pitchFamily="34" charset="0"/>
+                <a:ea typeface="Arial" pitchFamily="34" charset="-122"/>
+                <a:cs typeface="Arial" pitchFamily="34" charset="-120"/>
+              </a:rPr>
+              <a:t>3</a:t>
+            </a:r>
+            <a:endParaRPr lang="en-US" sz="2000" dirty="0"/>
+          </a:p>
+        </p:txBody>
+      </p:sp>
+      <p:sp>
+        <p:nvSpPr>
+          <p:cNvPr id="17" name="Text 15"/>
+          <p:cNvSpPr/>
+          <p:nvPr/>
+        </p:nvSpPr>
+        <p:spPr>
+          <a:xfrm>
+            <a:off x="6035040" y="3547872"/>
+            <a:ext cx="4663440" cy="676656"/>
           </a:xfrm>
           <a:prstGeom prst="rect">
             <a:avLst/>
@@ -3835,53 +3428,193 @@
               <a:buNone/>
             </a:pPr>
             <a:r>
-              <a:rPr lang="en-US" sz="1600" b="1" dirty="0">
-                <a:solidFill>
-                  <a:srgbClr val="2A7B8C"/>
-                </a:solidFill>
-                <a:latin typeface="Arial" pitchFamily="34" charset="0"/>
-                <a:ea typeface="Arial" pitchFamily="34" charset="-122"/>
-                <a:cs typeface="Arial" pitchFamily="34" charset="-120"/>
-              </a:rPr>
-              <a:t>ספרים ומסלולי הכשרה</a:t>
-            </a:r>
-            <a:endParaRPr lang="en-US" sz="1600" dirty="0"/>
-          </a:p>
-        </p:txBody>
-      </p:sp>
-      <p:sp>
-        <p:nvSpPr>
-          <p:cNvPr id="12" name="Text 10"/>
-          <p:cNvSpPr/>
-          <p:nvPr/>
-        </p:nvSpPr>
-        <p:spPr>
-          <a:xfrm>
-            <a:off x="749808" y="2240280"/>
-            <a:ext cx="3200400" cy="3657600"/>
-          </a:xfrm>
-          <a:prstGeom prst="rect">
-            <a:avLst/>
-          </a:prstGeom>
-          <a:noFill/>
-          <a:ln/>
-        </p:spPr>
-        <p:txBody>
-          <a:bodyPr wrap="square" rtlCol="0" anchor="ctr"/>
-          <a:lstStyle/>
-          <a:p>
-            <a:pPr algn="r" marL="342900" indent="-342900">
+              <a:rPr lang="en-US" sz="1550" b="1" dirty="0">
+                <a:solidFill>
+                  <a:srgbClr val="EAF2FB"/>
+                </a:solidFill>
+                <a:latin typeface="Arial" pitchFamily="34" charset="0"/>
+                <a:ea typeface="Arial" pitchFamily="34" charset="-122"/>
+                <a:cs typeface="Arial" pitchFamily="34" charset="-120"/>
+              </a:rPr>
+              <a:t>PTES — Penetration Testing Execution Standard</a:t>
+            </a:r>
+            <a:endParaRPr lang="en-US" sz="1550" dirty="0"/>
+          </a:p>
+        </p:txBody>
+      </p:sp>
+      <p:sp>
+        <p:nvSpPr>
+          <p:cNvPr id="18" name="Text 16"/>
+          <p:cNvSpPr/>
+          <p:nvPr/>
+        </p:nvSpPr>
+        <p:spPr>
+          <a:xfrm>
+            <a:off x="777240" y="3547872"/>
+            <a:ext cx="5120640" cy="676656"/>
+          </a:xfrm>
+          <a:prstGeom prst="rect">
+            <a:avLst/>
+          </a:prstGeom>
+          <a:noFill/>
+          <a:ln/>
+        </p:spPr>
+        <p:txBody>
+          <a:bodyPr wrap="square" rtlCol="0" anchor="ctr"/>
+          <a:lstStyle/>
+          <a:p>
+            <a:pPr rtl="1" algn="r" indent="0" marL="0">
               <a:lnSpc>
-                <a:spcPct val="108000"/>
+                <a:spcPct val="105000"/>
               </a:lnSpc>
-              <a:spcAft>
-                <a:spcPts val="900"/>
-              </a:spcAft>
-              <a:buSzPct val="100000"/>
-              <a:buChar char="•"/>
-            </a:pPr>
-            <a:r>
-              <a:rPr lang="en-US" sz="1150" dirty="0">
+              <a:buNone/>
+            </a:pPr>
+            <a:r>
+              <a:rPr lang="en-US" sz="1250" dirty="0">
+                <a:solidFill>
+                  <a:srgbClr val="9FB4CE"/>
+                </a:solidFill>
+                <a:latin typeface="Arial" pitchFamily="34" charset="0"/>
+                <a:ea typeface="Arial" pitchFamily="34" charset="-122"/>
+                <a:cs typeface="Arial" pitchFamily="34" charset="-120"/>
+              </a:rPr>
+              <a:t>תקן שלבי בדיקת חדירות: pre-engagement, intelligence, exploitation, reporting.</a:t>
+            </a:r>
+            <a:endParaRPr lang="en-US" sz="1250" dirty="0"/>
+          </a:p>
+        </p:txBody>
+      </p:sp>
+      <p:sp>
+        <p:nvSpPr>
+          <p:cNvPr id="19" name="Shape 17"/>
+          <p:cNvSpPr/>
+          <p:nvPr/>
+        </p:nvSpPr>
+        <p:spPr>
+          <a:xfrm>
+            <a:off x="548640" y="4407408"/>
+            <a:ext cx="11091672" cy="859536"/>
+          </a:xfrm>
+          <a:prstGeom prst="roundRect">
+            <a:avLst>
+              <a:gd name="adj" fmla="val 10638"/>
+            </a:avLst>
+          </a:prstGeom>
+          <a:solidFill>
+            <a:srgbClr val="15294A"/>
+          </a:solidFill>
+          <a:ln w="12700">
+            <a:solidFill>
+              <a:srgbClr val="24406B"/>
+            </a:solidFill>
+            <a:prstDash val="solid"/>
+          </a:ln>
+          <a:effectLst>
+            <a:outerShdw sx="100000" sy="100000" kx="0" ky="0" algn="bl" rotWithShape="0" blurRad="101600" dist="38100" dir="5400000">
+              <a:srgbClr val="05080F">
+                <a:alpha val="55000"/>
+              </a:srgbClr>
+            </a:outerShdw>
+          </a:effectLst>
+        </p:spPr>
+      </p:sp>
+      <p:sp>
+        <p:nvSpPr>
+          <p:cNvPr id="20" name="Shape 18"/>
+          <p:cNvSpPr/>
+          <p:nvPr/>
+        </p:nvSpPr>
+        <p:spPr>
+          <a:xfrm>
+            <a:off x="10881360" y="4553712"/>
+            <a:ext cx="566928" cy="566928"/>
+          </a:xfrm>
+          <a:prstGeom prst="oval">
+            <a:avLst/>
+          </a:prstGeom>
+          <a:solidFill>
+            <a:srgbClr val="2A7B8C"/>
+          </a:solidFill>
+          <a:ln w="12700">
+            <a:solidFill>
+              <a:srgbClr val="2A7B8C"/>
+            </a:solidFill>
+            <a:prstDash val="solid"/>
+          </a:ln>
+          <a:effectLst>
+            <a:outerShdw sx="100000" sy="100000" kx="0" ky="0" algn="bl" rotWithShape="0" blurRad="101600" dist="38100" dir="5400000">
+              <a:srgbClr val="05080F">
+                <a:alpha val="55000"/>
+              </a:srgbClr>
+            </a:outerShdw>
+          </a:effectLst>
+        </p:spPr>
+      </p:sp>
+      <p:sp>
+        <p:nvSpPr>
+          <p:cNvPr id="21" name="Text 19"/>
+          <p:cNvSpPr/>
+          <p:nvPr/>
+        </p:nvSpPr>
+        <p:spPr>
+          <a:xfrm>
+            <a:off x="10881360" y="4553712"/>
+            <a:ext cx="566928" cy="566928"/>
+          </a:xfrm>
+          <a:prstGeom prst="rect">
+            <a:avLst/>
+          </a:prstGeom>
+          <a:noFill/>
+          <a:ln/>
+        </p:spPr>
+        <p:txBody>
+          <a:bodyPr wrap="square" rtlCol="0" anchor="ctr"/>
+          <a:lstStyle/>
+          <a:p>
+            <a:pPr algn="ctr" indent="0" marL="0">
+              <a:buNone/>
+            </a:pPr>
+            <a:r>
+              <a:rPr lang="en-US" sz="2000" b="1" dirty="0">
+                <a:solidFill>
+                  <a:srgbClr val="0C1626"/>
+                </a:solidFill>
+                <a:latin typeface="Arial" pitchFamily="34" charset="0"/>
+                <a:ea typeface="Arial" pitchFamily="34" charset="-122"/>
+                <a:cs typeface="Arial" pitchFamily="34" charset="-120"/>
+              </a:rPr>
+              <a:t>4</a:t>
+            </a:r>
+            <a:endParaRPr lang="en-US" sz="2000" dirty="0"/>
+          </a:p>
+        </p:txBody>
+      </p:sp>
+      <p:sp>
+        <p:nvSpPr>
+          <p:cNvPr id="22" name="Text 20"/>
+          <p:cNvSpPr/>
+          <p:nvPr/>
+        </p:nvSpPr>
+        <p:spPr>
+          <a:xfrm>
+            <a:off x="6035040" y="4498848"/>
+            <a:ext cx="4663440" cy="676656"/>
+          </a:xfrm>
+          <a:prstGeom prst="rect">
+            <a:avLst/>
+          </a:prstGeom>
+          <a:noFill/>
+          <a:ln/>
+        </p:spPr>
+        <p:txBody>
+          <a:bodyPr wrap="square" rtlCol="0" anchor="ctr"/>
+          <a:lstStyle/>
+          <a:p>
+            <a:pPr algn="r" indent="0" marL="0">
+              <a:buNone/>
+            </a:pPr>
+            <a:r>
+              <a:rPr lang="en-US" sz="1550" b="1" dirty="0">
                 <a:solidFill>
                   <a:srgbClr val="EAF2FB"/>
                 </a:solidFill>
@@ -3889,23 +3622,185 @@
                 <a:ea typeface="Arial" pitchFamily="34" charset="-122"/>
                 <a:cs typeface="Arial" pitchFamily="34" charset="-120"/>
               </a:rPr>
-              <a:t>Kim — The Hacker Playbook 3 (2018)</a:t>
-            </a:r>
-            <a:endParaRPr lang="en-US" sz="1150" dirty="0"/>
-          </a:p>
-          <a:p>
-            <a:pPr algn="r" marL="342900" indent="-342900">
+              <a:t>OWASP Testing Guide / WSTG</a:t>
+            </a:r>
+            <a:endParaRPr lang="en-US" sz="1550" dirty="0"/>
+          </a:p>
+        </p:txBody>
+      </p:sp>
+      <p:sp>
+        <p:nvSpPr>
+          <p:cNvPr id="23" name="Text 21"/>
+          <p:cNvSpPr/>
+          <p:nvPr/>
+        </p:nvSpPr>
+        <p:spPr>
+          <a:xfrm>
+            <a:off x="777240" y="4498848"/>
+            <a:ext cx="5120640" cy="676656"/>
+          </a:xfrm>
+          <a:prstGeom prst="rect">
+            <a:avLst/>
+          </a:prstGeom>
+          <a:noFill/>
+          <a:ln/>
+        </p:spPr>
+        <p:txBody>
+          <a:bodyPr wrap="square" rtlCol="0" anchor="ctr"/>
+          <a:lstStyle/>
+          <a:p>
+            <a:pPr rtl="1" algn="r" indent="0" marL="0">
               <a:lnSpc>
-                <a:spcPct val="108000"/>
+                <a:spcPct val="105000"/>
               </a:lnSpc>
-              <a:spcAft>
-                <a:spcPts val="900"/>
-              </a:spcAft>
-              <a:buSzPct val="100000"/>
-              <a:buChar char="•"/>
-            </a:pPr>
-            <a:r>
-              <a:rPr lang="en-US" sz="1150" dirty="0">
+              <a:buNone/>
+            </a:pPr>
+            <a:r>
+              <a:rPr lang="en-US" sz="1250" dirty="0">
+                <a:solidFill>
+                  <a:srgbClr val="9FB4CE"/>
+                </a:solidFill>
+                <a:latin typeface="Arial" pitchFamily="34" charset="0"/>
+                <a:ea typeface="Arial" pitchFamily="34" charset="-122"/>
+                <a:cs typeface="Arial" pitchFamily="34" charset="-120"/>
+              </a:rPr>
+              <a:t>מסגרת בדיקות אבטחה, רלוונטית לשלב ה-foothold מבוסס-Web של מכונות רבות.</a:t>
+            </a:r>
+            <a:endParaRPr lang="en-US" sz="1250" dirty="0"/>
+          </a:p>
+        </p:txBody>
+      </p:sp>
+      <p:sp>
+        <p:nvSpPr>
+          <p:cNvPr id="24" name="Shape 22"/>
+          <p:cNvSpPr/>
+          <p:nvPr/>
+        </p:nvSpPr>
+        <p:spPr>
+          <a:xfrm>
+            <a:off x="548640" y="5358384"/>
+            <a:ext cx="11091672" cy="859536"/>
+          </a:xfrm>
+          <a:prstGeom prst="roundRect">
+            <a:avLst>
+              <a:gd name="adj" fmla="val 10638"/>
+            </a:avLst>
+          </a:prstGeom>
+          <a:solidFill>
+            <a:srgbClr val="15294A"/>
+          </a:solidFill>
+          <a:ln w="12700">
+            <a:solidFill>
+              <a:srgbClr val="24406B"/>
+            </a:solidFill>
+            <a:prstDash val="solid"/>
+          </a:ln>
+          <a:effectLst>
+            <a:outerShdw sx="100000" sy="100000" kx="0" ky="0" algn="bl" rotWithShape="0" blurRad="101600" dist="38100" dir="5400000">
+              <a:srgbClr val="05080F">
+                <a:alpha val="55000"/>
+              </a:srgbClr>
+            </a:outerShdw>
+          </a:effectLst>
+        </p:spPr>
+      </p:sp>
+      <p:sp>
+        <p:nvSpPr>
+          <p:cNvPr id="25" name="Shape 23"/>
+          <p:cNvSpPr/>
+          <p:nvPr/>
+        </p:nvSpPr>
+        <p:spPr>
+          <a:xfrm>
+            <a:off x="10881360" y="5504688"/>
+            <a:ext cx="566928" cy="566928"/>
+          </a:xfrm>
+          <a:prstGeom prst="oval">
+            <a:avLst/>
+          </a:prstGeom>
+          <a:solidFill>
+            <a:srgbClr val="2A7B8C"/>
+          </a:solidFill>
+          <a:ln w="12700">
+            <a:solidFill>
+              <a:srgbClr val="2A7B8C"/>
+            </a:solidFill>
+            <a:prstDash val="solid"/>
+          </a:ln>
+          <a:effectLst>
+            <a:outerShdw sx="100000" sy="100000" kx="0" ky="0" algn="bl" rotWithShape="0" blurRad="101600" dist="38100" dir="5400000">
+              <a:srgbClr val="05080F">
+                <a:alpha val="55000"/>
+              </a:srgbClr>
+            </a:outerShdw>
+          </a:effectLst>
+        </p:spPr>
+      </p:sp>
+      <p:sp>
+        <p:nvSpPr>
+          <p:cNvPr id="26" name="Text 24"/>
+          <p:cNvSpPr/>
+          <p:nvPr/>
+        </p:nvSpPr>
+        <p:spPr>
+          <a:xfrm>
+            <a:off x="10881360" y="5504688"/>
+            <a:ext cx="566928" cy="566928"/>
+          </a:xfrm>
+          <a:prstGeom prst="rect">
+            <a:avLst/>
+          </a:prstGeom>
+          <a:noFill/>
+          <a:ln/>
+        </p:spPr>
+        <p:txBody>
+          <a:bodyPr wrap="square" rtlCol="0" anchor="ctr"/>
+          <a:lstStyle/>
+          <a:p>
+            <a:pPr algn="ctr" indent="0" marL="0">
+              <a:buNone/>
+            </a:pPr>
+            <a:r>
+              <a:rPr lang="en-US" sz="2000" b="1" dirty="0">
+                <a:solidFill>
+                  <a:srgbClr val="0C1626"/>
+                </a:solidFill>
+                <a:latin typeface="Arial" pitchFamily="34" charset="0"/>
+                <a:ea typeface="Arial" pitchFamily="34" charset="-122"/>
+                <a:cs typeface="Arial" pitchFamily="34" charset="-120"/>
+              </a:rPr>
+              <a:t>5</a:t>
+            </a:r>
+            <a:endParaRPr lang="en-US" sz="2000" dirty="0"/>
+          </a:p>
+        </p:txBody>
+      </p:sp>
+      <p:sp>
+        <p:nvSpPr>
+          <p:cNvPr id="27" name="Text 25"/>
+          <p:cNvSpPr/>
+          <p:nvPr/>
+        </p:nvSpPr>
+        <p:spPr>
+          <a:xfrm>
+            <a:off x="6035040" y="5449824"/>
+            <a:ext cx="4663440" cy="676656"/>
+          </a:xfrm>
+          <a:prstGeom prst="rect">
+            <a:avLst/>
+          </a:prstGeom>
+          <a:noFill/>
+          <a:ln/>
+        </p:spPr>
+        <p:txBody>
+          <a:bodyPr wrap="square" rtlCol="0" anchor="ctr"/>
+          <a:lstStyle/>
+          <a:p>
+            <a:pPr algn="r" indent="0" marL="0">
+              <a:buNone/>
+            </a:pPr>
+            <a:r>
+              <a:rPr lang="en-US" sz="1550" b="1" dirty="0">
                 <a:solidFill>
                   <a:srgbClr val="EAF2FB"/>
                 </a:solidFill>
@@ -3913,81 +3808,129 @@
                 <a:ea typeface="Arial" pitchFamily="34" charset="-122"/>
                 <a:cs typeface="Arial" pitchFamily="34" charset="-120"/>
               </a:rPr>
-              <a:t>Weidman — Penetration Testing (No Starch, 2014)</a:t>
-            </a:r>
-            <a:endParaRPr lang="en-US" sz="1150" dirty="0"/>
-          </a:p>
-          <a:p>
-            <a:pPr algn="r" marL="342900" indent="-342900">
+              <a:t>Microsoft — Securing Active Directory</a:t>
+            </a:r>
+            <a:endParaRPr lang="en-US" sz="1550" dirty="0"/>
+          </a:p>
+        </p:txBody>
+      </p:sp>
+      <p:sp>
+        <p:nvSpPr>
+          <p:cNvPr id="28" name="Text 26"/>
+          <p:cNvSpPr/>
+          <p:nvPr/>
+        </p:nvSpPr>
+        <p:spPr>
+          <a:xfrm>
+            <a:off x="777240" y="5449824"/>
+            <a:ext cx="5120640" cy="676656"/>
+          </a:xfrm>
+          <a:prstGeom prst="rect">
+            <a:avLst/>
+          </a:prstGeom>
+          <a:noFill/>
+          <a:ln/>
+        </p:spPr>
+        <p:txBody>
+          <a:bodyPr wrap="square" rtlCol="0" anchor="ctr"/>
+          <a:lstStyle/>
+          <a:p>
+            <a:pPr rtl="1" algn="r" indent="0" marL="0">
               <a:lnSpc>
-                <a:spcPct val="108000"/>
+                <a:spcPct val="105000"/>
               </a:lnSpc>
-              <a:spcAft>
-                <a:spcPts val="900"/>
-              </a:spcAft>
-              <a:buSzPct val="100000"/>
-              <a:buChar char="•"/>
-            </a:pPr>
-            <a:r>
-              <a:rPr lang="en-US" sz="1150" dirty="0">
-                <a:solidFill>
-                  <a:srgbClr val="EAF2FB"/>
-                </a:solidFill>
-                <a:latin typeface="Arial" pitchFamily="34" charset="0"/>
-                <a:ea typeface="Arial" pitchFamily="34" charset="-122"/>
-                <a:cs typeface="Arial" pitchFamily="34" charset="-120"/>
-              </a:rPr>
-              <a:t>Nikhil Mittal — AD attack courses</a:t>
-            </a:r>
-            <a:endParaRPr lang="en-US" sz="1150" dirty="0"/>
-          </a:p>
-          <a:p>
-            <a:pPr algn="r" marL="342900" indent="-342900">
-              <a:lnSpc>
-                <a:spcPct val="108000"/>
-              </a:lnSpc>
-              <a:spcAft>
-                <a:spcPts val="900"/>
-              </a:spcAft>
-              <a:buSzPct val="100000"/>
-              <a:buChar char="•"/>
-            </a:pPr>
-            <a:r>
-              <a:rPr lang="en-US" sz="1150" dirty="0">
-                <a:solidFill>
-                  <a:srgbClr val="EAF2FB"/>
-                </a:solidFill>
-                <a:latin typeface="Arial" pitchFamily="34" charset="0"/>
-                <a:ea typeface="Arial" pitchFamily="34" charset="-122"/>
-                <a:cs typeface="Arial" pitchFamily="34" charset="-120"/>
-              </a:rPr>
-              <a:t>HTB Academy — CPTS / Active Directory Enumeration &amp; Attacks</a:t>
-            </a:r>
-            <a:endParaRPr lang="en-US" sz="1150" dirty="0"/>
-          </a:p>
-          <a:p>
-            <a:pPr algn="r" marL="342900" indent="-342900">
-              <a:lnSpc>
-                <a:spcPct val="108000"/>
-              </a:lnSpc>
-              <a:spcAft>
-                <a:spcPts val="900"/>
-              </a:spcAft>
-              <a:buSzPct val="100000"/>
-              <a:buChar char="•"/>
-            </a:pPr>
-            <a:r>
-              <a:rPr lang="en-US" sz="1150" dirty="0">
-                <a:solidFill>
-                  <a:srgbClr val="EAF2FB"/>
-                </a:solidFill>
-                <a:latin typeface="Arial" pitchFamily="34" charset="0"/>
-                <a:ea typeface="Arial" pitchFamily="34" charset="-122"/>
-                <a:cs typeface="Arial" pitchFamily="34" charset="-120"/>
-              </a:rPr>
-              <a:t>Offensive Security — OSCP/OSEP materials</a:t>
-            </a:r>
-            <a:endParaRPr lang="en-US" sz="1150" dirty="0"/>
+              <a:buNone/>
+            </a:pPr>
+            <a:r>
+              <a:rPr lang="en-US" sz="1250" dirty="0">
+                <a:solidFill>
+                  <a:srgbClr val="9FB4CE"/>
+                </a:solidFill>
+                <a:latin typeface="Arial" pitchFamily="34" charset="0"/>
+                <a:ea typeface="Arial" pitchFamily="34" charset="-122"/>
+                <a:cs typeface="Arial" pitchFamily="34" charset="-120"/>
+              </a:rPr>
+              <a:t>Best Practices for Securing AD · Tiered Administrative / Enterprise Access Model.</a:t>
+            </a:r>
+            <a:endParaRPr lang="en-US" sz="1250" dirty="0"/>
+          </a:p>
+        </p:txBody>
+      </p:sp>
+      <p:sp>
+        <p:nvSpPr>
+          <p:cNvPr id="29" name="Text 27"/>
+          <p:cNvSpPr/>
+          <p:nvPr/>
+        </p:nvSpPr>
+        <p:spPr>
+          <a:xfrm>
+            <a:off x="548640" y="6419088"/>
+            <a:ext cx="5486400" cy="274320"/>
+          </a:xfrm>
+          <a:prstGeom prst="rect">
+            <a:avLst/>
+          </a:prstGeom>
+          <a:noFill/>
+          <a:ln/>
+        </p:spPr>
+        <p:txBody>
+          <a:bodyPr wrap="square" rtlCol="0" anchor="ctr"/>
+          <a:lstStyle/>
+          <a:p>
+            <a:pPr algn="l" indent="0" marL="0">
+              <a:buNone/>
+            </a:pPr>
+            <a:r>
+              <a:rPr lang="en-US" sz="900" dirty="0">
+                <a:solidFill>
+                  <a:srgbClr val="9FB4CE"/>
+                </a:solidFill>
+                <a:latin typeface="Arial" pitchFamily="34" charset="0"/>
+                <a:ea typeface="Arial" pitchFamily="34" charset="-122"/>
+                <a:cs typeface="Arial" pitchFamily="34" charset="-120"/>
+              </a:rPr>
+              <a:t>netanelcyber · HAMIVTZAR</a:t>
+            </a:r>
+            <a:endParaRPr lang="en-US" sz="900" dirty="0"/>
+          </a:p>
+        </p:txBody>
+      </p:sp>
+      <p:sp>
+        <p:nvSpPr>
+          <p:cNvPr id="30" name="Text 28"/>
+          <p:cNvSpPr/>
+          <p:nvPr/>
+        </p:nvSpPr>
+        <p:spPr>
+          <a:xfrm>
+            <a:off x="4572000" y="6419088"/>
+            <a:ext cx="7068312" cy="274320"/>
+          </a:xfrm>
+          <a:prstGeom prst="rect">
+            <a:avLst/>
+          </a:prstGeom>
+          <a:noFill/>
+          <a:ln/>
+        </p:spPr>
+        <p:txBody>
+          <a:bodyPr wrap="square" rtlCol="0" anchor="ctr"/>
+          <a:lstStyle/>
+          <a:p>
+            <a:pPr rtl="1" algn="r" indent="0" marL="0">
+              <a:buNone/>
+            </a:pPr>
+            <a:r>
+              <a:rPr lang="en-US" sz="900" dirty="0">
+                <a:solidFill>
+                  <a:srgbClr val="9FB4CE"/>
+                </a:solidFill>
+                <a:latin typeface="Arial" pitchFamily="34" charset="0"/>
+                <a:ea typeface="Arial" pitchFamily="34" charset="-122"/>
+                <a:cs typeface="Arial" pitchFamily="34" charset="-120"/>
+              </a:rPr>
+              <a:t>סביבת אימון מורשית (Hack The Box) — למטרות חינוכיות בלבד</a:t>
+            </a:r>
+            <a:endParaRPr lang="en-US" sz="900" dirty="0"/>
           </a:p>
         </p:txBody>
       </p:sp>
@@ -4031,6 +3974,785 @@
         </p:nvSpPr>
         <p:spPr>
           <a:xfrm>
+            <a:off x="548640" y="384048"/>
+            <a:ext cx="11091672" cy="731520"/>
+          </a:xfrm>
+          <a:prstGeom prst="rect">
+            <a:avLst/>
+          </a:prstGeom>
+          <a:noFill/>
+          <a:ln/>
+        </p:spPr>
+        <p:txBody>
+          <a:bodyPr wrap="square" rtlCol="0" anchor="ctr"/>
+          <a:lstStyle/>
+          <a:p>
+            <a:pPr rtl="1" algn="r" indent="0" marL="0">
+              <a:buNone/>
+            </a:pPr>
+            <a:r>
+              <a:rPr lang="en-US" sz="3200" b="1" dirty="0">
+                <a:solidFill>
+                  <a:srgbClr val="EAF2FB"/>
+                </a:solidFill>
+                <a:latin typeface="Arial" pitchFamily="34" charset="0"/>
+                <a:ea typeface="Arial" pitchFamily="34" charset="-122"/>
+                <a:cs typeface="Arial" pitchFamily="34" charset="-120"/>
+              </a:rPr>
+              <a:t>ספרות מקצועית · מחקרים, כלים וספרים</a:t>
+            </a:r>
+            <a:endParaRPr lang="en-US" sz="3200" dirty="0"/>
+          </a:p>
+        </p:txBody>
+      </p:sp>
+      <p:sp>
+        <p:nvSpPr>
+          <p:cNvPr id="3" name="Text 1"/>
+          <p:cNvSpPr/>
+          <p:nvPr/>
+        </p:nvSpPr>
+        <p:spPr>
+          <a:xfrm>
+            <a:off x="548640" y="1060704"/>
+            <a:ext cx="11091672" cy="310896"/>
+          </a:xfrm>
+          <a:prstGeom prst="rect">
+            <a:avLst/>
+          </a:prstGeom>
+          <a:noFill/>
+          <a:ln/>
+        </p:spPr>
+        <p:txBody>
+          <a:bodyPr wrap="square" rtlCol="0" anchor="ctr"/>
+          <a:lstStyle/>
+          <a:p>
+            <a:pPr algn="r" indent="0" marL="0">
+              <a:buNone/>
+            </a:pPr>
+            <a:r>
+              <a:rPr lang="en-US" sz="1200" dirty="0">
+                <a:solidFill>
+                  <a:srgbClr val="35D0E0"/>
+                </a:solidFill>
+                <a:latin typeface="Arial" pitchFamily="34" charset="0"/>
+                <a:ea typeface="Arial" pitchFamily="34" charset="-122"/>
+                <a:cs typeface="Arial" pitchFamily="34" charset="-120"/>
+              </a:rPr>
+              <a:t>SEMINAL RESEARCH · TOOLING · BOOKS</a:t>
+            </a:r>
+            <a:endParaRPr lang="en-US" sz="1200" dirty="0"/>
+          </a:p>
+        </p:txBody>
+      </p:sp>
+      <p:sp>
+        <p:nvSpPr>
+          <p:cNvPr id="4" name="Shape 2"/>
+          <p:cNvSpPr/>
+          <p:nvPr/>
+        </p:nvSpPr>
+        <p:spPr>
+          <a:xfrm>
+            <a:off x="8065008" y="1554480"/>
+            <a:ext cx="3575304" cy="4526280"/>
+          </a:xfrm>
+          <a:prstGeom prst="roundRect">
+            <a:avLst>
+              <a:gd name="adj" fmla="val 2558"/>
+            </a:avLst>
+          </a:prstGeom>
+          <a:solidFill>
+            <a:srgbClr val="15294A"/>
+          </a:solidFill>
+          <a:ln w="12700">
+            <a:solidFill>
+              <a:srgbClr val="24406B"/>
+            </a:solidFill>
+            <a:prstDash val="solid"/>
+          </a:ln>
+          <a:effectLst>
+            <a:outerShdw sx="100000" sy="100000" kx="0" ky="0" algn="bl" rotWithShape="0" blurRad="101600" dist="38100" dir="5400000">
+              <a:srgbClr val="05080F">
+                <a:alpha val="55000"/>
+              </a:srgbClr>
+            </a:outerShdw>
+          </a:effectLst>
+        </p:spPr>
+      </p:sp>
+      <p:sp>
+        <p:nvSpPr>
+          <p:cNvPr id="5" name="Text 3"/>
+          <p:cNvSpPr/>
+          <p:nvPr/>
+        </p:nvSpPr>
+        <p:spPr>
+          <a:xfrm>
+            <a:off x="8266176" y="1691640"/>
+            <a:ext cx="3200400" cy="457200"/>
+          </a:xfrm>
+          <a:prstGeom prst="rect">
+            <a:avLst/>
+          </a:prstGeom>
+          <a:noFill/>
+          <a:ln/>
+        </p:spPr>
+        <p:txBody>
+          <a:bodyPr wrap="square" rtlCol="0" anchor="ctr"/>
+          <a:lstStyle/>
+          <a:p>
+            <a:pPr algn="r" indent="0" marL="0">
+              <a:buNone/>
+            </a:pPr>
+            <a:r>
+              <a:rPr lang="en-US" sz="1600" b="1" dirty="0">
+                <a:solidFill>
+                  <a:srgbClr val="35D0E0"/>
+                </a:solidFill>
+                <a:latin typeface="Arial" pitchFamily="34" charset="0"/>
+                <a:ea typeface="Arial" pitchFamily="34" charset="-122"/>
+                <a:cs typeface="Arial" pitchFamily="34" charset="-120"/>
+              </a:rPr>
+              <a:t>מחקר פורץ-דרך</a:t>
+            </a:r>
+            <a:endParaRPr lang="en-US" sz="1600" dirty="0"/>
+          </a:p>
+        </p:txBody>
+      </p:sp>
+      <p:sp>
+        <p:nvSpPr>
+          <p:cNvPr id="6" name="Text 4"/>
+          <p:cNvSpPr/>
+          <p:nvPr/>
+        </p:nvSpPr>
+        <p:spPr>
+          <a:xfrm>
+            <a:off x="8266176" y="2240280"/>
+            <a:ext cx="3200400" cy="3657600"/>
+          </a:xfrm>
+          <a:prstGeom prst="rect">
+            <a:avLst/>
+          </a:prstGeom>
+          <a:noFill/>
+          <a:ln/>
+        </p:spPr>
+        <p:txBody>
+          <a:bodyPr wrap="square" rtlCol="0" anchor="ctr"/>
+          <a:lstStyle/>
+          <a:p>
+            <a:pPr algn="r" marL="342900" indent="-342900">
+              <a:lnSpc>
+                <a:spcPct val="108000"/>
+              </a:lnSpc>
+              <a:spcAft>
+                <a:spcPts val="900"/>
+              </a:spcAft>
+              <a:buSzPct val="100000"/>
+              <a:buChar char="•"/>
+            </a:pPr>
+            <a:r>
+              <a:rPr lang="en-US" sz="1150" dirty="0">
+                <a:solidFill>
+                  <a:srgbClr val="EAF2FB"/>
+                </a:solidFill>
+                <a:latin typeface="Arial" pitchFamily="34" charset="0"/>
+                <a:ea typeface="Arial" pitchFamily="34" charset="-122"/>
+                <a:cs typeface="Arial" pitchFamily="34" charset="-120"/>
+              </a:rPr>
+              <a:t>Medin — Attacking Kerberos: Kicking the Guard Dog of Hades (DerbyCon 2014)</a:t>
+            </a:r>
+            <a:endParaRPr lang="en-US" sz="1150" dirty="0"/>
+          </a:p>
+          <a:p>
+            <a:pPr algn="r" marL="342900" indent="-342900">
+              <a:lnSpc>
+                <a:spcPct val="108000"/>
+              </a:lnSpc>
+              <a:spcAft>
+                <a:spcPts val="900"/>
+              </a:spcAft>
+              <a:buSzPct val="100000"/>
+              <a:buChar char="•"/>
+            </a:pPr>
+            <a:r>
+              <a:rPr lang="en-US" sz="1150" dirty="0">
+                <a:solidFill>
+                  <a:srgbClr val="EAF2FB"/>
+                </a:solidFill>
+                <a:latin typeface="Arial" pitchFamily="34" charset="0"/>
+                <a:ea typeface="Arial" pitchFamily="34" charset="-122"/>
+                <a:cs typeface="Arial" pitchFamily="34" charset="-120"/>
+              </a:rPr>
+              <a:t>Robbins, Vazarkar &amp; Schroeder — An ACE Up the Sleeve (DEF CON 25, 2017)</a:t>
+            </a:r>
+            <a:endParaRPr lang="en-US" sz="1150" dirty="0"/>
+          </a:p>
+          <a:p>
+            <a:pPr algn="r" marL="342900" indent="-342900">
+              <a:lnSpc>
+                <a:spcPct val="108000"/>
+              </a:lnSpc>
+              <a:spcAft>
+                <a:spcPts val="900"/>
+              </a:spcAft>
+              <a:buSzPct val="100000"/>
+              <a:buChar char="•"/>
+            </a:pPr>
+            <a:r>
+              <a:rPr lang="en-US" sz="1150" dirty="0">
+                <a:solidFill>
+                  <a:srgbClr val="EAF2FB"/>
+                </a:solidFill>
+                <a:latin typeface="Arial" pitchFamily="34" charset="0"/>
+                <a:ea typeface="Arial" pitchFamily="34" charset="-122"/>
+                <a:cs typeface="Arial" pitchFamily="34" charset="-120"/>
+              </a:rPr>
+              <a:t>Schroeder &amp; Christensen — Certified Pre-Owned: Abusing AD CS (2021)</a:t>
+            </a:r>
+            <a:endParaRPr lang="en-US" sz="1150" dirty="0"/>
+          </a:p>
+          <a:p>
+            <a:pPr algn="r" marL="342900" indent="-342900">
+              <a:lnSpc>
+                <a:spcPct val="108000"/>
+              </a:lnSpc>
+              <a:spcAft>
+                <a:spcPts val="900"/>
+              </a:spcAft>
+              <a:buSzPct val="100000"/>
+              <a:buChar char="•"/>
+            </a:pPr>
+            <a:r>
+              <a:rPr lang="en-US" sz="1150" dirty="0">
+                <a:solidFill>
+                  <a:srgbClr val="EAF2FB"/>
+                </a:solidFill>
+                <a:latin typeface="Arial" pitchFamily="34" charset="0"/>
+                <a:ea typeface="Arial" pitchFamily="34" charset="-122"/>
+                <a:cs typeface="Arial" pitchFamily="34" charset="-120"/>
+              </a:rPr>
+              <a:t>Shamir — Wagging the Dog: Abusing RBCD (2019)</a:t>
+            </a:r>
+            <a:endParaRPr lang="en-US" sz="1150" dirty="0"/>
+          </a:p>
+          <a:p>
+            <a:pPr algn="r" marL="342900" indent="-342900">
+              <a:lnSpc>
+                <a:spcPct val="108000"/>
+              </a:lnSpc>
+              <a:spcAft>
+                <a:spcPts val="900"/>
+              </a:spcAft>
+              <a:buSzPct val="100000"/>
+              <a:buChar char="•"/>
+            </a:pPr>
+            <a:r>
+              <a:rPr lang="en-US" sz="1150" dirty="0">
+                <a:solidFill>
+                  <a:srgbClr val="EAF2FB"/>
+                </a:solidFill>
+                <a:latin typeface="Arial" pitchFamily="34" charset="0"/>
+                <a:ea typeface="Arial" pitchFamily="34" charset="-122"/>
+                <a:cs typeface="Arial" pitchFamily="34" charset="-120"/>
+              </a:rPr>
+              <a:t>Metcalf — adsecurity.org (Kerberos &amp; DA persistence)</a:t>
+            </a:r>
+            <a:endParaRPr lang="en-US" sz="1150" dirty="0"/>
+          </a:p>
+        </p:txBody>
+      </p:sp>
+      <p:sp>
+        <p:nvSpPr>
+          <p:cNvPr id="7" name="Shape 5"/>
+          <p:cNvSpPr/>
+          <p:nvPr/>
+        </p:nvSpPr>
+        <p:spPr>
+          <a:xfrm>
+            <a:off x="4306824" y="1554480"/>
+            <a:ext cx="3575304" cy="4526280"/>
+          </a:xfrm>
+          <a:prstGeom prst="roundRect">
+            <a:avLst>
+              <a:gd name="adj" fmla="val 2558"/>
+            </a:avLst>
+          </a:prstGeom>
+          <a:solidFill>
+            <a:srgbClr val="15294A"/>
+          </a:solidFill>
+          <a:ln w="12700">
+            <a:solidFill>
+              <a:srgbClr val="24406B"/>
+            </a:solidFill>
+            <a:prstDash val="solid"/>
+          </a:ln>
+          <a:effectLst>
+            <a:outerShdw sx="100000" sy="100000" kx="0" ky="0" algn="bl" rotWithShape="0" blurRad="101600" dist="38100" dir="5400000">
+              <a:srgbClr val="05080F">
+                <a:alpha val="55000"/>
+              </a:srgbClr>
+            </a:outerShdw>
+          </a:effectLst>
+        </p:spPr>
+      </p:sp>
+      <p:sp>
+        <p:nvSpPr>
+          <p:cNvPr id="8" name="Text 6"/>
+          <p:cNvSpPr/>
+          <p:nvPr/>
+        </p:nvSpPr>
+        <p:spPr>
+          <a:xfrm>
+            <a:off x="4507992" y="1691640"/>
+            <a:ext cx="3200400" cy="457200"/>
+          </a:xfrm>
+          <a:prstGeom prst="rect">
+            <a:avLst/>
+          </a:prstGeom>
+          <a:noFill/>
+          <a:ln/>
+        </p:spPr>
+        <p:txBody>
+          <a:bodyPr wrap="square" rtlCol="0" anchor="ctr"/>
+          <a:lstStyle/>
+          <a:p>
+            <a:pPr algn="r" indent="0" marL="0">
+              <a:buNone/>
+            </a:pPr>
+            <a:r>
+              <a:rPr lang="en-US" sz="1600" b="1" dirty="0">
+                <a:solidFill>
+                  <a:srgbClr val="F5A623"/>
+                </a:solidFill>
+                <a:latin typeface="Arial" pitchFamily="34" charset="0"/>
+                <a:ea typeface="Arial" pitchFamily="34" charset="-122"/>
+                <a:cs typeface="Arial" pitchFamily="34" charset="-120"/>
+              </a:rPr>
+              <a:t>כלים ותיעודם</a:t>
+            </a:r>
+            <a:endParaRPr lang="en-US" sz="1600" dirty="0"/>
+          </a:p>
+        </p:txBody>
+      </p:sp>
+      <p:sp>
+        <p:nvSpPr>
+          <p:cNvPr id="9" name="Text 7"/>
+          <p:cNvSpPr/>
+          <p:nvPr/>
+        </p:nvSpPr>
+        <p:spPr>
+          <a:xfrm>
+            <a:off x="4507992" y="2240280"/>
+            <a:ext cx="3200400" cy="3657600"/>
+          </a:xfrm>
+          <a:prstGeom prst="rect">
+            <a:avLst/>
+          </a:prstGeom>
+          <a:noFill/>
+          <a:ln/>
+        </p:spPr>
+        <p:txBody>
+          <a:bodyPr wrap="square" rtlCol="0" anchor="ctr"/>
+          <a:lstStyle/>
+          <a:p>
+            <a:pPr algn="r" marL="342900" indent="-342900">
+              <a:lnSpc>
+                <a:spcPct val="108000"/>
+              </a:lnSpc>
+              <a:spcAft>
+                <a:spcPts val="900"/>
+              </a:spcAft>
+              <a:buSzPct val="100000"/>
+              <a:buChar char="•"/>
+            </a:pPr>
+            <a:r>
+              <a:rPr lang="en-US" sz="1150" dirty="0">
+                <a:solidFill>
+                  <a:srgbClr val="EAF2FB"/>
+                </a:solidFill>
+                <a:latin typeface="Arial" pitchFamily="34" charset="0"/>
+                <a:ea typeface="Arial" pitchFamily="34" charset="-122"/>
+                <a:cs typeface="Arial" pitchFamily="34" charset="-120"/>
+              </a:rPr>
+              <a:t>Delpy — mimikatz (Pass-the-Hash, DCSync, Golden Ticket)</a:t>
+            </a:r>
+            <a:endParaRPr lang="en-US" sz="1150" dirty="0"/>
+          </a:p>
+          <a:p>
+            <a:pPr algn="r" marL="342900" indent="-342900">
+              <a:lnSpc>
+                <a:spcPct val="108000"/>
+              </a:lnSpc>
+              <a:spcAft>
+                <a:spcPts val="900"/>
+              </a:spcAft>
+              <a:buSzPct val="100000"/>
+              <a:buChar char="•"/>
+            </a:pPr>
+            <a:r>
+              <a:rPr lang="en-US" sz="1150" dirty="0">
+                <a:solidFill>
+                  <a:srgbClr val="EAF2FB"/>
+                </a:solidFill>
+                <a:latin typeface="Arial" pitchFamily="34" charset="0"/>
+                <a:ea typeface="Arial" pitchFamily="34" charset="-122"/>
+                <a:cs typeface="Arial" pitchFamily="34" charset="-120"/>
+              </a:rPr>
+              <a:t>Impacket (Fortra) — secretsdump, GetUserSPNs, psexec</a:t>
+            </a:r>
+            <a:endParaRPr lang="en-US" sz="1150" dirty="0"/>
+          </a:p>
+          <a:p>
+            <a:pPr algn="r" marL="342900" indent="-342900">
+              <a:lnSpc>
+                <a:spcPct val="108000"/>
+              </a:lnSpc>
+              <a:spcAft>
+                <a:spcPts val="900"/>
+              </a:spcAft>
+              <a:buSzPct val="100000"/>
+              <a:buChar char="•"/>
+            </a:pPr>
+            <a:r>
+              <a:rPr lang="en-US" sz="1150" dirty="0">
+                <a:solidFill>
+                  <a:srgbClr val="EAF2FB"/>
+                </a:solidFill>
+                <a:latin typeface="Arial" pitchFamily="34" charset="0"/>
+                <a:ea typeface="Arial" pitchFamily="34" charset="-122"/>
+                <a:cs typeface="Arial" pitchFamily="34" charset="-120"/>
+              </a:rPr>
+              <a:t>BloodHound / SharpHound (SpecterOps)</a:t>
+            </a:r>
+            <a:endParaRPr lang="en-US" sz="1150" dirty="0"/>
+          </a:p>
+          <a:p>
+            <a:pPr algn="r" marL="342900" indent="-342900">
+              <a:lnSpc>
+                <a:spcPct val="108000"/>
+              </a:lnSpc>
+              <a:spcAft>
+                <a:spcPts val="900"/>
+              </a:spcAft>
+              <a:buSzPct val="100000"/>
+              <a:buChar char="•"/>
+            </a:pPr>
+            <a:r>
+              <a:rPr lang="en-US" sz="1150" dirty="0">
+                <a:solidFill>
+                  <a:srgbClr val="EAF2FB"/>
+                </a:solidFill>
+                <a:latin typeface="Arial" pitchFamily="34" charset="0"/>
+                <a:ea typeface="Arial" pitchFamily="34" charset="-122"/>
+                <a:cs typeface="Arial" pitchFamily="34" charset="-120"/>
+              </a:rPr>
+              <a:t>NetExec (nxc) / CrackMapExec</a:t>
+            </a:r>
+            <a:endParaRPr lang="en-US" sz="1150" dirty="0"/>
+          </a:p>
+          <a:p>
+            <a:pPr algn="r" marL="342900" indent="-342900">
+              <a:lnSpc>
+                <a:spcPct val="108000"/>
+              </a:lnSpc>
+              <a:spcAft>
+                <a:spcPts val="900"/>
+              </a:spcAft>
+              <a:buSzPct val="100000"/>
+              <a:buChar char="•"/>
+            </a:pPr>
+            <a:r>
+              <a:rPr lang="en-US" sz="1150" dirty="0">
+                <a:solidFill>
+                  <a:srgbClr val="EAF2FB"/>
+                </a:solidFill>
+                <a:latin typeface="Arial" pitchFamily="34" charset="0"/>
+                <a:ea typeface="Arial" pitchFamily="34" charset="-122"/>
+                <a:cs typeface="Arial" pitchFamily="34" charset="-120"/>
+              </a:rPr>
+              <a:t>Certipy · Rubeus · PowerView (harmj0y)</a:t>
+            </a:r>
+            <a:endParaRPr lang="en-US" sz="1150" dirty="0"/>
+          </a:p>
+        </p:txBody>
+      </p:sp>
+      <p:sp>
+        <p:nvSpPr>
+          <p:cNvPr id="10" name="Shape 8"/>
+          <p:cNvSpPr/>
+          <p:nvPr/>
+        </p:nvSpPr>
+        <p:spPr>
+          <a:xfrm>
+            <a:off x="548640" y="1554480"/>
+            <a:ext cx="3575304" cy="4526280"/>
+          </a:xfrm>
+          <a:prstGeom prst="roundRect">
+            <a:avLst>
+              <a:gd name="adj" fmla="val 2558"/>
+            </a:avLst>
+          </a:prstGeom>
+          <a:solidFill>
+            <a:srgbClr val="15294A"/>
+          </a:solidFill>
+          <a:ln w="12700">
+            <a:solidFill>
+              <a:srgbClr val="24406B"/>
+            </a:solidFill>
+            <a:prstDash val="solid"/>
+          </a:ln>
+          <a:effectLst>
+            <a:outerShdw sx="100000" sy="100000" kx="0" ky="0" algn="bl" rotWithShape="0" blurRad="101600" dist="38100" dir="5400000">
+              <a:srgbClr val="05080F">
+                <a:alpha val="55000"/>
+              </a:srgbClr>
+            </a:outerShdw>
+          </a:effectLst>
+        </p:spPr>
+      </p:sp>
+      <p:sp>
+        <p:nvSpPr>
+          <p:cNvPr id="11" name="Text 9"/>
+          <p:cNvSpPr/>
+          <p:nvPr/>
+        </p:nvSpPr>
+        <p:spPr>
+          <a:xfrm>
+            <a:off x="749808" y="1691640"/>
+            <a:ext cx="3200400" cy="457200"/>
+          </a:xfrm>
+          <a:prstGeom prst="rect">
+            <a:avLst/>
+          </a:prstGeom>
+          <a:noFill/>
+          <a:ln/>
+        </p:spPr>
+        <p:txBody>
+          <a:bodyPr wrap="square" rtlCol="0" anchor="ctr"/>
+          <a:lstStyle/>
+          <a:p>
+            <a:pPr algn="r" indent="0" marL="0">
+              <a:buNone/>
+            </a:pPr>
+            <a:r>
+              <a:rPr lang="en-US" sz="1600" b="1" dirty="0">
+                <a:solidFill>
+                  <a:srgbClr val="2A7B8C"/>
+                </a:solidFill>
+                <a:latin typeface="Arial" pitchFamily="34" charset="0"/>
+                <a:ea typeface="Arial" pitchFamily="34" charset="-122"/>
+                <a:cs typeface="Arial" pitchFamily="34" charset="-120"/>
+              </a:rPr>
+              <a:t>ספרים ומסלולי הכשרה</a:t>
+            </a:r>
+            <a:endParaRPr lang="en-US" sz="1600" dirty="0"/>
+          </a:p>
+        </p:txBody>
+      </p:sp>
+      <p:sp>
+        <p:nvSpPr>
+          <p:cNvPr id="12" name="Text 10"/>
+          <p:cNvSpPr/>
+          <p:nvPr/>
+        </p:nvSpPr>
+        <p:spPr>
+          <a:xfrm>
+            <a:off x="749808" y="2240280"/>
+            <a:ext cx="3200400" cy="3657600"/>
+          </a:xfrm>
+          <a:prstGeom prst="rect">
+            <a:avLst/>
+          </a:prstGeom>
+          <a:noFill/>
+          <a:ln/>
+        </p:spPr>
+        <p:txBody>
+          <a:bodyPr wrap="square" rtlCol="0" anchor="ctr"/>
+          <a:lstStyle/>
+          <a:p>
+            <a:pPr algn="r" marL="342900" indent="-342900">
+              <a:lnSpc>
+                <a:spcPct val="108000"/>
+              </a:lnSpc>
+              <a:spcAft>
+                <a:spcPts val="900"/>
+              </a:spcAft>
+              <a:buSzPct val="100000"/>
+              <a:buChar char="•"/>
+            </a:pPr>
+            <a:r>
+              <a:rPr lang="en-US" sz="1150" dirty="0">
+                <a:solidFill>
+                  <a:srgbClr val="EAF2FB"/>
+                </a:solidFill>
+                <a:latin typeface="Arial" pitchFamily="34" charset="0"/>
+                <a:ea typeface="Arial" pitchFamily="34" charset="-122"/>
+                <a:cs typeface="Arial" pitchFamily="34" charset="-120"/>
+              </a:rPr>
+              <a:t>Kim — The Hacker Playbook 3 (2018)</a:t>
+            </a:r>
+            <a:endParaRPr lang="en-US" sz="1150" dirty="0"/>
+          </a:p>
+          <a:p>
+            <a:pPr algn="r" marL="342900" indent="-342900">
+              <a:lnSpc>
+                <a:spcPct val="108000"/>
+              </a:lnSpc>
+              <a:spcAft>
+                <a:spcPts val="900"/>
+              </a:spcAft>
+              <a:buSzPct val="100000"/>
+              <a:buChar char="•"/>
+            </a:pPr>
+            <a:r>
+              <a:rPr lang="en-US" sz="1150" dirty="0">
+                <a:solidFill>
+                  <a:srgbClr val="EAF2FB"/>
+                </a:solidFill>
+                <a:latin typeface="Arial" pitchFamily="34" charset="0"/>
+                <a:ea typeface="Arial" pitchFamily="34" charset="-122"/>
+                <a:cs typeface="Arial" pitchFamily="34" charset="-120"/>
+              </a:rPr>
+              <a:t>Weidman — Penetration Testing (No Starch, 2014)</a:t>
+            </a:r>
+            <a:endParaRPr lang="en-US" sz="1150" dirty="0"/>
+          </a:p>
+          <a:p>
+            <a:pPr algn="r" marL="342900" indent="-342900">
+              <a:lnSpc>
+                <a:spcPct val="108000"/>
+              </a:lnSpc>
+              <a:spcAft>
+                <a:spcPts val="900"/>
+              </a:spcAft>
+              <a:buSzPct val="100000"/>
+              <a:buChar char="•"/>
+            </a:pPr>
+            <a:r>
+              <a:rPr lang="en-US" sz="1150" dirty="0">
+                <a:solidFill>
+                  <a:srgbClr val="EAF2FB"/>
+                </a:solidFill>
+                <a:latin typeface="Arial" pitchFamily="34" charset="0"/>
+                <a:ea typeface="Arial" pitchFamily="34" charset="-122"/>
+                <a:cs typeface="Arial" pitchFamily="34" charset="-120"/>
+              </a:rPr>
+              <a:t>HTB Academy — CPTS / AD Enumeration &amp; Attacks</a:t>
+            </a:r>
+            <a:endParaRPr lang="en-US" sz="1150" dirty="0"/>
+          </a:p>
+          <a:p>
+            <a:pPr algn="r" marL="342900" indent="-342900">
+              <a:lnSpc>
+                <a:spcPct val="108000"/>
+              </a:lnSpc>
+              <a:spcAft>
+                <a:spcPts val="900"/>
+              </a:spcAft>
+              <a:buSzPct val="100000"/>
+              <a:buChar char="•"/>
+            </a:pPr>
+            <a:r>
+              <a:rPr lang="en-US" sz="1150" dirty="0">
+                <a:solidFill>
+                  <a:srgbClr val="EAF2FB"/>
+                </a:solidFill>
+                <a:latin typeface="Arial" pitchFamily="34" charset="0"/>
+                <a:ea typeface="Arial" pitchFamily="34" charset="-122"/>
+                <a:cs typeface="Arial" pitchFamily="34" charset="-120"/>
+              </a:rPr>
+              <a:t>HTB Labs — Forest, Sauna, Active, Blackfield, Support</a:t>
+            </a:r>
+            <a:endParaRPr lang="en-US" sz="1150" dirty="0"/>
+          </a:p>
+          <a:p>
+            <a:pPr algn="r" marL="342900" indent="-342900">
+              <a:lnSpc>
+                <a:spcPct val="108000"/>
+              </a:lnSpc>
+              <a:spcAft>
+                <a:spcPts val="900"/>
+              </a:spcAft>
+              <a:buSzPct val="100000"/>
+              <a:buChar char="•"/>
+            </a:pPr>
+            <a:r>
+              <a:rPr lang="en-US" sz="1150" dirty="0">
+                <a:solidFill>
+                  <a:srgbClr val="EAF2FB"/>
+                </a:solidFill>
+                <a:latin typeface="Arial" pitchFamily="34" charset="0"/>
+                <a:ea typeface="Arial" pitchFamily="34" charset="-122"/>
+                <a:cs typeface="Arial" pitchFamily="34" charset="-120"/>
+              </a:rPr>
+              <a:t>HTB Pro Labs — Dante, Zephyr, Cerberus (multi-host AD)</a:t>
+            </a:r>
+            <a:endParaRPr lang="en-US" sz="1150" dirty="0"/>
+          </a:p>
+          <a:p>
+            <a:pPr algn="r" marL="342900" indent="-342900">
+              <a:lnSpc>
+                <a:spcPct val="108000"/>
+              </a:lnSpc>
+              <a:spcAft>
+                <a:spcPts val="900"/>
+              </a:spcAft>
+              <a:buSzPct val="100000"/>
+              <a:buChar char="•"/>
+            </a:pPr>
+            <a:r>
+              <a:rPr lang="en-US" sz="1150" dirty="0">
+                <a:solidFill>
+                  <a:srgbClr val="EAF2FB"/>
+                </a:solidFill>
+                <a:latin typeface="Arial" pitchFamily="34" charset="0"/>
+                <a:ea typeface="Arial" pitchFamily="34" charset="-122"/>
+                <a:cs typeface="Arial" pitchFamily="34" charset="-120"/>
+              </a:rPr>
+              <a:t>Offensive Security — OSCP / OSEP materials</a:t>
+            </a:r>
+            <a:endParaRPr lang="en-US" sz="1150" dirty="0"/>
+          </a:p>
+        </p:txBody>
+      </p:sp>
+    </p:spTree>
+  </p:cSld>
+  <p:clrMapOvr>
+    <a:masterClrMapping/>
+  </p:clrMapOvr>
+</p:sld>
+</file>
+
+<file path=ppt/slides/slide13.xml><?xml version="1.0" encoding="utf-8"?>
+<p:sld xmlns:a="http://schemas.openxmlformats.org/drawingml/2006/main" xmlns:r="http://schemas.openxmlformats.org/officeDocument/2006/relationships" xmlns:p="http://schemas.openxmlformats.org/presentationml/2006/main">
+  <p:cSld name="Slide 13">
+    <p:bg>
+      <p:bgPr>
+        <a:solidFill>
+          <a:srgbClr val="0C1626"/>
+        </a:solidFill>
+      </p:bgPr>
+    </p:bg>
+    <p:spTree>
+      <p:nvGrpSpPr>
+        <p:cNvPr id="1" name=""/>
+        <p:cNvGrpSpPr/>
+        <p:nvPr/>
+      </p:nvGrpSpPr>
+      <p:grpSpPr>
+        <a:xfrm>
+          <a:off x="0" y="0"/>
+          <a:ext cx="0" cy="0"/>
+          <a:chOff x="0" y="0"/>
+          <a:chExt cx="0" cy="0"/>
+        </a:xfrm>
+      </p:grpSpPr>
+      <p:sp>
+        <p:nvSpPr>
+          <p:cNvPr id="2" name="Text 0"/>
+          <p:cNvSpPr/>
+          <p:nvPr/>
+        </p:nvSpPr>
+        <p:spPr>
+          <a:xfrm>
             <a:off x="7863840" y="-548640"/>
             <a:ext cx="4754880" cy="5943600"/>
           </a:xfrm>
@@ -10210,7 +10932,7 @@
                 <a:ea typeface="Arial" pitchFamily="34" charset="-122"/>
                 <a:cs typeface="Arial" pitchFamily="34" charset="-120"/>
               </a:rPr>
-              <a:t>הגנה והתמודדות</a:t>
+              <a:t>שרשרת התקיפה המלאה</a:t>
             </a:r>
             <a:endParaRPr lang="en-US" sz="3200" dirty="0"/>
           </a:p>
@@ -10249,7 +10971,7 @@
                 <a:ea typeface="Arial" pitchFamily="34" charset="-122"/>
                 <a:cs typeface="Arial" pitchFamily="34" charset="-120"/>
               </a:rPr>
-              <a:t>DEFENSE — MAPPING OFFENSE TO MITIGATION</a:t>
+              <a:t>THE FULL ATTACK CHAIN — UNAUTH → DOMAIN ADMIN</a:t>
             </a:r>
             <a:endParaRPr lang="en-US" sz="1200" dirty="0"/>
           </a:p>
@@ -10263,12 +10985,1497 @@
         </p:nvSpPr>
         <p:spPr>
           <a:xfrm>
-            <a:off x="548640" y="1645920"/>
-            <a:ext cx="11091672" cy="987552"/>
+            <a:off x="9272016" y="1783080"/>
+            <a:ext cx="2286000" cy="1097280"/>
           </a:xfrm>
           <a:prstGeom prst="roundRect">
             <a:avLst>
-              <a:gd name="adj" fmla="val 9259"/>
+              <a:gd name="adj" fmla="val 7500"/>
+            </a:avLst>
+          </a:prstGeom>
+          <a:solidFill>
+            <a:srgbClr val="15294A"/>
+          </a:solidFill>
+          <a:ln w="25400">
+            <a:solidFill>
+              <a:srgbClr val="35D0E0"/>
+            </a:solidFill>
+            <a:prstDash val="solid"/>
+          </a:ln>
+          <a:effectLst>
+            <a:outerShdw sx="100000" sy="100000" kx="0" ky="0" algn="bl" rotWithShape="0" blurRad="101600" dist="38100" dir="5400000">
+              <a:srgbClr val="05080F">
+                <a:alpha val="55000"/>
+              </a:srgbClr>
+            </a:outerShdw>
+          </a:effectLst>
+        </p:spPr>
+      </p:sp>
+      <p:sp>
+        <p:nvSpPr>
+          <p:cNvPr id="5" name="Shape 3"/>
+          <p:cNvSpPr/>
+          <p:nvPr/>
+        </p:nvSpPr>
+        <p:spPr>
+          <a:xfrm>
+            <a:off x="11064240" y="1911096"/>
+            <a:ext cx="365760" cy="365760"/>
+          </a:xfrm>
+          <a:prstGeom prst="oval">
+            <a:avLst/>
+          </a:prstGeom>
+          <a:solidFill>
+            <a:srgbClr val="35D0E0"/>
+          </a:solidFill>
+          <a:ln w="12700">
+            <a:solidFill>
+              <a:srgbClr val="35D0E0"/>
+            </a:solidFill>
+            <a:prstDash val="solid"/>
+          </a:ln>
+        </p:spPr>
+      </p:sp>
+      <p:sp>
+        <p:nvSpPr>
+          <p:cNvPr id="6" name="Text 4"/>
+          <p:cNvSpPr/>
+          <p:nvPr/>
+        </p:nvSpPr>
+        <p:spPr>
+          <a:xfrm>
+            <a:off x="11064240" y="1911096"/>
+            <a:ext cx="365760" cy="365760"/>
+          </a:xfrm>
+          <a:prstGeom prst="rect">
+            <a:avLst/>
+          </a:prstGeom>
+          <a:noFill/>
+          <a:ln/>
+        </p:spPr>
+        <p:txBody>
+          <a:bodyPr wrap="square" rtlCol="0" anchor="ctr"/>
+          <a:lstStyle/>
+          <a:p>
+            <a:pPr algn="ctr" indent="0" marL="0">
+              <a:buNone/>
+            </a:pPr>
+            <a:r>
+              <a:rPr lang="en-US" sz="1300" b="1" dirty="0">
+                <a:solidFill>
+                  <a:srgbClr val="0C1626"/>
+                </a:solidFill>
+                <a:latin typeface="Arial" pitchFamily="34" charset="0"/>
+                <a:ea typeface="Arial" pitchFamily="34" charset="-122"/>
+                <a:cs typeface="Arial" pitchFamily="34" charset="-120"/>
+              </a:rPr>
+              <a:t>1</a:t>
+            </a:r>
+            <a:endParaRPr lang="en-US" sz="1300" dirty="0"/>
+          </a:p>
+        </p:txBody>
+      </p:sp>
+      <p:sp>
+        <p:nvSpPr>
+          <p:cNvPr id="7" name="Text 5"/>
+          <p:cNvSpPr/>
+          <p:nvPr/>
+        </p:nvSpPr>
+        <p:spPr>
+          <a:xfrm>
+            <a:off x="9400032" y="1929384"/>
+            <a:ext cx="1609344" cy="457200"/>
+          </a:xfrm>
+          <a:prstGeom prst="rect">
+            <a:avLst/>
+          </a:prstGeom>
+          <a:noFill/>
+          <a:ln/>
+        </p:spPr>
+        <p:txBody>
+          <a:bodyPr wrap="square" rtlCol="0" anchor="ctr"/>
+          <a:lstStyle/>
+          <a:p>
+            <a:pPr rtl="1" algn="r" indent="0" marL="0">
+              <a:buNone/>
+            </a:pPr>
+            <a:r>
+              <a:rPr lang="en-US" sz="1400" b="1" dirty="0">
+                <a:solidFill>
+                  <a:srgbClr val="EAF2FB"/>
+                </a:solidFill>
+                <a:latin typeface="Arial" pitchFamily="34" charset="0"/>
+                <a:ea typeface="Arial" pitchFamily="34" charset="-122"/>
+                <a:cs typeface="Arial" pitchFamily="34" charset="-120"/>
+              </a:rPr>
+              <a:t>גישה לא-מאומת</a:t>
+            </a:r>
+            <a:endParaRPr lang="en-US" sz="1400" dirty="0"/>
+          </a:p>
+        </p:txBody>
+      </p:sp>
+      <p:sp>
+        <p:nvSpPr>
+          <p:cNvPr id="8" name="Text 6"/>
+          <p:cNvSpPr/>
+          <p:nvPr/>
+        </p:nvSpPr>
+        <p:spPr>
+          <a:xfrm>
+            <a:off x="9400032" y="2423160"/>
+            <a:ext cx="2029968" cy="347472"/>
+          </a:xfrm>
+          <a:prstGeom prst="rect">
+            <a:avLst/>
+          </a:prstGeom>
+          <a:noFill/>
+          <a:ln/>
+        </p:spPr>
+        <p:txBody>
+          <a:bodyPr wrap="square" rtlCol="0" anchor="ctr"/>
+          <a:lstStyle/>
+          <a:p>
+            <a:pPr algn="r" indent="0" marL="0">
+              <a:buNone/>
+            </a:pPr>
+            <a:r>
+              <a:rPr lang="en-US" sz="1050" dirty="0">
+                <a:solidFill>
+                  <a:srgbClr val="9FB4CE"/>
+                </a:solidFill>
+                <a:latin typeface="Courier New" pitchFamily="34" charset="0"/>
+                <a:ea typeface="Courier New" pitchFamily="34" charset="-122"/>
+                <a:cs typeface="Courier New" pitchFamily="34" charset="-120"/>
+              </a:rPr>
+              <a:t>nmap · SMB null</a:t>
+            </a:r>
+            <a:endParaRPr lang="en-US" sz="1050" dirty="0"/>
+          </a:p>
+        </p:txBody>
+      </p:sp>
+      <p:sp>
+        <p:nvSpPr>
+          <p:cNvPr id="9" name="Shape 7"/>
+          <p:cNvSpPr/>
+          <p:nvPr/>
+        </p:nvSpPr>
+        <p:spPr>
+          <a:xfrm>
+            <a:off x="6364224" y="1783080"/>
+            <a:ext cx="2286000" cy="1097280"/>
+          </a:xfrm>
+          <a:prstGeom prst="roundRect">
+            <a:avLst>
+              <a:gd name="adj" fmla="val 7500"/>
+            </a:avLst>
+          </a:prstGeom>
+          <a:solidFill>
+            <a:srgbClr val="15294A"/>
+          </a:solidFill>
+          <a:ln w="25400">
+            <a:solidFill>
+              <a:srgbClr val="35D0E0"/>
+            </a:solidFill>
+            <a:prstDash val="solid"/>
+          </a:ln>
+          <a:effectLst>
+            <a:outerShdw sx="100000" sy="100000" kx="0" ky="0" algn="bl" rotWithShape="0" blurRad="101600" dist="38100" dir="5400000">
+              <a:srgbClr val="05080F">
+                <a:alpha val="55000"/>
+              </a:srgbClr>
+            </a:outerShdw>
+          </a:effectLst>
+        </p:spPr>
+      </p:sp>
+      <p:sp>
+        <p:nvSpPr>
+          <p:cNvPr id="10" name="Shape 8"/>
+          <p:cNvSpPr/>
+          <p:nvPr/>
+        </p:nvSpPr>
+        <p:spPr>
+          <a:xfrm>
+            <a:off x="8156448" y="1911096"/>
+            <a:ext cx="365760" cy="365760"/>
+          </a:xfrm>
+          <a:prstGeom prst="oval">
+            <a:avLst/>
+          </a:prstGeom>
+          <a:solidFill>
+            <a:srgbClr val="35D0E0"/>
+          </a:solidFill>
+          <a:ln w="12700">
+            <a:solidFill>
+              <a:srgbClr val="35D0E0"/>
+            </a:solidFill>
+            <a:prstDash val="solid"/>
+          </a:ln>
+        </p:spPr>
+      </p:sp>
+      <p:sp>
+        <p:nvSpPr>
+          <p:cNvPr id="11" name="Text 9"/>
+          <p:cNvSpPr/>
+          <p:nvPr/>
+        </p:nvSpPr>
+        <p:spPr>
+          <a:xfrm>
+            <a:off x="8156448" y="1911096"/>
+            <a:ext cx="365760" cy="365760"/>
+          </a:xfrm>
+          <a:prstGeom prst="rect">
+            <a:avLst/>
+          </a:prstGeom>
+          <a:noFill/>
+          <a:ln/>
+        </p:spPr>
+        <p:txBody>
+          <a:bodyPr wrap="square" rtlCol="0" anchor="ctr"/>
+          <a:lstStyle/>
+          <a:p>
+            <a:pPr algn="ctr" indent="0" marL="0">
+              <a:buNone/>
+            </a:pPr>
+            <a:r>
+              <a:rPr lang="en-US" sz="1300" b="1" dirty="0">
+                <a:solidFill>
+                  <a:srgbClr val="0C1626"/>
+                </a:solidFill>
+                <a:latin typeface="Arial" pitchFamily="34" charset="0"/>
+                <a:ea typeface="Arial" pitchFamily="34" charset="-122"/>
+                <a:cs typeface="Arial" pitchFamily="34" charset="-120"/>
+              </a:rPr>
+              <a:t>2</a:t>
+            </a:r>
+            <a:endParaRPr lang="en-US" sz="1300" dirty="0"/>
+          </a:p>
+        </p:txBody>
+      </p:sp>
+      <p:sp>
+        <p:nvSpPr>
+          <p:cNvPr id="12" name="Text 10"/>
+          <p:cNvSpPr/>
+          <p:nvPr/>
+        </p:nvSpPr>
+        <p:spPr>
+          <a:xfrm>
+            <a:off x="6492240" y="1929384"/>
+            <a:ext cx="1609344" cy="457200"/>
+          </a:xfrm>
+          <a:prstGeom prst="rect">
+            <a:avLst/>
+          </a:prstGeom>
+          <a:noFill/>
+          <a:ln/>
+        </p:spPr>
+        <p:txBody>
+          <a:bodyPr wrap="square" rtlCol="0" anchor="ctr"/>
+          <a:lstStyle/>
+          <a:p>
+            <a:pPr rtl="1" algn="r" indent="0" marL="0">
+              <a:buNone/>
+            </a:pPr>
+            <a:r>
+              <a:rPr lang="en-US" sz="1400" b="1" dirty="0">
+                <a:solidFill>
+                  <a:srgbClr val="EAF2FB"/>
+                </a:solidFill>
+                <a:latin typeface="Arial" pitchFamily="34" charset="0"/>
+                <a:ea typeface="Arial" pitchFamily="34" charset="-122"/>
+                <a:cs typeface="Arial" pitchFamily="34" charset="-120"/>
+              </a:rPr>
+              <a:t>מנייה + AS-REP</a:t>
+            </a:r>
+            <a:endParaRPr lang="en-US" sz="1400" dirty="0"/>
+          </a:p>
+        </p:txBody>
+      </p:sp>
+      <p:sp>
+        <p:nvSpPr>
+          <p:cNvPr id="13" name="Text 11"/>
+          <p:cNvSpPr/>
+          <p:nvPr/>
+        </p:nvSpPr>
+        <p:spPr>
+          <a:xfrm>
+            <a:off x="6492240" y="2423160"/>
+            <a:ext cx="2029968" cy="347472"/>
+          </a:xfrm>
+          <a:prstGeom prst="rect">
+            <a:avLst/>
+          </a:prstGeom>
+          <a:noFill/>
+          <a:ln/>
+        </p:spPr>
+        <p:txBody>
+          <a:bodyPr wrap="square" rtlCol="0" anchor="ctr"/>
+          <a:lstStyle/>
+          <a:p>
+            <a:pPr algn="r" indent="0" marL="0">
+              <a:buNone/>
+            </a:pPr>
+            <a:r>
+              <a:rPr lang="en-US" sz="1050" dirty="0">
+                <a:solidFill>
+                  <a:srgbClr val="9FB4CE"/>
+                </a:solidFill>
+                <a:latin typeface="Courier New" pitchFamily="34" charset="0"/>
+                <a:ea typeface="Courier New" pitchFamily="34" charset="-122"/>
+                <a:cs typeface="Courier New" pitchFamily="34" charset="-120"/>
+              </a:rPr>
+              <a:t>GetNPUsers.py</a:t>
+            </a:r>
+            <a:endParaRPr lang="en-US" sz="1050" dirty="0"/>
+          </a:p>
+        </p:txBody>
+      </p:sp>
+      <p:sp>
+        <p:nvSpPr>
+          <p:cNvPr id="14" name="Shape 12"/>
+          <p:cNvSpPr/>
+          <p:nvPr/>
+        </p:nvSpPr>
+        <p:spPr>
+          <a:xfrm>
+            <a:off x="3456432" y="1783080"/>
+            <a:ext cx="2286000" cy="1097280"/>
+          </a:xfrm>
+          <a:prstGeom prst="roundRect">
+            <a:avLst>
+              <a:gd name="adj" fmla="val 7500"/>
+            </a:avLst>
+          </a:prstGeom>
+          <a:solidFill>
+            <a:srgbClr val="15294A"/>
+          </a:solidFill>
+          <a:ln w="25400">
+            <a:solidFill>
+              <a:srgbClr val="2A7B8C"/>
+            </a:solidFill>
+            <a:prstDash val="solid"/>
+          </a:ln>
+          <a:effectLst>
+            <a:outerShdw sx="100000" sy="100000" kx="0" ky="0" algn="bl" rotWithShape="0" blurRad="101600" dist="38100" dir="5400000">
+              <a:srgbClr val="05080F">
+                <a:alpha val="55000"/>
+              </a:srgbClr>
+            </a:outerShdw>
+          </a:effectLst>
+        </p:spPr>
+      </p:sp>
+      <p:sp>
+        <p:nvSpPr>
+          <p:cNvPr id="15" name="Shape 13"/>
+          <p:cNvSpPr/>
+          <p:nvPr/>
+        </p:nvSpPr>
+        <p:spPr>
+          <a:xfrm>
+            <a:off x="5248656" y="1911096"/>
+            <a:ext cx="365760" cy="365760"/>
+          </a:xfrm>
+          <a:prstGeom prst="oval">
+            <a:avLst/>
+          </a:prstGeom>
+          <a:solidFill>
+            <a:srgbClr val="2A7B8C"/>
+          </a:solidFill>
+          <a:ln w="12700">
+            <a:solidFill>
+              <a:srgbClr val="2A7B8C"/>
+            </a:solidFill>
+            <a:prstDash val="solid"/>
+          </a:ln>
+        </p:spPr>
+      </p:sp>
+      <p:sp>
+        <p:nvSpPr>
+          <p:cNvPr id="16" name="Text 14"/>
+          <p:cNvSpPr/>
+          <p:nvPr/>
+        </p:nvSpPr>
+        <p:spPr>
+          <a:xfrm>
+            <a:off x="5248656" y="1911096"/>
+            <a:ext cx="365760" cy="365760"/>
+          </a:xfrm>
+          <a:prstGeom prst="rect">
+            <a:avLst/>
+          </a:prstGeom>
+          <a:noFill/>
+          <a:ln/>
+        </p:spPr>
+        <p:txBody>
+          <a:bodyPr wrap="square" rtlCol="0" anchor="ctr"/>
+          <a:lstStyle/>
+          <a:p>
+            <a:pPr algn="ctr" indent="0" marL="0">
+              <a:buNone/>
+            </a:pPr>
+            <a:r>
+              <a:rPr lang="en-US" sz="1300" b="1" dirty="0">
+                <a:solidFill>
+                  <a:srgbClr val="0C1626"/>
+                </a:solidFill>
+                <a:latin typeface="Arial" pitchFamily="34" charset="0"/>
+                <a:ea typeface="Arial" pitchFamily="34" charset="-122"/>
+                <a:cs typeface="Arial" pitchFamily="34" charset="-120"/>
+              </a:rPr>
+              <a:t>3</a:t>
+            </a:r>
+            <a:endParaRPr lang="en-US" sz="1300" dirty="0"/>
+          </a:p>
+        </p:txBody>
+      </p:sp>
+      <p:sp>
+        <p:nvSpPr>
+          <p:cNvPr id="17" name="Text 15"/>
+          <p:cNvSpPr/>
+          <p:nvPr/>
+        </p:nvSpPr>
+        <p:spPr>
+          <a:xfrm>
+            <a:off x="3584448" y="1929384"/>
+            <a:ext cx="1609344" cy="457200"/>
+          </a:xfrm>
+          <a:prstGeom prst="rect">
+            <a:avLst/>
+          </a:prstGeom>
+          <a:noFill/>
+          <a:ln/>
+        </p:spPr>
+        <p:txBody>
+          <a:bodyPr wrap="square" rtlCol="0" anchor="ctr"/>
+          <a:lstStyle/>
+          <a:p>
+            <a:pPr rtl="1" algn="r" indent="0" marL="0">
+              <a:buNone/>
+            </a:pPr>
+            <a:r>
+              <a:rPr lang="en-US" sz="1400" b="1" dirty="0">
+                <a:solidFill>
+                  <a:srgbClr val="EAF2FB"/>
+                </a:solidFill>
+                <a:latin typeface="Arial" pitchFamily="34" charset="0"/>
+                <a:ea typeface="Arial" pitchFamily="34" charset="-122"/>
+                <a:cs typeface="Arial" pitchFamily="34" charset="-120"/>
+              </a:rPr>
+              <a:t>אישור ראשוני</a:t>
+            </a:r>
+            <a:endParaRPr lang="en-US" sz="1400" dirty="0"/>
+          </a:p>
+        </p:txBody>
+      </p:sp>
+      <p:sp>
+        <p:nvSpPr>
+          <p:cNvPr id="18" name="Text 16"/>
+          <p:cNvSpPr/>
+          <p:nvPr/>
+        </p:nvSpPr>
+        <p:spPr>
+          <a:xfrm>
+            <a:off x="3584448" y="2423160"/>
+            <a:ext cx="2029968" cy="347472"/>
+          </a:xfrm>
+          <a:prstGeom prst="rect">
+            <a:avLst/>
+          </a:prstGeom>
+          <a:noFill/>
+          <a:ln/>
+        </p:spPr>
+        <p:txBody>
+          <a:bodyPr wrap="square" rtlCol="0" anchor="ctr"/>
+          <a:lstStyle/>
+          <a:p>
+            <a:pPr algn="r" indent="0" marL="0">
+              <a:buNone/>
+            </a:pPr>
+            <a:r>
+              <a:rPr lang="en-US" sz="1050" dirty="0">
+                <a:solidFill>
+                  <a:srgbClr val="9FB4CE"/>
+                </a:solidFill>
+                <a:latin typeface="Courier New" pitchFamily="34" charset="0"/>
+                <a:ea typeface="Courier New" pitchFamily="34" charset="-122"/>
+                <a:cs typeface="Courier New" pitchFamily="34" charset="-120"/>
+              </a:rPr>
+              <a:t>hashcat 18200</a:t>
+            </a:r>
+            <a:endParaRPr lang="en-US" sz="1050" dirty="0"/>
+          </a:p>
+        </p:txBody>
+      </p:sp>
+      <p:sp>
+        <p:nvSpPr>
+          <p:cNvPr id="19" name="Shape 17"/>
+          <p:cNvSpPr/>
+          <p:nvPr/>
+        </p:nvSpPr>
+        <p:spPr>
+          <a:xfrm>
+            <a:off x="548640" y="1783080"/>
+            <a:ext cx="2286000" cy="1097280"/>
+          </a:xfrm>
+          <a:prstGeom prst="roundRect">
+            <a:avLst>
+              <a:gd name="adj" fmla="val 7500"/>
+            </a:avLst>
+          </a:prstGeom>
+          <a:solidFill>
+            <a:srgbClr val="15294A"/>
+          </a:solidFill>
+          <a:ln w="25400">
+            <a:solidFill>
+              <a:srgbClr val="F5A623"/>
+            </a:solidFill>
+            <a:prstDash val="solid"/>
+          </a:ln>
+          <a:effectLst>
+            <a:outerShdw sx="100000" sy="100000" kx="0" ky="0" algn="bl" rotWithShape="0" blurRad="101600" dist="38100" dir="5400000">
+              <a:srgbClr val="05080F">
+                <a:alpha val="55000"/>
+              </a:srgbClr>
+            </a:outerShdw>
+          </a:effectLst>
+        </p:spPr>
+      </p:sp>
+      <p:sp>
+        <p:nvSpPr>
+          <p:cNvPr id="20" name="Shape 18"/>
+          <p:cNvSpPr/>
+          <p:nvPr/>
+        </p:nvSpPr>
+        <p:spPr>
+          <a:xfrm>
+            <a:off x="2340864" y="1911096"/>
+            <a:ext cx="365760" cy="365760"/>
+          </a:xfrm>
+          <a:prstGeom prst="oval">
+            <a:avLst/>
+          </a:prstGeom>
+          <a:solidFill>
+            <a:srgbClr val="F5A623"/>
+          </a:solidFill>
+          <a:ln w="12700">
+            <a:solidFill>
+              <a:srgbClr val="F5A623"/>
+            </a:solidFill>
+            <a:prstDash val="solid"/>
+          </a:ln>
+        </p:spPr>
+      </p:sp>
+      <p:sp>
+        <p:nvSpPr>
+          <p:cNvPr id="21" name="Text 19"/>
+          <p:cNvSpPr/>
+          <p:nvPr/>
+        </p:nvSpPr>
+        <p:spPr>
+          <a:xfrm>
+            <a:off x="2340864" y="1911096"/>
+            <a:ext cx="365760" cy="365760"/>
+          </a:xfrm>
+          <a:prstGeom prst="rect">
+            <a:avLst/>
+          </a:prstGeom>
+          <a:noFill/>
+          <a:ln/>
+        </p:spPr>
+        <p:txBody>
+          <a:bodyPr wrap="square" rtlCol="0" anchor="ctr"/>
+          <a:lstStyle/>
+          <a:p>
+            <a:pPr algn="ctr" indent="0" marL="0">
+              <a:buNone/>
+            </a:pPr>
+            <a:r>
+              <a:rPr lang="en-US" sz="1300" b="1" dirty="0">
+                <a:solidFill>
+                  <a:srgbClr val="0C1626"/>
+                </a:solidFill>
+                <a:latin typeface="Arial" pitchFamily="34" charset="0"/>
+                <a:ea typeface="Arial" pitchFamily="34" charset="-122"/>
+                <a:cs typeface="Arial" pitchFamily="34" charset="-120"/>
+              </a:rPr>
+              <a:t>4</a:t>
+            </a:r>
+            <a:endParaRPr lang="en-US" sz="1300" dirty="0"/>
+          </a:p>
+        </p:txBody>
+      </p:sp>
+      <p:sp>
+        <p:nvSpPr>
+          <p:cNvPr id="22" name="Text 20"/>
+          <p:cNvSpPr/>
+          <p:nvPr/>
+        </p:nvSpPr>
+        <p:spPr>
+          <a:xfrm>
+            <a:off x="676656" y="1929384"/>
+            <a:ext cx="1609344" cy="457200"/>
+          </a:xfrm>
+          <a:prstGeom prst="rect">
+            <a:avLst/>
+          </a:prstGeom>
+          <a:noFill/>
+          <a:ln/>
+        </p:spPr>
+        <p:txBody>
+          <a:bodyPr wrap="square" rtlCol="0" anchor="ctr"/>
+          <a:lstStyle/>
+          <a:p>
+            <a:pPr rtl="1" algn="r" indent="0" marL="0">
+              <a:buNone/>
+            </a:pPr>
+            <a:r>
+              <a:rPr lang="en-US" sz="1400" b="1" dirty="0">
+                <a:solidFill>
+                  <a:srgbClr val="EAF2FB"/>
+                </a:solidFill>
+                <a:latin typeface="Arial" pitchFamily="34" charset="0"/>
+                <a:ea typeface="Arial" pitchFamily="34" charset="-122"/>
+                <a:cs typeface="Arial" pitchFamily="34" charset="-120"/>
+              </a:rPr>
+              <a:t>Kerberoast + BH</a:t>
+            </a:r>
+            <a:endParaRPr lang="en-US" sz="1400" dirty="0"/>
+          </a:p>
+        </p:txBody>
+      </p:sp>
+      <p:sp>
+        <p:nvSpPr>
+          <p:cNvPr id="23" name="Text 21"/>
+          <p:cNvSpPr/>
+          <p:nvPr/>
+        </p:nvSpPr>
+        <p:spPr>
+          <a:xfrm>
+            <a:off x="676656" y="2423160"/>
+            <a:ext cx="2029968" cy="347472"/>
+          </a:xfrm>
+          <a:prstGeom prst="rect">
+            <a:avLst/>
+          </a:prstGeom>
+          <a:noFill/>
+          <a:ln/>
+        </p:spPr>
+        <p:txBody>
+          <a:bodyPr wrap="square" rtlCol="0" anchor="ctr"/>
+          <a:lstStyle/>
+          <a:p>
+            <a:pPr algn="r" indent="0" marL="0">
+              <a:buNone/>
+            </a:pPr>
+            <a:r>
+              <a:rPr lang="en-US" sz="1050" dirty="0">
+                <a:solidFill>
+                  <a:srgbClr val="9FB4CE"/>
+                </a:solidFill>
+                <a:latin typeface="Courier New" pitchFamily="34" charset="0"/>
+                <a:ea typeface="Courier New" pitchFamily="34" charset="-122"/>
+                <a:cs typeface="Courier New" pitchFamily="34" charset="-120"/>
+              </a:rPr>
+              <a:t>GetUserSPNs.py</a:t>
+            </a:r>
+            <a:endParaRPr lang="en-US" sz="1050" dirty="0"/>
+          </a:p>
+        </p:txBody>
+      </p:sp>
+      <p:sp>
+        <p:nvSpPr>
+          <p:cNvPr id="24" name="Shape 22"/>
+          <p:cNvSpPr/>
+          <p:nvPr/>
+        </p:nvSpPr>
+        <p:spPr>
+          <a:xfrm>
+            <a:off x="548640" y="4206240"/>
+            <a:ext cx="2286000" cy="1097280"/>
+          </a:xfrm>
+          <a:prstGeom prst="roundRect">
+            <a:avLst>
+              <a:gd name="adj" fmla="val 7500"/>
+            </a:avLst>
+          </a:prstGeom>
+          <a:solidFill>
+            <a:srgbClr val="15294A"/>
+          </a:solidFill>
+          <a:ln w="25400">
+            <a:solidFill>
+              <a:srgbClr val="F5A623"/>
+            </a:solidFill>
+            <a:prstDash val="solid"/>
+          </a:ln>
+          <a:effectLst>
+            <a:outerShdw sx="100000" sy="100000" kx="0" ky="0" algn="bl" rotWithShape="0" blurRad="101600" dist="38100" dir="5400000">
+              <a:srgbClr val="05080F">
+                <a:alpha val="55000"/>
+              </a:srgbClr>
+            </a:outerShdw>
+          </a:effectLst>
+        </p:spPr>
+      </p:sp>
+      <p:sp>
+        <p:nvSpPr>
+          <p:cNvPr id="25" name="Shape 23"/>
+          <p:cNvSpPr/>
+          <p:nvPr/>
+        </p:nvSpPr>
+        <p:spPr>
+          <a:xfrm>
+            <a:off x="2340864" y="4334256"/>
+            <a:ext cx="365760" cy="365760"/>
+          </a:xfrm>
+          <a:prstGeom prst="oval">
+            <a:avLst/>
+          </a:prstGeom>
+          <a:solidFill>
+            <a:srgbClr val="F5A623"/>
+          </a:solidFill>
+          <a:ln w="12700">
+            <a:solidFill>
+              <a:srgbClr val="F5A623"/>
+            </a:solidFill>
+            <a:prstDash val="solid"/>
+          </a:ln>
+        </p:spPr>
+      </p:sp>
+      <p:sp>
+        <p:nvSpPr>
+          <p:cNvPr id="26" name="Text 24"/>
+          <p:cNvSpPr/>
+          <p:nvPr/>
+        </p:nvSpPr>
+        <p:spPr>
+          <a:xfrm>
+            <a:off x="2340864" y="4334256"/>
+            <a:ext cx="365760" cy="365760"/>
+          </a:xfrm>
+          <a:prstGeom prst="rect">
+            <a:avLst/>
+          </a:prstGeom>
+          <a:noFill/>
+          <a:ln/>
+        </p:spPr>
+        <p:txBody>
+          <a:bodyPr wrap="square" rtlCol="0" anchor="ctr"/>
+          <a:lstStyle/>
+          <a:p>
+            <a:pPr algn="ctr" indent="0" marL="0">
+              <a:buNone/>
+            </a:pPr>
+            <a:r>
+              <a:rPr lang="en-US" sz="1300" b="1" dirty="0">
+                <a:solidFill>
+                  <a:srgbClr val="0C1626"/>
+                </a:solidFill>
+                <a:latin typeface="Arial" pitchFamily="34" charset="0"/>
+                <a:ea typeface="Arial" pitchFamily="34" charset="-122"/>
+                <a:cs typeface="Arial" pitchFamily="34" charset="-120"/>
+              </a:rPr>
+              <a:t>5</a:t>
+            </a:r>
+            <a:endParaRPr lang="en-US" sz="1300" dirty="0"/>
+          </a:p>
+        </p:txBody>
+      </p:sp>
+      <p:sp>
+        <p:nvSpPr>
+          <p:cNvPr id="27" name="Text 25"/>
+          <p:cNvSpPr/>
+          <p:nvPr/>
+        </p:nvSpPr>
+        <p:spPr>
+          <a:xfrm>
+            <a:off x="676656" y="4352544"/>
+            <a:ext cx="1609344" cy="457200"/>
+          </a:xfrm>
+          <a:prstGeom prst="rect">
+            <a:avLst/>
+          </a:prstGeom>
+          <a:noFill/>
+          <a:ln/>
+        </p:spPr>
+        <p:txBody>
+          <a:bodyPr wrap="square" rtlCol="0" anchor="ctr"/>
+          <a:lstStyle/>
+          <a:p>
+            <a:pPr rtl="1" algn="r" indent="0" marL="0">
+              <a:buNone/>
+            </a:pPr>
+            <a:r>
+              <a:rPr lang="en-US" sz="1400" b="1" dirty="0">
+                <a:solidFill>
+                  <a:srgbClr val="EAF2FB"/>
+                </a:solidFill>
+                <a:latin typeface="Arial" pitchFamily="34" charset="0"/>
+                <a:ea typeface="Arial" pitchFamily="34" charset="-122"/>
+                <a:cs typeface="Arial" pitchFamily="34" charset="-120"/>
+              </a:rPr>
+              <a:t>תנועה לרוחב</a:t>
+            </a:r>
+            <a:endParaRPr lang="en-US" sz="1400" dirty="0"/>
+          </a:p>
+        </p:txBody>
+      </p:sp>
+      <p:sp>
+        <p:nvSpPr>
+          <p:cNvPr id="28" name="Text 26"/>
+          <p:cNvSpPr/>
+          <p:nvPr/>
+        </p:nvSpPr>
+        <p:spPr>
+          <a:xfrm>
+            <a:off x="676656" y="4846320"/>
+            <a:ext cx="2029968" cy="347472"/>
+          </a:xfrm>
+          <a:prstGeom prst="rect">
+            <a:avLst/>
+          </a:prstGeom>
+          <a:noFill/>
+          <a:ln/>
+        </p:spPr>
+        <p:txBody>
+          <a:bodyPr wrap="square" rtlCol="0" anchor="ctr"/>
+          <a:lstStyle/>
+          <a:p>
+            <a:pPr algn="r" indent="0" marL="0">
+              <a:buNone/>
+            </a:pPr>
+            <a:r>
+              <a:rPr lang="en-US" sz="1050" dirty="0">
+                <a:solidFill>
+                  <a:srgbClr val="9FB4CE"/>
+                </a:solidFill>
+                <a:latin typeface="Courier New" pitchFamily="34" charset="0"/>
+                <a:ea typeface="Courier New" pitchFamily="34" charset="-122"/>
+                <a:cs typeface="Courier New" pitchFamily="34" charset="-120"/>
+              </a:rPr>
+              <a:t>PtH · evil-winrm</a:t>
+            </a:r>
+            <a:endParaRPr lang="en-US" sz="1050" dirty="0"/>
+          </a:p>
+        </p:txBody>
+      </p:sp>
+      <p:sp>
+        <p:nvSpPr>
+          <p:cNvPr id="29" name="Shape 27"/>
+          <p:cNvSpPr/>
+          <p:nvPr/>
+        </p:nvSpPr>
+        <p:spPr>
+          <a:xfrm>
+            <a:off x="3456432" y="4206240"/>
+            <a:ext cx="2286000" cy="1097280"/>
+          </a:xfrm>
+          <a:prstGeom prst="roundRect">
+            <a:avLst>
+              <a:gd name="adj" fmla="val 7500"/>
+            </a:avLst>
+          </a:prstGeom>
+          <a:solidFill>
+            <a:srgbClr val="15294A"/>
+          </a:solidFill>
+          <a:ln w="25400">
+            <a:solidFill>
+              <a:srgbClr val="E5484D"/>
+            </a:solidFill>
+            <a:prstDash val="solid"/>
+          </a:ln>
+          <a:effectLst>
+            <a:outerShdw sx="100000" sy="100000" kx="0" ky="0" algn="bl" rotWithShape="0" blurRad="101600" dist="38100" dir="5400000">
+              <a:srgbClr val="05080F">
+                <a:alpha val="55000"/>
+              </a:srgbClr>
+            </a:outerShdw>
+          </a:effectLst>
+        </p:spPr>
+      </p:sp>
+      <p:sp>
+        <p:nvSpPr>
+          <p:cNvPr id="30" name="Shape 28"/>
+          <p:cNvSpPr/>
+          <p:nvPr/>
+        </p:nvSpPr>
+        <p:spPr>
+          <a:xfrm>
+            <a:off x="5248656" y="4334256"/>
+            <a:ext cx="365760" cy="365760"/>
+          </a:xfrm>
+          <a:prstGeom prst="oval">
+            <a:avLst/>
+          </a:prstGeom>
+          <a:solidFill>
+            <a:srgbClr val="E5484D"/>
+          </a:solidFill>
+          <a:ln w="12700">
+            <a:solidFill>
+              <a:srgbClr val="E5484D"/>
+            </a:solidFill>
+            <a:prstDash val="solid"/>
+          </a:ln>
+        </p:spPr>
+      </p:sp>
+      <p:sp>
+        <p:nvSpPr>
+          <p:cNvPr id="31" name="Text 29"/>
+          <p:cNvSpPr/>
+          <p:nvPr/>
+        </p:nvSpPr>
+        <p:spPr>
+          <a:xfrm>
+            <a:off x="5248656" y="4334256"/>
+            <a:ext cx="365760" cy="365760"/>
+          </a:xfrm>
+          <a:prstGeom prst="rect">
+            <a:avLst/>
+          </a:prstGeom>
+          <a:noFill/>
+          <a:ln/>
+        </p:spPr>
+        <p:txBody>
+          <a:bodyPr wrap="square" rtlCol="0" anchor="ctr"/>
+          <a:lstStyle/>
+          <a:p>
+            <a:pPr algn="ctr" indent="0" marL="0">
+              <a:buNone/>
+            </a:pPr>
+            <a:r>
+              <a:rPr lang="en-US" sz="1300" b="1" dirty="0">
+                <a:solidFill>
+                  <a:srgbClr val="0C1626"/>
+                </a:solidFill>
+                <a:latin typeface="Arial" pitchFamily="34" charset="0"/>
+                <a:ea typeface="Arial" pitchFamily="34" charset="-122"/>
+                <a:cs typeface="Arial" pitchFamily="34" charset="-120"/>
+              </a:rPr>
+              <a:t>6</a:t>
+            </a:r>
+            <a:endParaRPr lang="en-US" sz="1300" dirty="0"/>
+          </a:p>
+        </p:txBody>
+      </p:sp>
+      <p:sp>
+        <p:nvSpPr>
+          <p:cNvPr id="32" name="Text 30"/>
+          <p:cNvSpPr/>
+          <p:nvPr/>
+        </p:nvSpPr>
+        <p:spPr>
+          <a:xfrm>
+            <a:off x="3584448" y="4352544"/>
+            <a:ext cx="1609344" cy="457200"/>
+          </a:xfrm>
+          <a:prstGeom prst="rect">
+            <a:avLst/>
+          </a:prstGeom>
+          <a:noFill/>
+          <a:ln/>
+        </p:spPr>
+        <p:txBody>
+          <a:bodyPr wrap="square" rtlCol="0" anchor="ctr"/>
+          <a:lstStyle/>
+          <a:p>
+            <a:pPr rtl="1" algn="r" indent="0" marL="0">
+              <a:buNone/>
+            </a:pPr>
+            <a:r>
+              <a:rPr lang="en-US" sz="1400" b="1" dirty="0">
+                <a:solidFill>
+                  <a:srgbClr val="EAF2FB"/>
+                </a:solidFill>
+                <a:latin typeface="Arial" pitchFamily="34" charset="0"/>
+                <a:ea typeface="Arial" pitchFamily="34" charset="-122"/>
+                <a:cs typeface="Arial" pitchFamily="34" charset="-120"/>
+              </a:rPr>
+              <a:t>הסלמת דומיין</a:t>
+            </a:r>
+            <a:endParaRPr lang="en-US" sz="1400" dirty="0"/>
+          </a:p>
+        </p:txBody>
+      </p:sp>
+      <p:sp>
+        <p:nvSpPr>
+          <p:cNvPr id="33" name="Text 31"/>
+          <p:cNvSpPr/>
+          <p:nvPr/>
+        </p:nvSpPr>
+        <p:spPr>
+          <a:xfrm>
+            <a:off x="3584448" y="4846320"/>
+            <a:ext cx="2029968" cy="347472"/>
+          </a:xfrm>
+          <a:prstGeom prst="rect">
+            <a:avLst/>
+          </a:prstGeom>
+          <a:noFill/>
+          <a:ln/>
+        </p:spPr>
+        <p:txBody>
+          <a:bodyPr wrap="square" rtlCol="0" anchor="ctr"/>
+          <a:lstStyle/>
+          <a:p>
+            <a:pPr algn="r" indent="0" marL="0">
+              <a:buNone/>
+            </a:pPr>
+            <a:r>
+              <a:rPr lang="en-US" sz="1050" dirty="0">
+                <a:solidFill>
+                  <a:srgbClr val="9FB4CE"/>
+                </a:solidFill>
+                <a:latin typeface="Courier New" pitchFamily="34" charset="0"/>
+                <a:ea typeface="Courier New" pitchFamily="34" charset="-122"/>
+                <a:cs typeface="Courier New" pitchFamily="34" charset="-120"/>
+              </a:rPr>
+              <a:t>DCSync · ADCS</a:t>
+            </a:r>
+            <a:endParaRPr lang="en-US" sz="1050" dirty="0"/>
+          </a:p>
+        </p:txBody>
+      </p:sp>
+      <p:sp>
+        <p:nvSpPr>
+          <p:cNvPr id="34" name="Shape 32"/>
+          <p:cNvSpPr/>
+          <p:nvPr/>
+        </p:nvSpPr>
+        <p:spPr>
+          <a:xfrm>
+            <a:off x="6364224" y="4206240"/>
+            <a:ext cx="2286000" cy="1097280"/>
+          </a:xfrm>
+          <a:prstGeom prst="roundRect">
+            <a:avLst>
+              <a:gd name="adj" fmla="val 7500"/>
+            </a:avLst>
+          </a:prstGeom>
+          <a:solidFill>
+            <a:srgbClr val="E5484D"/>
+          </a:solidFill>
+          <a:ln w="25400">
+            <a:solidFill>
+              <a:srgbClr val="E5484D"/>
+            </a:solidFill>
+            <a:prstDash val="solid"/>
+          </a:ln>
+          <a:effectLst>
+            <a:outerShdw sx="100000" sy="100000" kx="0" ky="0" algn="bl" rotWithShape="0" blurRad="101600" dist="38100" dir="5400000">
+              <a:srgbClr val="05080F">
+                <a:alpha val="55000"/>
+              </a:srgbClr>
+            </a:outerShdw>
+          </a:effectLst>
+        </p:spPr>
+      </p:sp>
+      <p:sp>
+        <p:nvSpPr>
+          <p:cNvPr id="35" name="Shape 33"/>
+          <p:cNvSpPr/>
+          <p:nvPr/>
+        </p:nvSpPr>
+        <p:spPr>
+          <a:xfrm>
+            <a:off x="8156448" y="4334256"/>
+            <a:ext cx="365760" cy="365760"/>
+          </a:xfrm>
+          <a:prstGeom prst="oval">
+            <a:avLst/>
+          </a:prstGeom>
+          <a:solidFill>
+            <a:srgbClr val="E5484D"/>
+          </a:solidFill>
+          <a:ln w="12700">
+            <a:solidFill>
+              <a:srgbClr val="E5484D"/>
+            </a:solidFill>
+            <a:prstDash val="solid"/>
+          </a:ln>
+        </p:spPr>
+      </p:sp>
+      <p:sp>
+        <p:nvSpPr>
+          <p:cNvPr id="36" name="Text 34"/>
+          <p:cNvSpPr/>
+          <p:nvPr/>
+        </p:nvSpPr>
+        <p:spPr>
+          <a:xfrm>
+            <a:off x="8156448" y="4334256"/>
+            <a:ext cx="365760" cy="365760"/>
+          </a:xfrm>
+          <a:prstGeom prst="rect">
+            <a:avLst/>
+          </a:prstGeom>
+          <a:noFill/>
+          <a:ln/>
+        </p:spPr>
+        <p:txBody>
+          <a:bodyPr wrap="square" rtlCol="0" anchor="ctr"/>
+          <a:lstStyle/>
+          <a:p>
+            <a:pPr algn="ctr" indent="0" marL="0">
+              <a:buNone/>
+            </a:pPr>
+            <a:r>
+              <a:rPr lang="en-US" sz="1300" b="1" dirty="0">
+                <a:solidFill>
+                  <a:srgbClr val="0C1626"/>
+                </a:solidFill>
+                <a:latin typeface="Arial" pitchFamily="34" charset="0"/>
+                <a:ea typeface="Arial" pitchFamily="34" charset="-122"/>
+                <a:cs typeface="Arial" pitchFamily="34" charset="-120"/>
+              </a:rPr>
+              <a:t>7</a:t>
+            </a:r>
+            <a:endParaRPr lang="en-US" sz="1300" dirty="0"/>
+          </a:p>
+        </p:txBody>
+      </p:sp>
+      <p:sp>
+        <p:nvSpPr>
+          <p:cNvPr id="37" name="Text 35"/>
+          <p:cNvSpPr/>
+          <p:nvPr/>
+        </p:nvSpPr>
+        <p:spPr>
+          <a:xfrm>
+            <a:off x="6492240" y="4352544"/>
+            <a:ext cx="1609344" cy="457200"/>
+          </a:xfrm>
+          <a:prstGeom prst="rect">
+            <a:avLst/>
+          </a:prstGeom>
+          <a:noFill/>
+          <a:ln/>
+        </p:spPr>
+        <p:txBody>
+          <a:bodyPr wrap="square" rtlCol="0" anchor="ctr"/>
+          <a:lstStyle/>
+          <a:p>
+            <a:pPr rtl="1" algn="r" indent="0" marL="0">
+              <a:buNone/>
+            </a:pPr>
+            <a:r>
+              <a:rPr lang="en-US" sz="1400" b="1" dirty="0">
+                <a:solidFill>
+                  <a:srgbClr val="0C1626"/>
+                </a:solidFill>
+                <a:latin typeface="Arial" pitchFamily="34" charset="0"/>
+                <a:ea typeface="Arial" pitchFamily="34" charset="-122"/>
+                <a:cs typeface="Arial" pitchFamily="34" charset="-120"/>
+              </a:rPr>
+              <a:t>Domain Admin</a:t>
+            </a:r>
+            <a:endParaRPr lang="en-US" sz="1400" dirty="0"/>
+          </a:p>
+        </p:txBody>
+      </p:sp>
+      <p:sp>
+        <p:nvSpPr>
+          <p:cNvPr id="38" name="Text 36"/>
+          <p:cNvSpPr/>
+          <p:nvPr/>
+        </p:nvSpPr>
+        <p:spPr>
+          <a:xfrm>
+            <a:off x="6492240" y="4846320"/>
+            <a:ext cx="2029968" cy="347472"/>
+          </a:xfrm>
+          <a:prstGeom prst="rect">
+            <a:avLst/>
+          </a:prstGeom>
+          <a:noFill/>
+          <a:ln/>
+        </p:spPr>
+        <p:txBody>
+          <a:bodyPr wrap="square" rtlCol="0" anchor="ctr"/>
+          <a:lstStyle/>
+          <a:p>
+            <a:pPr algn="r" indent="0" marL="0">
+              <a:buNone/>
+            </a:pPr>
+            <a:r>
+              <a:rPr lang="en-US" sz="1050" dirty="0">
+                <a:solidFill>
+                  <a:srgbClr val="0C1626"/>
+                </a:solidFill>
+                <a:latin typeface="Courier New" pitchFamily="34" charset="0"/>
+                <a:ea typeface="Courier New" pitchFamily="34" charset="-122"/>
+                <a:cs typeface="Courier New" pitchFamily="34" charset="-120"/>
+              </a:rPr>
+              <a:t>root.txt</a:t>
+            </a:r>
+            <a:endParaRPr lang="en-US" sz="1050" dirty="0"/>
+          </a:p>
+        </p:txBody>
+      </p:sp>
+      <p:sp>
+        <p:nvSpPr>
+          <p:cNvPr id="39" name="Text 37"/>
+          <p:cNvSpPr/>
+          <p:nvPr/>
+        </p:nvSpPr>
+        <p:spPr>
+          <a:xfrm>
+            <a:off x="9272016" y="1472184"/>
+            <a:ext cx="2286000" cy="274320"/>
+          </a:xfrm>
+          <a:prstGeom prst="rect">
+            <a:avLst/>
+          </a:prstGeom>
+          <a:noFill/>
+          <a:ln/>
+        </p:spPr>
+        <p:txBody>
+          <a:bodyPr wrap="square" rtlCol="0" anchor="ctr"/>
+          <a:lstStyle/>
+          <a:p>
+            <a:pPr algn="ctr" indent="0" marL="0">
+              <a:buNone/>
+            </a:pPr>
+            <a:r>
+              <a:rPr lang="en-US" sz="1000" b="1" dirty="0">
+                <a:solidFill>
+                  <a:srgbClr val="35D0E0"/>
+                </a:solidFill>
+                <a:latin typeface="Arial" pitchFamily="34" charset="0"/>
+                <a:ea typeface="Arial" pitchFamily="34" charset="-122"/>
+                <a:cs typeface="Arial" pitchFamily="34" charset="-120"/>
+              </a:rPr>
+              <a:t>START</a:t>
+            </a:r>
+            <a:endParaRPr lang="en-US" sz="1000" dirty="0"/>
+          </a:p>
+        </p:txBody>
+      </p:sp>
+      <p:sp>
+        <p:nvSpPr>
+          <p:cNvPr id="40" name="Text 38"/>
+          <p:cNvSpPr/>
+          <p:nvPr/>
+        </p:nvSpPr>
+        <p:spPr>
+          <a:xfrm>
+            <a:off x="6364224" y="5340096"/>
+            <a:ext cx="2286000" cy="274320"/>
+          </a:xfrm>
+          <a:prstGeom prst="rect">
+            <a:avLst/>
+          </a:prstGeom>
+          <a:noFill/>
+          <a:ln/>
+        </p:spPr>
+        <p:txBody>
+          <a:bodyPr wrap="square" rtlCol="0" anchor="ctr"/>
+          <a:lstStyle/>
+          <a:p>
+            <a:pPr algn="ctr" indent="0" marL="0">
+              <a:buNone/>
+            </a:pPr>
+            <a:r>
+              <a:rPr lang="en-US" sz="1000" b="1" dirty="0">
+                <a:solidFill>
+                  <a:srgbClr val="E5484D"/>
+                </a:solidFill>
+                <a:latin typeface="Arial" pitchFamily="34" charset="0"/>
+                <a:ea typeface="Arial" pitchFamily="34" charset="-122"/>
+                <a:cs typeface="Arial" pitchFamily="34" charset="-120"/>
+              </a:rPr>
+              <a:t>GOAL</a:t>
+            </a:r>
+            <a:endParaRPr lang="en-US" sz="1000" dirty="0"/>
+          </a:p>
+        </p:txBody>
+      </p:sp>
+      <p:sp>
+        <p:nvSpPr>
+          <p:cNvPr id="41" name="Shape 39"/>
+          <p:cNvSpPr/>
+          <p:nvPr/>
+        </p:nvSpPr>
+        <p:spPr>
+          <a:xfrm>
+            <a:off x="8650224" y="2331720"/>
+            <a:ext cx="621792" cy="0"/>
+          </a:xfrm>
+          <a:prstGeom prst="line">
+            <a:avLst/>
+          </a:prstGeom>
+          <a:noFill/>
+          <a:ln w="31750">
+            <a:solidFill>
+              <a:srgbClr val="35D0E0"/>
+            </a:solidFill>
+            <a:prstDash val="solid"/>
+            <a:headEnd type="triangle"/>
+            <a:tailEnd type="none"/>
+          </a:ln>
+        </p:spPr>
+      </p:sp>
+      <p:sp>
+        <p:nvSpPr>
+          <p:cNvPr id="42" name="Shape 40"/>
+          <p:cNvSpPr/>
+          <p:nvPr/>
+        </p:nvSpPr>
+        <p:spPr>
+          <a:xfrm>
+            <a:off x="5742432" y="2331720"/>
+            <a:ext cx="621792" cy="0"/>
+          </a:xfrm>
+          <a:prstGeom prst="line">
+            <a:avLst/>
+          </a:prstGeom>
+          <a:noFill/>
+          <a:ln w="31750">
+            <a:solidFill>
+              <a:srgbClr val="35D0E0"/>
+            </a:solidFill>
+            <a:prstDash val="solid"/>
+            <a:headEnd type="triangle"/>
+            <a:tailEnd type="none"/>
+          </a:ln>
+        </p:spPr>
+      </p:sp>
+      <p:sp>
+        <p:nvSpPr>
+          <p:cNvPr id="43" name="Shape 41"/>
+          <p:cNvSpPr/>
+          <p:nvPr/>
+        </p:nvSpPr>
+        <p:spPr>
+          <a:xfrm>
+            <a:off x="2834640" y="2331720"/>
+            <a:ext cx="621792" cy="0"/>
+          </a:xfrm>
+          <a:prstGeom prst="line">
+            <a:avLst/>
+          </a:prstGeom>
+          <a:noFill/>
+          <a:ln w="31750">
+            <a:solidFill>
+              <a:srgbClr val="35D0E0"/>
+            </a:solidFill>
+            <a:prstDash val="solid"/>
+            <a:headEnd type="triangle"/>
+            <a:tailEnd type="none"/>
+          </a:ln>
+        </p:spPr>
+      </p:sp>
+      <p:sp>
+        <p:nvSpPr>
+          <p:cNvPr id="44" name="Shape 42"/>
+          <p:cNvSpPr/>
+          <p:nvPr/>
+        </p:nvSpPr>
+        <p:spPr>
+          <a:xfrm>
+            <a:off x="1691640" y="2880360"/>
+            <a:ext cx="0" cy="1325880"/>
+          </a:xfrm>
+          <a:prstGeom prst="line">
+            <a:avLst/>
+          </a:prstGeom>
+          <a:noFill/>
+          <a:ln w="31750">
+            <a:solidFill>
+              <a:srgbClr val="35D0E0"/>
+            </a:solidFill>
+            <a:prstDash val="solid"/>
+            <a:headEnd type="none"/>
+            <a:tailEnd type="triangle"/>
+          </a:ln>
+        </p:spPr>
+      </p:sp>
+      <p:sp>
+        <p:nvSpPr>
+          <p:cNvPr id="45" name="Shape 43"/>
+          <p:cNvSpPr/>
+          <p:nvPr/>
+        </p:nvSpPr>
+        <p:spPr>
+          <a:xfrm>
+            <a:off x="2834640" y="4754880"/>
+            <a:ext cx="621792" cy="0"/>
+          </a:xfrm>
+          <a:prstGeom prst="line">
+            <a:avLst/>
+          </a:prstGeom>
+          <a:noFill/>
+          <a:ln w="31750">
+            <a:solidFill>
+              <a:srgbClr val="35D0E0"/>
+            </a:solidFill>
+            <a:prstDash val="solid"/>
+            <a:headEnd type="none"/>
+            <a:tailEnd type="triangle"/>
+          </a:ln>
+        </p:spPr>
+      </p:sp>
+      <p:sp>
+        <p:nvSpPr>
+          <p:cNvPr id="46" name="Shape 44"/>
+          <p:cNvSpPr/>
+          <p:nvPr/>
+        </p:nvSpPr>
+        <p:spPr>
+          <a:xfrm>
+            <a:off x="5742432" y="4754880"/>
+            <a:ext cx="621792" cy="0"/>
+          </a:xfrm>
+          <a:prstGeom prst="line">
+            <a:avLst/>
+          </a:prstGeom>
+          <a:noFill/>
+          <a:ln w="31750">
+            <a:solidFill>
+              <a:srgbClr val="35D0E0"/>
+            </a:solidFill>
+            <a:prstDash val="solid"/>
+            <a:headEnd type="none"/>
+            <a:tailEnd type="triangle"/>
+          </a:ln>
+        </p:spPr>
+      </p:sp>
+      <p:sp>
+        <p:nvSpPr>
+          <p:cNvPr id="47" name="Shape 45"/>
+          <p:cNvSpPr/>
+          <p:nvPr/>
+        </p:nvSpPr>
+        <p:spPr>
+          <a:xfrm>
+            <a:off x="8650224" y="4754880"/>
+            <a:ext cx="402336" cy="0"/>
+          </a:xfrm>
+          <a:prstGeom prst="line">
+            <a:avLst/>
+          </a:prstGeom>
+          <a:noFill/>
+          <a:ln w="31750">
+            <a:solidFill>
+              <a:srgbClr val="35D0E0"/>
+            </a:solidFill>
+            <a:prstDash val="solid"/>
+            <a:headEnd type="none"/>
+            <a:tailEnd type="triangle"/>
+          </a:ln>
+        </p:spPr>
+      </p:sp>
+      <p:sp>
+        <p:nvSpPr>
+          <p:cNvPr id="48" name="Shape 46"/>
+          <p:cNvSpPr/>
+          <p:nvPr/>
+        </p:nvSpPr>
+        <p:spPr>
+          <a:xfrm>
+            <a:off x="9052560" y="4206240"/>
+            <a:ext cx="2587752" cy="1097280"/>
+          </a:xfrm>
+          <a:prstGeom prst="roundRect">
+            <a:avLst>
+              <a:gd name="adj" fmla="val 8333"/>
             </a:avLst>
           </a:prstGeom>
           <a:solidFill>
@@ -10291,30 +12498,30 @@
       </p:sp>
       <p:sp>
         <p:nvSpPr>
-          <p:cNvPr id="5" name="Text 3"/>
-          <p:cNvSpPr/>
-          <p:nvPr/>
-        </p:nvSpPr>
-        <p:spPr>
-          <a:xfrm>
-            <a:off x="7589520" y="1755648"/>
-            <a:ext cx="3840480" cy="768096"/>
-          </a:xfrm>
-          <a:prstGeom prst="rect">
-            <a:avLst/>
-          </a:prstGeom>
-          <a:noFill/>
-          <a:ln/>
-        </p:spPr>
-        <p:txBody>
-          <a:bodyPr wrap="square" rtlCol="0" anchor="ctr"/>
-          <a:lstStyle/>
-          <a:p>
-            <a:pPr algn="r" indent="0" marL="0">
-              <a:buNone/>
-            </a:pPr>
-            <a:r>
-              <a:rPr lang="en-US" sz="1550" b="1" dirty="0">
+          <p:cNvPr id="49" name="Text 47"/>
+          <p:cNvSpPr/>
+          <p:nvPr/>
+        </p:nvSpPr>
+        <p:spPr>
+          <a:xfrm>
+            <a:off x="9144000" y="4315968"/>
+            <a:ext cx="2377440" cy="329184"/>
+          </a:xfrm>
+          <a:prstGeom prst="rect">
+            <a:avLst/>
+          </a:prstGeom>
+          <a:noFill/>
+          <a:ln/>
+        </p:spPr>
+        <p:txBody>
+          <a:bodyPr wrap="square" rtlCol="0" anchor="ctr"/>
+          <a:lstStyle/>
+          <a:p>
+            <a:pPr rtl="1" algn="r" indent="0" marL="0">
+              <a:buNone/>
+            </a:pPr>
+            <a:r>
+              <a:rPr lang="en-US" sz="1300" b="1" dirty="0">
                 <a:solidFill>
                   <a:srgbClr val="F5A623"/>
                 </a:solidFill>
@@ -10322,22 +12529,22 @@
                 <a:ea typeface="Arial" pitchFamily="34" charset="-122"/>
                 <a:cs typeface="Arial" pitchFamily="34" charset="-120"/>
               </a:rPr>
-              <a:t>Kerberoasting / AS-REP</a:t>
-            </a:r>
-            <a:endParaRPr lang="en-US" sz="1550" dirty="0"/>
-          </a:p>
-        </p:txBody>
-      </p:sp>
-      <p:sp>
-        <p:nvSpPr>
-          <p:cNvPr id="6" name="Text 4"/>
-          <p:cNvSpPr/>
-          <p:nvPr/>
-        </p:nvSpPr>
-        <p:spPr>
-          <a:xfrm>
-            <a:off x="777240" y="1755648"/>
-            <a:ext cx="6675120" cy="768096"/>
+              <a:t>התוצאה</a:t>
+            </a:r>
+            <a:endParaRPr lang="en-US" sz="1300" dirty="0"/>
+          </a:p>
+        </p:txBody>
+      </p:sp>
+      <p:sp>
+        <p:nvSpPr>
+          <p:cNvPr id="50" name="Text 48"/>
+          <p:cNvSpPr/>
+          <p:nvPr/>
+        </p:nvSpPr>
+        <p:spPr>
+          <a:xfrm>
+            <a:off x="9144000" y="4663440"/>
+            <a:ext cx="2404872" cy="566928"/>
           </a:xfrm>
           <a:prstGeom prst="rect">
             <a:avLst/>
@@ -10351,12 +12558,12 @@
           <a:p>
             <a:pPr rtl="1" algn="r" indent="0" marL="0">
               <a:lnSpc>
-                <a:spcPct val="110000"/>
+                <a:spcPct val="105000"/>
               </a:lnSpc>
               <a:buNone/>
             </a:pPr>
             <a:r>
-              <a:rPr lang="en-US" sz="1450" dirty="0">
+              <a:rPr lang="en-US" sz="1050" dirty="0">
                 <a:solidFill>
                   <a:srgbClr val="EAF2FB"/>
                 </a:solidFill>
@@ -10364,72 +12571,77 @@
                 <a:ea typeface="Arial" pitchFamily="34" charset="-122"/>
                 <a:cs typeface="Arial" pitchFamily="34" charset="-120"/>
               </a:rPr>
-              <a:t>gMSA · סיסמאות חזקות · הפעלת pre-auth · ניטור בקשות TGS חריגות</a:t>
-            </a:r>
-            <a:endParaRPr lang="en-US" sz="1450" dirty="0"/>
-          </a:p>
-        </p:txBody>
-      </p:sp>
-      <p:sp>
-        <p:nvSpPr>
-          <p:cNvPr id="7" name="Shape 5"/>
-          <p:cNvSpPr/>
-          <p:nvPr/>
-        </p:nvSpPr>
-        <p:spPr>
-          <a:xfrm>
-            <a:off x="548640" y="2743200"/>
-            <a:ext cx="11091672" cy="987552"/>
-          </a:xfrm>
-          <a:prstGeom prst="roundRect">
-            <a:avLst>
-              <a:gd name="adj" fmla="val 9259"/>
-            </a:avLst>
-          </a:prstGeom>
-          <a:solidFill>
-            <a:srgbClr val="15294A"/>
-          </a:solidFill>
-          <a:ln w="12700">
-            <a:solidFill>
-              <a:srgbClr val="24406B"/>
-            </a:solidFill>
-            <a:prstDash val="solid"/>
-          </a:ln>
-          <a:effectLst>
-            <a:outerShdw sx="100000" sy="100000" kx="0" ky="0" algn="bl" rotWithShape="0" blurRad="101600" dist="38100" dir="5400000">
-              <a:srgbClr val="05080F">
-                <a:alpha val="55000"/>
-              </a:srgbClr>
-            </a:outerShdw>
-          </a:effectLst>
-        </p:spPr>
-      </p:sp>
-      <p:sp>
-        <p:nvSpPr>
-          <p:cNvPr id="8" name="Text 6"/>
-          <p:cNvSpPr/>
-          <p:nvPr/>
-        </p:nvSpPr>
-        <p:spPr>
-          <a:xfrm>
-            <a:off x="7589520" y="2852928"/>
-            <a:ext cx="3840480" cy="768096"/>
-          </a:xfrm>
-          <a:prstGeom prst="rect">
-            <a:avLst/>
-          </a:prstGeom>
-          <a:noFill/>
-          <a:ln/>
-        </p:spPr>
-        <p:txBody>
-          <a:bodyPr wrap="square" rtlCol="0" anchor="ctr"/>
-          <a:lstStyle/>
-          <a:p>
-            <a:pPr algn="r" indent="0" marL="0">
-              <a:buNone/>
-            </a:pPr>
-            <a:r>
-              <a:rPr lang="en-US" sz="1550" b="1" dirty="0">
+              <a:t>dump מלא של NTDS.dit · גיבוב krbtgt · Golden Ticket לשרידוּת</a:t>
+            </a:r>
+            <a:endParaRPr lang="en-US" sz="1050" dirty="0"/>
+          </a:p>
+        </p:txBody>
+      </p:sp>
+      <p:sp>
+        <p:nvSpPr>
+          <p:cNvPr id="51" name="Text 49"/>
+          <p:cNvSpPr/>
+          <p:nvPr/>
+        </p:nvSpPr>
+        <p:spPr>
+          <a:xfrm>
+            <a:off x="548640" y="5797296"/>
+            <a:ext cx="11091672" cy="329184"/>
+          </a:xfrm>
+          <a:prstGeom prst="rect">
+            <a:avLst/>
+          </a:prstGeom>
+          <a:noFill/>
+          <a:ln/>
+        </p:spPr>
+        <p:txBody>
+          <a:bodyPr wrap="square" rtlCol="0" anchor="ctr"/>
+          <a:lstStyle/>
+          <a:p>
+            <a:pPr rtl="1" algn="ctr" indent="0" marL="0">
+              <a:buNone/>
+            </a:pPr>
+            <a:r>
+              <a:rPr lang="en-US" sz="1300" dirty="0">
+                <a:solidFill>
+                  <a:srgbClr val="35D0E0"/>
+                </a:solidFill>
+                <a:latin typeface="Arial" pitchFamily="34" charset="0"/>
+                <a:ea typeface="Arial" pitchFamily="34" charset="-122"/>
+                <a:cs typeface="Arial" pitchFamily="34" charset="-120"/>
+              </a:rPr>
+              <a:t>כל חוליה מזינה את הבא — קטיעת השרשרת בכל שלב עוצרת את התקיפה כולה.</a:t>
+            </a:r>
+            <a:endParaRPr lang="en-US" sz="1300" dirty="0"/>
+          </a:p>
+        </p:txBody>
+      </p:sp>
+      <p:sp>
+        <p:nvSpPr>
+          <p:cNvPr id="52" name="Text 50"/>
+          <p:cNvSpPr/>
+          <p:nvPr/>
+        </p:nvSpPr>
+        <p:spPr>
+          <a:xfrm>
+            <a:off x="548640" y="6199632"/>
+            <a:ext cx="11091672" cy="310896"/>
+          </a:xfrm>
+          <a:prstGeom prst="rect">
+            <a:avLst/>
+          </a:prstGeom>
+          <a:noFill/>
+          <a:ln/>
+        </p:spPr>
+        <p:txBody>
+          <a:bodyPr wrap="square" rtlCol="0" anchor="ctr"/>
+          <a:lstStyle/>
+          <a:p>
+            <a:pPr algn="ctr" indent="0" marL="0">
+              <a:buNone/>
+            </a:pPr>
+            <a:r>
+              <a:rPr lang="en-US" sz="1100" b="1" dirty="0">
                 <a:solidFill>
                   <a:srgbClr val="F5A623"/>
                 </a:solidFill>
@@ -10437,320 +12649,23 @@
                 <a:ea typeface="Arial" pitchFamily="34" charset="-122"/>
                 <a:cs typeface="Arial" pitchFamily="34" charset="-120"/>
               </a:rPr>
-              <a:t>ACL / BloodHound paths</a:t>
-            </a:r>
-            <a:endParaRPr lang="en-US" sz="1550" dirty="0"/>
-          </a:p>
-        </p:txBody>
-      </p:sp>
-      <p:sp>
-        <p:nvSpPr>
-          <p:cNvPr id="9" name="Text 7"/>
-          <p:cNvSpPr/>
-          <p:nvPr/>
-        </p:nvSpPr>
-        <p:spPr>
-          <a:xfrm>
-            <a:off x="777240" y="2852928"/>
-            <a:ext cx="6675120" cy="768096"/>
-          </a:xfrm>
-          <a:prstGeom prst="rect">
-            <a:avLst/>
-          </a:prstGeom>
-          <a:noFill/>
-          <a:ln/>
-        </p:spPr>
-        <p:txBody>
-          <a:bodyPr wrap="square" rtlCol="0" anchor="ctr"/>
-          <a:lstStyle/>
-          <a:p>
-            <a:pPr rtl="1" algn="r" indent="0" marL="0">
-              <a:lnSpc>
-                <a:spcPct val="110000"/>
-              </a:lnSpc>
-              <a:buNone/>
-            </a:pPr>
-            <a:r>
-              <a:rPr lang="en-US" sz="1450" dirty="0">
-                <a:solidFill>
-                  <a:srgbClr val="EAF2FB"/>
-                </a:solidFill>
-                <a:latin typeface="Arial" pitchFamily="34" charset="0"/>
-                <a:ea typeface="Arial" pitchFamily="34" charset="-122"/>
-                <a:cs typeface="Arial" pitchFamily="34" charset="-120"/>
-              </a:rPr>
-              <a:t>עקרון ההרשאה המזערית · ביקורת ACL תקופתית · הסרת הרשאות עודפות</a:t>
-            </a:r>
-            <a:endParaRPr lang="en-US" sz="1450" dirty="0"/>
-          </a:p>
-        </p:txBody>
-      </p:sp>
-      <p:sp>
-        <p:nvSpPr>
-          <p:cNvPr id="10" name="Shape 8"/>
-          <p:cNvSpPr/>
-          <p:nvPr/>
-        </p:nvSpPr>
-        <p:spPr>
-          <a:xfrm>
-            <a:off x="548640" y="3840480"/>
-            <a:ext cx="11091672" cy="987552"/>
-          </a:xfrm>
-          <a:prstGeom prst="roundRect">
-            <a:avLst>
-              <a:gd name="adj" fmla="val 9259"/>
-            </a:avLst>
-          </a:prstGeom>
-          <a:solidFill>
-            <a:srgbClr val="1B3C63"/>
-          </a:solidFill>
-          <a:ln w="12700">
-            <a:solidFill>
-              <a:srgbClr val="24406B"/>
-            </a:solidFill>
-            <a:prstDash val="solid"/>
-          </a:ln>
-          <a:effectLst>
-            <a:outerShdw sx="100000" sy="100000" kx="0" ky="0" algn="bl" rotWithShape="0" blurRad="101600" dist="38100" dir="5400000">
-              <a:srgbClr val="05080F">
-                <a:alpha val="55000"/>
-              </a:srgbClr>
-            </a:outerShdw>
-          </a:effectLst>
-        </p:spPr>
-      </p:sp>
-      <p:sp>
-        <p:nvSpPr>
-          <p:cNvPr id="11" name="Text 9"/>
-          <p:cNvSpPr/>
-          <p:nvPr/>
-        </p:nvSpPr>
-        <p:spPr>
-          <a:xfrm>
-            <a:off x="7589520" y="3950208"/>
-            <a:ext cx="3840480" cy="768096"/>
-          </a:xfrm>
-          <a:prstGeom prst="rect">
-            <a:avLst/>
-          </a:prstGeom>
-          <a:noFill/>
-          <a:ln/>
-        </p:spPr>
-        <p:txBody>
-          <a:bodyPr wrap="square" rtlCol="0" anchor="ctr"/>
-          <a:lstStyle/>
-          <a:p>
-            <a:pPr algn="r" indent="0" marL="0">
-              <a:buNone/>
-            </a:pPr>
-            <a:r>
-              <a:rPr lang="en-US" sz="1550" b="1" dirty="0">
-                <a:solidFill>
-                  <a:srgbClr val="F5A623"/>
-                </a:solidFill>
-                <a:latin typeface="Arial" pitchFamily="34" charset="0"/>
-                <a:ea typeface="Arial" pitchFamily="34" charset="-122"/>
-                <a:cs typeface="Arial" pitchFamily="34" charset="-120"/>
-              </a:rPr>
-              <a:t>Pass-the-Hash / Ticket</a:t>
-            </a:r>
-            <a:endParaRPr lang="en-US" sz="1550" dirty="0"/>
-          </a:p>
-        </p:txBody>
-      </p:sp>
-      <p:sp>
-        <p:nvSpPr>
-          <p:cNvPr id="12" name="Text 10"/>
-          <p:cNvSpPr/>
-          <p:nvPr/>
-        </p:nvSpPr>
-        <p:spPr>
-          <a:xfrm>
-            <a:off x="777240" y="3950208"/>
-            <a:ext cx="6675120" cy="768096"/>
-          </a:xfrm>
-          <a:prstGeom prst="rect">
-            <a:avLst/>
-          </a:prstGeom>
-          <a:noFill/>
-          <a:ln/>
-        </p:spPr>
-        <p:txBody>
-          <a:bodyPr wrap="square" rtlCol="0" anchor="ctr"/>
-          <a:lstStyle/>
-          <a:p>
-            <a:pPr rtl="1" algn="r" indent="0" marL="0">
-              <a:lnSpc>
-                <a:spcPct val="110000"/>
-              </a:lnSpc>
-              <a:buNone/>
-            </a:pPr>
-            <a:r>
-              <a:rPr lang="en-US" sz="1450" dirty="0">
-                <a:solidFill>
-                  <a:srgbClr val="EAF2FB"/>
-                </a:solidFill>
-                <a:latin typeface="Arial" pitchFamily="34" charset="0"/>
-                <a:ea typeface="Arial" pitchFamily="34" charset="-122"/>
-                <a:cs typeface="Arial" pitchFamily="34" charset="-120"/>
-              </a:rPr>
-              <a:t>מודל שכבות (Tiered / Enterprise Access) · Credential Guard · LAPS</a:t>
-            </a:r>
-            <a:endParaRPr lang="en-US" sz="1450" dirty="0"/>
-          </a:p>
-        </p:txBody>
-      </p:sp>
-      <p:sp>
-        <p:nvSpPr>
-          <p:cNvPr id="13" name="Shape 11"/>
-          <p:cNvSpPr/>
-          <p:nvPr/>
-        </p:nvSpPr>
-        <p:spPr>
-          <a:xfrm>
-            <a:off x="548640" y="4937760"/>
-            <a:ext cx="11091672" cy="987552"/>
-          </a:xfrm>
-          <a:prstGeom prst="roundRect">
-            <a:avLst>
-              <a:gd name="adj" fmla="val 9259"/>
-            </a:avLst>
-          </a:prstGeom>
-          <a:solidFill>
-            <a:srgbClr val="15294A"/>
-          </a:solidFill>
-          <a:ln w="12700">
-            <a:solidFill>
-              <a:srgbClr val="24406B"/>
-            </a:solidFill>
-            <a:prstDash val="solid"/>
-          </a:ln>
-          <a:effectLst>
-            <a:outerShdw sx="100000" sy="100000" kx="0" ky="0" algn="bl" rotWithShape="0" blurRad="101600" dist="38100" dir="5400000">
-              <a:srgbClr val="05080F">
-                <a:alpha val="55000"/>
-              </a:srgbClr>
-            </a:outerShdw>
-          </a:effectLst>
-        </p:spPr>
-      </p:sp>
-      <p:sp>
-        <p:nvSpPr>
-          <p:cNvPr id="14" name="Text 12"/>
-          <p:cNvSpPr/>
-          <p:nvPr/>
-        </p:nvSpPr>
-        <p:spPr>
-          <a:xfrm>
-            <a:off x="7589520" y="5047488"/>
-            <a:ext cx="3840480" cy="768096"/>
-          </a:xfrm>
-          <a:prstGeom prst="rect">
-            <a:avLst/>
-          </a:prstGeom>
-          <a:noFill/>
-          <a:ln/>
-        </p:spPr>
-        <p:txBody>
-          <a:bodyPr wrap="square" rtlCol="0" anchor="ctr"/>
-          <a:lstStyle/>
-          <a:p>
-            <a:pPr algn="r" indent="0" marL="0">
-              <a:buNone/>
-            </a:pPr>
-            <a:r>
-              <a:rPr lang="en-US" sz="1550" b="1" dirty="0">
-                <a:solidFill>
-                  <a:srgbClr val="F5A623"/>
-                </a:solidFill>
-                <a:latin typeface="Arial" pitchFamily="34" charset="0"/>
-                <a:ea typeface="Arial" pitchFamily="34" charset="-122"/>
-                <a:cs typeface="Arial" pitchFamily="34" charset="-120"/>
-              </a:rPr>
-              <a:t>DCSync / Delegation / ADCS</a:t>
-            </a:r>
-            <a:endParaRPr lang="en-US" sz="1550" dirty="0"/>
-          </a:p>
-        </p:txBody>
-      </p:sp>
-      <p:sp>
-        <p:nvSpPr>
-          <p:cNvPr id="15" name="Text 13"/>
-          <p:cNvSpPr/>
-          <p:nvPr/>
-        </p:nvSpPr>
-        <p:spPr>
-          <a:xfrm>
-            <a:off x="777240" y="5047488"/>
-            <a:ext cx="6675120" cy="768096"/>
-          </a:xfrm>
-          <a:prstGeom prst="rect">
-            <a:avLst/>
-          </a:prstGeom>
-          <a:noFill/>
-          <a:ln/>
-        </p:spPr>
-        <p:txBody>
-          <a:bodyPr wrap="square" rtlCol="0" anchor="ctr"/>
-          <a:lstStyle/>
-          <a:p>
-            <a:pPr rtl="1" algn="r" indent="0" marL="0">
-              <a:lnSpc>
-                <a:spcPct val="110000"/>
-              </a:lnSpc>
-              <a:buNone/>
-            </a:pPr>
-            <a:r>
-              <a:rPr lang="en-US" sz="1450" dirty="0">
-                <a:solidFill>
-                  <a:srgbClr val="EAF2FB"/>
-                </a:solidFill>
-                <a:latin typeface="Arial" pitchFamily="34" charset="0"/>
-                <a:ea typeface="Arial" pitchFamily="34" charset="-122"/>
-                <a:cs typeface="Arial" pitchFamily="34" charset="-120"/>
-              </a:rPr>
-              <a:t>הגבלת הרשאות שכפול · חיזוק תבניות ADCS · ניטור אירועי 4662/4769</a:t>
-            </a:r>
-            <a:endParaRPr lang="en-US" sz="1450" dirty="0"/>
-          </a:p>
-        </p:txBody>
-      </p:sp>
-      <p:sp>
-        <p:nvSpPr>
-          <p:cNvPr id="16" name="Text 14"/>
-          <p:cNvSpPr/>
-          <p:nvPr/>
-        </p:nvSpPr>
-        <p:spPr>
-          <a:xfrm>
-            <a:off x="548640" y="6080760"/>
-            <a:ext cx="11091672" cy="365760"/>
-          </a:xfrm>
-          <a:prstGeom prst="rect">
-            <a:avLst/>
-          </a:prstGeom>
-          <a:noFill/>
-          <a:ln/>
-        </p:spPr>
-        <p:txBody>
-          <a:bodyPr wrap="square" rtlCol="0" anchor="ctr"/>
-          <a:lstStyle/>
-          <a:p>
-            <a:pPr rtl="1" algn="ctr" indent="0" marL="0">
-              <a:buNone/>
-            </a:pPr>
-            <a:r>
-              <a:rPr lang="en-US" sz="1300" dirty="0">
-                <a:solidFill>
-                  <a:srgbClr val="35D0E0"/>
-                </a:solidFill>
-                <a:latin typeface="Arial" pitchFamily="34" charset="0"/>
-                <a:ea typeface="Arial" pitchFamily="34" charset="-122"/>
-                <a:cs typeface="Arial" pitchFamily="34" charset="-120"/>
-              </a:rPr>
-              <a:t>מיפוי מלא של כל טכניקה למזהי MITRE ATT&amp;CK מופיע במאמר המלווה ובקבצי ה-findings.</a:t>
-            </a:r>
-            <a:endParaRPr lang="en-US" sz="1300" dirty="0"/>
+              <a:t>מעבדות HTB לתרגול השרשרת:  </a:t>
+            </a:r>
+            <a:pPr algn="ctr" indent="0" marL="0">
+              <a:buNone/>
+            </a:pPr>
+            <a:r>
+              <a:rPr lang="en-US" sz="1100" dirty="0">
+                <a:solidFill>
+                  <a:srgbClr val="9FB4CE"/>
+                </a:solidFill>
+                <a:latin typeface="Arial" pitchFamily="34" charset="0"/>
+                <a:ea typeface="Arial" pitchFamily="34" charset="-122"/>
+                <a:cs typeface="Arial" pitchFamily="34" charset="-120"/>
+              </a:rPr>
+              <a:t>Forest · Sauna · Active · Blackfield · Cascade · Support  |  Pro Labs: Dante · Zephyr · Cerberus</a:t>
+            </a:r>
+            <a:endParaRPr lang="en-US" sz="1100" dirty="0"/>
           </a:p>
         </p:txBody>
       </p:sp>
